--- a/templates/MDA QA INTG_Slide2.pptx
+++ b/templates/MDA QA INTG_Slide2.pptx
@@ -2,10 +2,10 @@
 <file path=ppt/presentation.xml><?xml version="1.0" encoding="utf-8"?>
 <p:presentation xmlns:a="http://schemas.openxmlformats.org/drawingml/2006/main" xmlns:r="http://schemas.openxmlformats.org/officeDocument/2006/relationships" xmlns:p="http://schemas.openxmlformats.org/presentationml/2006/main" saveSubsetFonts="1">
   <p:sldMasterIdLst>
-    <p:sldMasterId id="2147483648" r:id="rId1"/>
+    <p:sldMasterId id="2147483660" r:id="rId1"/>
   </p:sldMasterIdLst>
   <p:sldIdLst>
-    <p:sldId id="290" r:id="rId2"/>
+    <p:sldId id="257" r:id="rId2"/>
   </p:sldIdLst>
   <p:sldSz cx="12192000" cy="6858000"/>
   <p:notesSz cx="6858000" cy="9144000"/>
@@ -126,13 +126,7 @@
       </p:grpSpPr>
       <p:sp>
         <p:nvSpPr>
-          <p:cNvPr id="2" name="Title 1">
-            <a:extLst>
-              <a:ext uri="{FF2B5EF4-FFF2-40B4-BE49-F238E27FC236}">
-                <a16:creationId xmlns:a16="http://schemas.microsoft.com/office/drawing/2014/main" id="{07F3974D-F1FB-4EAE-598B-6E7E5503B133}"/>
-              </a:ext>
-            </a:extLst>
-          </p:cNvPr>
+          <p:cNvPr id="2" name="Title 1"/>
           <p:cNvSpPr>
             <a:spLocks noGrp="1"/>
           </p:cNvSpPr>
@@ -142,17 +136,13 @@
         </p:nvSpPr>
         <p:spPr>
           <a:xfrm>
-            <a:off x="1524000" y="1122363"/>
-            <a:ext cx="9144000" cy="2387600"/>
+            <a:off x="914400" y="2130426"/>
+            <a:ext cx="10363200" cy="1470025"/>
           </a:xfrm>
         </p:spPr>
         <p:txBody>
-          <a:bodyPr anchor="b"/>
-          <a:lstStyle>
-            <a:lvl1pPr algn="ctr">
-              <a:defRPr sz="6000"/>
-            </a:lvl1pPr>
-          </a:lstStyle>
+          <a:bodyPr/>
+          <a:lstStyle/>
           <a:p>
             <a:r>
               <a:rPr lang="en-US"/>
@@ -163,13 +153,7 @@
       </p:sp>
       <p:sp>
         <p:nvSpPr>
-          <p:cNvPr id="3" name="Subtitle 2">
-            <a:extLst>
-              <a:ext uri="{FF2B5EF4-FFF2-40B4-BE49-F238E27FC236}">
-                <a16:creationId xmlns:a16="http://schemas.microsoft.com/office/drawing/2014/main" id="{5A2FD27A-BF71-CD34-F2E6-6EB40677F790}"/>
-              </a:ext>
-            </a:extLst>
-          </p:cNvPr>
+          <p:cNvPr id="3" name="Subtitle 2"/>
           <p:cNvSpPr>
             <a:spLocks noGrp="1"/>
           </p:cNvSpPr>
@@ -179,8 +163,8 @@
         </p:nvSpPr>
         <p:spPr>
           <a:xfrm>
-            <a:off x="1524000" y="3602038"/>
-            <a:ext cx="9144000" cy="1655762"/>
+            <a:off x="1828800" y="3886200"/>
+            <a:ext cx="8534400" cy="1752600"/>
           </a:xfrm>
         </p:spPr>
         <p:txBody>
@@ -188,39 +172,93 @@
           <a:lstStyle>
             <a:lvl1pPr marL="0" indent="0" algn="ctr">
               <a:buNone/>
-              <a:defRPr sz="2400"/>
+              <a:defRPr>
+                <a:solidFill>
+                  <a:schemeClr val="tx1">
+                    <a:tint val="75000"/>
+                  </a:schemeClr>
+                </a:solidFill>
+              </a:defRPr>
             </a:lvl1pPr>
             <a:lvl2pPr marL="457200" indent="0" algn="ctr">
               <a:buNone/>
-              <a:defRPr sz="2000"/>
+              <a:defRPr>
+                <a:solidFill>
+                  <a:schemeClr val="tx1">
+                    <a:tint val="75000"/>
+                  </a:schemeClr>
+                </a:solidFill>
+              </a:defRPr>
             </a:lvl2pPr>
             <a:lvl3pPr marL="914400" indent="0" algn="ctr">
               <a:buNone/>
-              <a:defRPr sz="1800"/>
+              <a:defRPr>
+                <a:solidFill>
+                  <a:schemeClr val="tx1">
+                    <a:tint val="75000"/>
+                  </a:schemeClr>
+                </a:solidFill>
+              </a:defRPr>
             </a:lvl3pPr>
             <a:lvl4pPr marL="1371600" indent="0" algn="ctr">
               <a:buNone/>
-              <a:defRPr sz="1600"/>
+              <a:defRPr>
+                <a:solidFill>
+                  <a:schemeClr val="tx1">
+                    <a:tint val="75000"/>
+                  </a:schemeClr>
+                </a:solidFill>
+              </a:defRPr>
             </a:lvl4pPr>
             <a:lvl5pPr marL="1828800" indent="0" algn="ctr">
               <a:buNone/>
-              <a:defRPr sz="1600"/>
+              <a:defRPr>
+                <a:solidFill>
+                  <a:schemeClr val="tx1">
+                    <a:tint val="75000"/>
+                  </a:schemeClr>
+                </a:solidFill>
+              </a:defRPr>
             </a:lvl5pPr>
             <a:lvl6pPr marL="2286000" indent="0" algn="ctr">
               <a:buNone/>
-              <a:defRPr sz="1600"/>
+              <a:defRPr>
+                <a:solidFill>
+                  <a:schemeClr val="tx1">
+                    <a:tint val="75000"/>
+                  </a:schemeClr>
+                </a:solidFill>
+              </a:defRPr>
             </a:lvl6pPr>
             <a:lvl7pPr marL="2743200" indent="0" algn="ctr">
               <a:buNone/>
-              <a:defRPr sz="1600"/>
+              <a:defRPr>
+                <a:solidFill>
+                  <a:schemeClr val="tx1">
+                    <a:tint val="75000"/>
+                  </a:schemeClr>
+                </a:solidFill>
+              </a:defRPr>
             </a:lvl7pPr>
             <a:lvl8pPr marL="3200400" indent="0" algn="ctr">
               <a:buNone/>
-              <a:defRPr sz="1600"/>
+              <a:defRPr>
+                <a:solidFill>
+                  <a:schemeClr val="tx1">
+                    <a:tint val="75000"/>
+                  </a:schemeClr>
+                </a:solidFill>
+              </a:defRPr>
             </a:lvl8pPr>
             <a:lvl9pPr marL="3657600" indent="0" algn="ctr">
               <a:buNone/>
-              <a:defRPr sz="1600"/>
+              <a:defRPr>
+                <a:solidFill>
+                  <a:schemeClr val="tx1">
+                    <a:tint val="75000"/>
+                  </a:schemeClr>
+                </a:solidFill>
+              </a:defRPr>
             </a:lvl9pPr>
           </a:lstStyle>
           <a:p>
@@ -233,13 +271,7 @@
       </p:sp>
       <p:sp>
         <p:nvSpPr>
-          <p:cNvPr id="4" name="Date Placeholder 3">
-            <a:extLst>
-              <a:ext uri="{FF2B5EF4-FFF2-40B4-BE49-F238E27FC236}">
-                <a16:creationId xmlns:a16="http://schemas.microsoft.com/office/drawing/2014/main" id="{4FC1B482-9C55-148A-5E4A-424317F9CDF2}"/>
-              </a:ext>
-            </a:extLst>
-          </p:cNvPr>
+          <p:cNvPr id="4" name="Date Placeholder 3"/>
           <p:cNvSpPr>
             <a:spLocks noGrp="1"/>
           </p:cNvSpPr>
@@ -252,9 +284,9 @@
           <a:bodyPr/>
           <a:lstStyle/>
           <a:p>
-            <a:fld id="{28C98AA7-5CB1-4BE3-9D5B-E12C9AF6A819}" type="datetimeFigureOut">
+            <a:fld id="{5BCAD085-E8A6-8845-BD4E-CB4CCA059FC4}" type="datetimeFigureOut">
               <a:rPr lang="en-US" smtClean="0"/>
-              <a:t>3/12/2026</a:t>
+              <a:t>5/13/2026</a:t>
             </a:fld>
             <a:endParaRPr lang="en-US"/>
           </a:p>
@@ -262,13 +294,7 @@
       </p:sp>
       <p:sp>
         <p:nvSpPr>
-          <p:cNvPr id="5" name="Footer Placeholder 4">
-            <a:extLst>
-              <a:ext uri="{FF2B5EF4-FFF2-40B4-BE49-F238E27FC236}">
-                <a16:creationId xmlns:a16="http://schemas.microsoft.com/office/drawing/2014/main" id="{B51CCFB7-402A-BF8A-9F83-151D9537B61F}"/>
-              </a:ext>
-            </a:extLst>
-          </p:cNvPr>
+          <p:cNvPr id="5" name="Footer Placeholder 4"/>
           <p:cNvSpPr>
             <a:spLocks noGrp="1"/>
           </p:cNvSpPr>
@@ -287,13 +313,7 @@
       </p:sp>
       <p:sp>
         <p:nvSpPr>
-          <p:cNvPr id="6" name="Slide Number Placeholder 5">
-            <a:extLst>
-              <a:ext uri="{FF2B5EF4-FFF2-40B4-BE49-F238E27FC236}">
-                <a16:creationId xmlns:a16="http://schemas.microsoft.com/office/drawing/2014/main" id="{47F8E831-E9AD-C855-F7E7-BAF593CE0629}"/>
-              </a:ext>
-            </a:extLst>
-          </p:cNvPr>
+          <p:cNvPr id="6" name="Slide Number Placeholder 5"/>
           <p:cNvSpPr>
             <a:spLocks noGrp="1"/>
           </p:cNvSpPr>
@@ -306,7 +326,7 @@
           <a:bodyPr/>
           <a:lstStyle/>
           <a:p>
-            <a:fld id="{99BE45E6-D08F-4AE8-A5AB-B3E76F362C9F}" type="slidenum">
+            <a:fld id="{C1FF6DA9-008F-8B48-92A6-B652298478BF}" type="slidenum">
               <a:rPr lang="en-US" smtClean="0"/>
               <a:t>‹#›</a:t>
             </a:fld>
@@ -317,7 +337,7 @@
     </p:spTree>
     <p:extLst>
       <p:ext uri="{BB962C8B-B14F-4D97-AF65-F5344CB8AC3E}">
-        <p14:creationId xmlns:p14="http://schemas.microsoft.com/office/powerpoint/2010/main" val="3885721731"/>
+        <p14:creationId xmlns:p14="http://schemas.microsoft.com/office/powerpoint/2010/main" val="387800369"/>
       </p:ext>
     </p:extLst>
   </p:cSld>
@@ -346,13 +366,7 @@
       </p:grpSpPr>
       <p:sp>
         <p:nvSpPr>
-          <p:cNvPr id="2" name="Title 1">
-            <a:extLst>
-              <a:ext uri="{FF2B5EF4-FFF2-40B4-BE49-F238E27FC236}">
-                <a16:creationId xmlns:a16="http://schemas.microsoft.com/office/drawing/2014/main" id="{9470B597-598F-BF85-2484-4A89E3BAD29B}"/>
-              </a:ext>
-            </a:extLst>
-          </p:cNvPr>
+          <p:cNvPr id="2" name="Title 1"/>
           <p:cNvSpPr>
             <a:spLocks noGrp="1"/>
           </p:cNvSpPr>
@@ -374,13 +388,7 @@
       </p:sp>
       <p:sp>
         <p:nvSpPr>
-          <p:cNvPr id="3" name="Vertical Text Placeholder 2">
-            <a:extLst>
-              <a:ext uri="{FF2B5EF4-FFF2-40B4-BE49-F238E27FC236}">
-                <a16:creationId xmlns:a16="http://schemas.microsoft.com/office/drawing/2014/main" id="{9F7C20EC-0ABE-41A2-483C-585FC2F23DCC}"/>
-              </a:ext>
-            </a:extLst>
-          </p:cNvPr>
+          <p:cNvPr id="3" name="Vertical Text Placeholder 2"/>
           <p:cNvSpPr>
             <a:spLocks noGrp="1"/>
           </p:cNvSpPr>
@@ -431,13 +439,7 @@
       </p:sp>
       <p:sp>
         <p:nvSpPr>
-          <p:cNvPr id="4" name="Date Placeholder 3">
-            <a:extLst>
-              <a:ext uri="{FF2B5EF4-FFF2-40B4-BE49-F238E27FC236}">
-                <a16:creationId xmlns:a16="http://schemas.microsoft.com/office/drawing/2014/main" id="{23EF2B41-EB00-8338-AAD2-856CCAF276AB}"/>
-              </a:ext>
-            </a:extLst>
-          </p:cNvPr>
+          <p:cNvPr id="4" name="Date Placeholder 3"/>
           <p:cNvSpPr>
             <a:spLocks noGrp="1"/>
           </p:cNvSpPr>
@@ -450,9 +452,9 @@
           <a:bodyPr/>
           <a:lstStyle/>
           <a:p>
-            <a:fld id="{28C98AA7-5CB1-4BE3-9D5B-E12C9AF6A819}" type="datetimeFigureOut">
+            <a:fld id="{5BCAD085-E8A6-8845-BD4E-CB4CCA059FC4}" type="datetimeFigureOut">
               <a:rPr lang="en-US" smtClean="0"/>
-              <a:t>3/12/2026</a:t>
+              <a:t>5/13/2026</a:t>
             </a:fld>
             <a:endParaRPr lang="en-US"/>
           </a:p>
@@ -460,13 +462,7 @@
       </p:sp>
       <p:sp>
         <p:nvSpPr>
-          <p:cNvPr id="5" name="Footer Placeholder 4">
-            <a:extLst>
-              <a:ext uri="{FF2B5EF4-FFF2-40B4-BE49-F238E27FC236}">
-                <a16:creationId xmlns:a16="http://schemas.microsoft.com/office/drawing/2014/main" id="{77041478-EBFE-8147-4D43-8637A2F3BBF2}"/>
-              </a:ext>
-            </a:extLst>
-          </p:cNvPr>
+          <p:cNvPr id="5" name="Footer Placeholder 4"/>
           <p:cNvSpPr>
             <a:spLocks noGrp="1"/>
           </p:cNvSpPr>
@@ -485,13 +481,7 @@
       </p:sp>
       <p:sp>
         <p:nvSpPr>
-          <p:cNvPr id="6" name="Slide Number Placeholder 5">
-            <a:extLst>
-              <a:ext uri="{FF2B5EF4-FFF2-40B4-BE49-F238E27FC236}">
-                <a16:creationId xmlns:a16="http://schemas.microsoft.com/office/drawing/2014/main" id="{10F47151-8210-29DC-9455-90186196A3C1}"/>
-              </a:ext>
-            </a:extLst>
-          </p:cNvPr>
+          <p:cNvPr id="6" name="Slide Number Placeholder 5"/>
           <p:cNvSpPr>
             <a:spLocks noGrp="1"/>
           </p:cNvSpPr>
@@ -504,7 +494,7 @@
           <a:bodyPr/>
           <a:lstStyle/>
           <a:p>
-            <a:fld id="{99BE45E6-D08F-4AE8-A5AB-B3E76F362C9F}" type="slidenum">
+            <a:fld id="{C1FF6DA9-008F-8B48-92A6-B652298478BF}" type="slidenum">
               <a:rPr lang="en-US" smtClean="0"/>
               <a:t>‹#›</a:t>
             </a:fld>
@@ -515,7 +505,7 @@
     </p:spTree>
     <p:extLst>
       <p:ext uri="{BB962C8B-B14F-4D97-AF65-F5344CB8AC3E}">
-        <p14:creationId xmlns:p14="http://schemas.microsoft.com/office/powerpoint/2010/main" val="607894729"/>
+        <p14:creationId xmlns:p14="http://schemas.microsoft.com/office/powerpoint/2010/main" val="396745517"/>
       </p:ext>
     </p:extLst>
   </p:cSld>
@@ -544,13 +534,7 @@
       </p:grpSpPr>
       <p:sp>
         <p:nvSpPr>
-          <p:cNvPr id="2" name="Vertical Title 1">
-            <a:extLst>
-              <a:ext uri="{FF2B5EF4-FFF2-40B4-BE49-F238E27FC236}">
-                <a16:creationId xmlns:a16="http://schemas.microsoft.com/office/drawing/2014/main" id="{9DE68A3F-E108-7E60-6D79-F9904677E93F}"/>
-              </a:ext>
-            </a:extLst>
-          </p:cNvPr>
+          <p:cNvPr id="2" name="Vertical Title 1"/>
           <p:cNvSpPr>
             <a:spLocks noGrp="1"/>
           </p:cNvSpPr>
@@ -560,8 +544,8 @@
         </p:nvSpPr>
         <p:spPr>
           <a:xfrm>
-            <a:off x="8724900" y="365125"/>
-            <a:ext cx="2628900" cy="5811838"/>
+            <a:off x="8839200" y="274639"/>
+            <a:ext cx="2743200" cy="5851525"/>
           </a:xfrm>
         </p:spPr>
         <p:txBody>
@@ -577,13 +561,7 @@
       </p:sp>
       <p:sp>
         <p:nvSpPr>
-          <p:cNvPr id="3" name="Vertical Text Placeholder 2">
-            <a:extLst>
-              <a:ext uri="{FF2B5EF4-FFF2-40B4-BE49-F238E27FC236}">
-                <a16:creationId xmlns:a16="http://schemas.microsoft.com/office/drawing/2014/main" id="{A8DDA53A-B48E-7FDB-B746-8AEE79E9762A}"/>
-              </a:ext>
-            </a:extLst>
-          </p:cNvPr>
+          <p:cNvPr id="3" name="Vertical Text Placeholder 2"/>
           <p:cNvSpPr>
             <a:spLocks noGrp="1"/>
           </p:cNvSpPr>
@@ -593,8 +571,8 @@
         </p:nvSpPr>
         <p:spPr>
           <a:xfrm>
-            <a:off x="838200" y="365125"/>
-            <a:ext cx="7734300" cy="5811838"/>
+            <a:off x="609600" y="274639"/>
+            <a:ext cx="8026400" cy="5851525"/>
           </a:xfrm>
         </p:spPr>
         <p:txBody>
@@ -639,13 +617,7 @@
       </p:sp>
       <p:sp>
         <p:nvSpPr>
-          <p:cNvPr id="4" name="Date Placeholder 3">
-            <a:extLst>
-              <a:ext uri="{FF2B5EF4-FFF2-40B4-BE49-F238E27FC236}">
-                <a16:creationId xmlns:a16="http://schemas.microsoft.com/office/drawing/2014/main" id="{4C43CA76-B74D-FE74-BA39-BF41E73EA3DF}"/>
-              </a:ext>
-            </a:extLst>
-          </p:cNvPr>
+          <p:cNvPr id="4" name="Date Placeholder 3"/>
           <p:cNvSpPr>
             <a:spLocks noGrp="1"/>
           </p:cNvSpPr>
@@ -658,9 +630,9 @@
           <a:bodyPr/>
           <a:lstStyle/>
           <a:p>
-            <a:fld id="{28C98AA7-5CB1-4BE3-9D5B-E12C9AF6A819}" type="datetimeFigureOut">
+            <a:fld id="{5BCAD085-E8A6-8845-BD4E-CB4CCA059FC4}" type="datetimeFigureOut">
               <a:rPr lang="en-US" smtClean="0"/>
-              <a:t>3/12/2026</a:t>
+              <a:t>5/13/2026</a:t>
             </a:fld>
             <a:endParaRPr lang="en-US"/>
           </a:p>
@@ -668,13 +640,7 @@
       </p:sp>
       <p:sp>
         <p:nvSpPr>
-          <p:cNvPr id="5" name="Footer Placeholder 4">
-            <a:extLst>
-              <a:ext uri="{FF2B5EF4-FFF2-40B4-BE49-F238E27FC236}">
-                <a16:creationId xmlns:a16="http://schemas.microsoft.com/office/drawing/2014/main" id="{1F64D00E-2A89-C242-8AB1-C90076150304}"/>
-              </a:ext>
-            </a:extLst>
-          </p:cNvPr>
+          <p:cNvPr id="5" name="Footer Placeholder 4"/>
           <p:cNvSpPr>
             <a:spLocks noGrp="1"/>
           </p:cNvSpPr>
@@ -688,117 +654,6 @@
           <a:lstStyle/>
           <a:p>
             <a:endParaRPr lang="en-US"/>
-          </a:p>
-        </p:txBody>
-      </p:sp>
-      <p:sp>
-        <p:nvSpPr>
-          <p:cNvPr id="6" name="Slide Number Placeholder 5">
-            <a:extLst>
-              <a:ext uri="{FF2B5EF4-FFF2-40B4-BE49-F238E27FC236}">
-                <a16:creationId xmlns:a16="http://schemas.microsoft.com/office/drawing/2014/main" id="{4ED122E9-845D-FE82-F05C-D82FCD9253C3}"/>
-              </a:ext>
-            </a:extLst>
-          </p:cNvPr>
-          <p:cNvSpPr>
-            <a:spLocks noGrp="1"/>
-          </p:cNvSpPr>
-          <p:nvPr>
-            <p:ph type="sldNum" sz="quarter" idx="12"/>
-          </p:nvPr>
-        </p:nvSpPr>
-        <p:spPr/>
-        <p:txBody>
-          <a:bodyPr/>
-          <a:lstStyle/>
-          <a:p>
-            <a:fld id="{99BE45E6-D08F-4AE8-A5AB-B3E76F362C9F}" type="slidenum">
-              <a:rPr lang="en-US" smtClean="0"/>
-              <a:t>‹#›</a:t>
-            </a:fld>
-            <a:endParaRPr lang="en-US"/>
-          </a:p>
-        </p:txBody>
-      </p:sp>
-    </p:spTree>
-    <p:extLst>
-      <p:ext uri="{BB962C8B-B14F-4D97-AF65-F5344CB8AC3E}">
-        <p14:creationId xmlns:p14="http://schemas.microsoft.com/office/powerpoint/2010/main" val="1418435282"/>
-      </p:ext>
-    </p:extLst>
-  </p:cSld>
-  <p:clrMapOvr>
-    <a:masterClrMapping/>
-  </p:clrMapOvr>
-</p:sldLayout>
-</file>
-
-<file path=ppt/slideLayouts/slideLayout12.xml><?xml version="1.0" encoding="utf-8"?>
-<p:sldLayout xmlns:a="http://schemas.openxmlformats.org/drawingml/2006/main" xmlns:r="http://schemas.openxmlformats.org/officeDocument/2006/relationships" xmlns:p="http://schemas.openxmlformats.org/presentationml/2006/main" userDrawn="1">
-  <p:cSld name="Bullet Slide / 1-Column">
-    <p:spTree>
-      <p:nvGrpSpPr>
-        <p:cNvPr id="1" name=""/>
-        <p:cNvGrpSpPr/>
-        <p:nvPr/>
-      </p:nvGrpSpPr>
-      <p:grpSpPr>
-        <a:xfrm>
-          <a:off x="0" y="0"/>
-          <a:ext cx="0" cy="0"/>
-          <a:chOff x="0" y="0"/>
-          <a:chExt cx="0" cy="0"/>
-        </a:xfrm>
-      </p:grpSpPr>
-      <p:sp>
-        <p:nvSpPr>
-          <p:cNvPr id="3" name="Content Placeholder 2"/>
-          <p:cNvSpPr>
-            <a:spLocks noGrp="1"/>
-          </p:cNvSpPr>
-          <p:nvPr>
-            <p:ph idx="1"/>
-          </p:nvPr>
-        </p:nvSpPr>
-        <p:spPr/>
-        <p:txBody>
-          <a:bodyPr/>
-          <a:lstStyle/>
-          <a:p>
-            <a:pPr lvl="0"/>
-            <a:r>
-              <a:rPr lang="en-US"/>
-              <a:t>Click to edit Master text styles</a:t>
-            </a:r>
-          </a:p>
-          <a:p>
-            <a:pPr lvl="1"/>
-            <a:r>
-              <a:rPr lang="en-US"/>
-              <a:t>Second level</a:t>
-            </a:r>
-          </a:p>
-          <a:p>
-            <a:pPr lvl="2"/>
-            <a:r>
-              <a:rPr lang="en-US"/>
-              <a:t>Third level</a:t>
-            </a:r>
-          </a:p>
-          <a:p>
-            <a:pPr lvl="3"/>
-            <a:r>
-              <a:rPr lang="en-US"/>
-              <a:t>Fourth level</a:t>
-            </a:r>
-          </a:p>
-          <a:p>
-            <a:pPr lvl="4"/>
-            <a:r>
-              <a:rPr lang="en-US"/>
-              <a:t>Fifth level</a:t>
-            </a:r>
-            <a:endParaRPr lang="en-US" dirty="0"/>
           </a:p>
         </p:txBody>
       </p:sp>
@@ -817,41 +672,18 @@
           <a:bodyPr/>
           <a:lstStyle/>
           <a:p>
-            <a:fld id="{C53C0A73-EE5C-9246-97B4-6AF29FD73FB0}" type="slidenum">
+            <a:fld id="{C1FF6DA9-008F-8B48-92A6-B652298478BF}" type="slidenum">
               <a:rPr lang="en-US" smtClean="0"/>
-              <a:pPr/>
               <a:t>‹#›</a:t>
             </a:fld>
-            <a:endParaRPr lang="en-US" dirty="0"/>
-          </a:p>
-        </p:txBody>
-      </p:sp>
-      <p:sp>
-        <p:nvSpPr>
-          <p:cNvPr id="4" name="Title 3"/>
-          <p:cNvSpPr>
-            <a:spLocks noGrp="1"/>
-          </p:cNvSpPr>
-          <p:nvPr>
-            <p:ph type="title"/>
-          </p:nvPr>
-        </p:nvSpPr>
-        <p:spPr/>
-        <p:txBody>
-          <a:bodyPr/>
-          <a:lstStyle/>
-          <a:p>
-            <a:r>
-              <a:rPr lang="en-US"/>
-              <a:t>Click to edit Master title style</a:t>
-            </a:r>
+            <a:endParaRPr lang="en-US"/>
           </a:p>
         </p:txBody>
       </p:sp>
     </p:spTree>
     <p:extLst>
       <p:ext uri="{BB962C8B-B14F-4D97-AF65-F5344CB8AC3E}">
-        <p14:creationId xmlns:p14="http://schemas.microsoft.com/office/powerpoint/2010/main" val="4250409770"/>
+        <p14:creationId xmlns:p14="http://schemas.microsoft.com/office/powerpoint/2010/main" val="2820851668"/>
       </p:ext>
     </p:extLst>
   </p:cSld>
@@ -880,13 +712,7 @@
       </p:grpSpPr>
       <p:sp>
         <p:nvSpPr>
-          <p:cNvPr id="2" name="Title 1">
-            <a:extLst>
-              <a:ext uri="{FF2B5EF4-FFF2-40B4-BE49-F238E27FC236}">
-                <a16:creationId xmlns:a16="http://schemas.microsoft.com/office/drawing/2014/main" id="{74D57DD1-FB53-A24C-41AC-C95C78EFE5BC}"/>
-              </a:ext>
-            </a:extLst>
-          </p:cNvPr>
+          <p:cNvPr id="2" name="Title 1"/>
           <p:cNvSpPr>
             <a:spLocks noGrp="1"/>
           </p:cNvSpPr>
@@ -908,13 +734,7 @@
       </p:sp>
       <p:sp>
         <p:nvSpPr>
-          <p:cNvPr id="3" name="Content Placeholder 2">
-            <a:extLst>
-              <a:ext uri="{FF2B5EF4-FFF2-40B4-BE49-F238E27FC236}">
-                <a16:creationId xmlns:a16="http://schemas.microsoft.com/office/drawing/2014/main" id="{3A262CC2-7028-1368-03BC-20CAD2ACB6DA}"/>
-              </a:ext>
-            </a:extLst>
-          </p:cNvPr>
+          <p:cNvPr id="3" name="Content Placeholder 2"/>
           <p:cNvSpPr>
             <a:spLocks noGrp="1"/>
           </p:cNvSpPr>
@@ -965,13 +785,7 @@
       </p:sp>
       <p:sp>
         <p:nvSpPr>
-          <p:cNvPr id="4" name="Date Placeholder 3">
-            <a:extLst>
-              <a:ext uri="{FF2B5EF4-FFF2-40B4-BE49-F238E27FC236}">
-                <a16:creationId xmlns:a16="http://schemas.microsoft.com/office/drawing/2014/main" id="{047A5CE6-8863-985A-004E-9D66661808BF}"/>
-              </a:ext>
-            </a:extLst>
-          </p:cNvPr>
+          <p:cNvPr id="4" name="Date Placeholder 3"/>
           <p:cNvSpPr>
             <a:spLocks noGrp="1"/>
           </p:cNvSpPr>
@@ -984,9 +798,9 @@
           <a:bodyPr/>
           <a:lstStyle/>
           <a:p>
-            <a:fld id="{28C98AA7-5CB1-4BE3-9D5B-E12C9AF6A819}" type="datetimeFigureOut">
+            <a:fld id="{5BCAD085-E8A6-8845-BD4E-CB4CCA059FC4}" type="datetimeFigureOut">
               <a:rPr lang="en-US" smtClean="0"/>
-              <a:t>3/12/2026</a:t>
+              <a:t>5/13/2026</a:t>
             </a:fld>
             <a:endParaRPr lang="en-US"/>
           </a:p>
@@ -994,13 +808,7 @@
       </p:sp>
       <p:sp>
         <p:nvSpPr>
-          <p:cNvPr id="5" name="Footer Placeholder 4">
-            <a:extLst>
-              <a:ext uri="{FF2B5EF4-FFF2-40B4-BE49-F238E27FC236}">
-                <a16:creationId xmlns:a16="http://schemas.microsoft.com/office/drawing/2014/main" id="{FF75BB14-B84E-3649-B7F7-CBBD59188D67}"/>
-              </a:ext>
-            </a:extLst>
-          </p:cNvPr>
+          <p:cNvPr id="5" name="Footer Placeholder 4"/>
           <p:cNvSpPr>
             <a:spLocks noGrp="1"/>
           </p:cNvSpPr>
@@ -1019,13 +827,7 @@
       </p:sp>
       <p:sp>
         <p:nvSpPr>
-          <p:cNvPr id="6" name="Slide Number Placeholder 5">
-            <a:extLst>
-              <a:ext uri="{FF2B5EF4-FFF2-40B4-BE49-F238E27FC236}">
-                <a16:creationId xmlns:a16="http://schemas.microsoft.com/office/drawing/2014/main" id="{21ACC2B2-AF38-FB3D-777B-D916FF90B36E}"/>
-              </a:ext>
-            </a:extLst>
-          </p:cNvPr>
+          <p:cNvPr id="6" name="Slide Number Placeholder 5"/>
           <p:cNvSpPr>
             <a:spLocks noGrp="1"/>
           </p:cNvSpPr>
@@ -1038,7 +840,7 @@
           <a:bodyPr/>
           <a:lstStyle/>
           <a:p>
-            <a:fld id="{99BE45E6-D08F-4AE8-A5AB-B3E76F362C9F}" type="slidenum">
+            <a:fld id="{C1FF6DA9-008F-8B48-92A6-B652298478BF}" type="slidenum">
               <a:rPr lang="en-US" smtClean="0"/>
               <a:t>‹#›</a:t>
             </a:fld>
@@ -1049,7 +851,7 @@
     </p:spTree>
     <p:extLst>
       <p:ext uri="{BB962C8B-B14F-4D97-AF65-F5344CB8AC3E}">
-        <p14:creationId xmlns:p14="http://schemas.microsoft.com/office/powerpoint/2010/main" val="3758228462"/>
+        <p14:creationId xmlns:p14="http://schemas.microsoft.com/office/powerpoint/2010/main" val="2184116218"/>
       </p:ext>
     </p:extLst>
   </p:cSld>
@@ -1078,13 +880,7 @@
       </p:grpSpPr>
       <p:sp>
         <p:nvSpPr>
-          <p:cNvPr id="2" name="Title 1">
-            <a:extLst>
-              <a:ext uri="{FF2B5EF4-FFF2-40B4-BE49-F238E27FC236}">
-                <a16:creationId xmlns:a16="http://schemas.microsoft.com/office/drawing/2014/main" id="{C4DD1137-CA23-7D81-C7EC-20E397759815}"/>
-              </a:ext>
-            </a:extLst>
-          </p:cNvPr>
+          <p:cNvPr id="2" name="Title 1"/>
           <p:cNvSpPr>
             <a:spLocks noGrp="1"/>
           </p:cNvSpPr>
@@ -1094,15 +890,15 @@
         </p:nvSpPr>
         <p:spPr>
           <a:xfrm>
-            <a:off x="831850" y="1709738"/>
-            <a:ext cx="10515600" cy="2852737"/>
+            <a:off x="963084" y="4406901"/>
+            <a:ext cx="10363200" cy="1362075"/>
           </a:xfrm>
         </p:spPr>
         <p:txBody>
-          <a:bodyPr anchor="b"/>
+          <a:bodyPr anchor="t"/>
           <a:lstStyle>
-            <a:lvl1pPr>
-              <a:defRPr sz="6000"/>
+            <a:lvl1pPr algn="l">
+              <a:defRPr sz="4000" b="1" cap="all"/>
             </a:lvl1pPr>
           </a:lstStyle>
           <a:p>
@@ -1115,13 +911,7 @@
       </p:sp>
       <p:sp>
         <p:nvSpPr>
-          <p:cNvPr id="3" name="Text Placeholder 2">
-            <a:extLst>
-              <a:ext uri="{FF2B5EF4-FFF2-40B4-BE49-F238E27FC236}">
-                <a16:creationId xmlns:a16="http://schemas.microsoft.com/office/drawing/2014/main" id="{15E59DA8-30CE-05F0-3245-43701B05C50F}"/>
-              </a:ext>
-            </a:extLst>
-          </p:cNvPr>
+          <p:cNvPr id="3" name="Text Placeholder 2"/>
           <p:cNvSpPr>
             <a:spLocks noGrp="1"/>
           </p:cNvSpPr>
@@ -1131,99 +921,99 @@
         </p:nvSpPr>
         <p:spPr>
           <a:xfrm>
-            <a:off x="831850" y="4589463"/>
-            <a:ext cx="10515600" cy="1500187"/>
+            <a:off x="963084" y="2906713"/>
+            <a:ext cx="10363200" cy="1500187"/>
           </a:xfrm>
         </p:spPr>
         <p:txBody>
-          <a:bodyPr/>
+          <a:bodyPr anchor="b"/>
           <a:lstStyle>
             <a:lvl1pPr marL="0" indent="0">
               <a:buNone/>
-              <a:defRPr sz="2400">
+              <a:defRPr sz="2000">
                 <a:solidFill>
                   <a:schemeClr val="tx1">
-                    <a:tint val="82000"/>
+                    <a:tint val="75000"/>
                   </a:schemeClr>
                 </a:solidFill>
               </a:defRPr>
             </a:lvl1pPr>
             <a:lvl2pPr marL="457200" indent="0">
               <a:buNone/>
-              <a:defRPr sz="2000">
+              <a:defRPr sz="1800">
                 <a:solidFill>
                   <a:schemeClr val="tx1">
-                    <a:tint val="82000"/>
+                    <a:tint val="75000"/>
                   </a:schemeClr>
                 </a:solidFill>
               </a:defRPr>
             </a:lvl2pPr>
             <a:lvl3pPr marL="914400" indent="0">
               <a:buNone/>
-              <a:defRPr sz="1800">
+              <a:defRPr sz="1600">
                 <a:solidFill>
                   <a:schemeClr val="tx1">
-                    <a:tint val="82000"/>
+                    <a:tint val="75000"/>
                   </a:schemeClr>
                 </a:solidFill>
               </a:defRPr>
             </a:lvl3pPr>
             <a:lvl4pPr marL="1371600" indent="0">
               <a:buNone/>
-              <a:defRPr sz="1600">
+              <a:defRPr sz="1400">
                 <a:solidFill>
                   <a:schemeClr val="tx1">
-                    <a:tint val="82000"/>
+                    <a:tint val="75000"/>
                   </a:schemeClr>
                 </a:solidFill>
               </a:defRPr>
             </a:lvl4pPr>
             <a:lvl5pPr marL="1828800" indent="0">
               <a:buNone/>
-              <a:defRPr sz="1600">
+              <a:defRPr sz="1400">
                 <a:solidFill>
                   <a:schemeClr val="tx1">
-                    <a:tint val="82000"/>
+                    <a:tint val="75000"/>
                   </a:schemeClr>
                 </a:solidFill>
               </a:defRPr>
             </a:lvl5pPr>
             <a:lvl6pPr marL="2286000" indent="0">
               <a:buNone/>
-              <a:defRPr sz="1600">
+              <a:defRPr sz="1400">
                 <a:solidFill>
                   <a:schemeClr val="tx1">
-                    <a:tint val="82000"/>
+                    <a:tint val="75000"/>
                   </a:schemeClr>
                 </a:solidFill>
               </a:defRPr>
             </a:lvl6pPr>
             <a:lvl7pPr marL="2743200" indent="0">
               <a:buNone/>
-              <a:defRPr sz="1600">
+              <a:defRPr sz="1400">
                 <a:solidFill>
                   <a:schemeClr val="tx1">
-                    <a:tint val="82000"/>
+                    <a:tint val="75000"/>
                   </a:schemeClr>
                 </a:solidFill>
               </a:defRPr>
             </a:lvl7pPr>
             <a:lvl8pPr marL="3200400" indent="0">
               <a:buNone/>
-              <a:defRPr sz="1600">
+              <a:defRPr sz="1400">
                 <a:solidFill>
                   <a:schemeClr val="tx1">
-                    <a:tint val="82000"/>
+                    <a:tint val="75000"/>
                   </a:schemeClr>
                 </a:solidFill>
               </a:defRPr>
             </a:lvl8pPr>
             <a:lvl9pPr marL="3657600" indent="0">
               <a:buNone/>
-              <a:defRPr sz="1600">
+              <a:defRPr sz="1400">
                 <a:solidFill>
                   <a:schemeClr val="tx1">
-                    <a:tint val="82000"/>
+                    <a:tint val="75000"/>
                   </a:schemeClr>
                 </a:solidFill>
               </a:defRPr>
@@ -1240,13 +1030,7 @@
       </p:sp>
       <p:sp>
         <p:nvSpPr>
-          <p:cNvPr id="4" name="Date Placeholder 3">
-            <a:extLst>
-              <a:ext uri="{FF2B5EF4-FFF2-40B4-BE49-F238E27FC236}">
-                <a16:creationId xmlns:a16="http://schemas.microsoft.com/office/drawing/2014/main" id="{F80A0699-F2E3-67F0-B537-AA158BBA2B56}"/>
-              </a:ext>
-            </a:extLst>
-          </p:cNvPr>
+          <p:cNvPr id="4" name="Date Placeholder 3"/>
           <p:cNvSpPr>
             <a:spLocks noGrp="1"/>
           </p:cNvSpPr>
@@ -1259,9 +1043,9 @@
           <a:bodyPr/>
           <a:lstStyle/>
           <a:p>
-            <a:fld id="{28C98AA7-5CB1-4BE3-9D5B-E12C9AF6A819}" type="datetimeFigureOut">
+            <a:fld id="{5BCAD085-E8A6-8845-BD4E-CB4CCA059FC4}" type="datetimeFigureOut">
               <a:rPr lang="en-US" smtClean="0"/>
-              <a:t>3/12/2026</a:t>
+              <a:t>5/13/2026</a:t>
             </a:fld>
             <a:endParaRPr lang="en-US"/>
           </a:p>
@@ -1269,13 +1053,7 @@
       </p:sp>
       <p:sp>
         <p:nvSpPr>
-          <p:cNvPr id="5" name="Footer Placeholder 4">
-            <a:extLst>
-              <a:ext uri="{FF2B5EF4-FFF2-40B4-BE49-F238E27FC236}">
-                <a16:creationId xmlns:a16="http://schemas.microsoft.com/office/drawing/2014/main" id="{34B755FD-4A8C-A117-7DE4-7CB4B7FE7B68}"/>
-              </a:ext>
-            </a:extLst>
-          </p:cNvPr>
+          <p:cNvPr id="5" name="Footer Placeholder 4"/>
           <p:cNvSpPr>
             <a:spLocks noGrp="1"/>
           </p:cNvSpPr>
@@ -1294,13 +1072,7 @@
       </p:sp>
       <p:sp>
         <p:nvSpPr>
-          <p:cNvPr id="6" name="Slide Number Placeholder 5">
-            <a:extLst>
-              <a:ext uri="{FF2B5EF4-FFF2-40B4-BE49-F238E27FC236}">
-                <a16:creationId xmlns:a16="http://schemas.microsoft.com/office/drawing/2014/main" id="{C98E6D30-5CCD-9CE7-CB0C-33358F662926}"/>
-              </a:ext>
-            </a:extLst>
-          </p:cNvPr>
+          <p:cNvPr id="6" name="Slide Number Placeholder 5"/>
           <p:cNvSpPr>
             <a:spLocks noGrp="1"/>
           </p:cNvSpPr>
@@ -1313,7 +1085,7 @@
           <a:bodyPr/>
           <a:lstStyle/>
           <a:p>
-            <a:fld id="{99BE45E6-D08F-4AE8-A5AB-B3E76F362C9F}" type="slidenum">
+            <a:fld id="{C1FF6DA9-008F-8B48-92A6-B652298478BF}" type="slidenum">
               <a:rPr lang="en-US" smtClean="0"/>
               <a:t>‹#›</a:t>
             </a:fld>
@@ -1324,7 +1096,7 @@
     </p:spTree>
     <p:extLst>
       <p:ext uri="{BB962C8B-B14F-4D97-AF65-F5344CB8AC3E}">
-        <p14:creationId xmlns:p14="http://schemas.microsoft.com/office/powerpoint/2010/main" val="3487374434"/>
+        <p14:creationId xmlns:p14="http://schemas.microsoft.com/office/powerpoint/2010/main" val="3827803217"/>
       </p:ext>
     </p:extLst>
   </p:cSld>
@@ -1353,13 +1125,7 @@
       </p:grpSpPr>
       <p:sp>
         <p:nvSpPr>
-          <p:cNvPr id="2" name="Title 1">
-            <a:extLst>
-              <a:ext uri="{FF2B5EF4-FFF2-40B4-BE49-F238E27FC236}">
-                <a16:creationId xmlns:a16="http://schemas.microsoft.com/office/drawing/2014/main" id="{A19693B3-047D-2C5D-1A8E-9A57F2FCF582}"/>
-              </a:ext>
-            </a:extLst>
-          </p:cNvPr>
+          <p:cNvPr id="2" name="Title 1"/>
           <p:cNvSpPr>
             <a:spLocks noGrp="1"/>
           </p:cNvSpPr>
@@ -1381,13 +1147,7 @@
       </p:sp>
       <p:sp>
         <p:nvSpPr>
-          <p:cNvPr id="3" name="Content Placeholder 2">
-            <a:extLst>
-              <a:ext uri="{FF2B5EF4-FFF2-40B4-BE49-F238E27FC236}">
-                <a16:creationId xmlns:a16="http://schemas.microsoft.com/office/drawing/2014/main" id="{1EAE17A4-A77A-2A5F-174C-A1C7ED86E319}"/>
-              </a:ext>
-            </a:extLst>
-          </p:cNvPr>
+          <p:cNvPr id="3" name="Content Placeholder 2"/>
           <p:cNvSpPr>
             <a:spLocks noGrp="1"/>
           </p:cNvSpPr>
@@ -1397,13 +1157,41 @@
         </p:nvSpPr>
         <p:spPr>
           <a:xfrm>
-            <a:off x="838200" y="1825625"/>
-            <a:ext cx="5181600" cy="4351338"/>
+            <a:off x="609600" y="1600201"/>
+            <a:ext cx="5384800" cy="4525963"/>
           </a:xfrm>
         </p:spPr>
         <p:txBody>
           <a:bodyPr/>
-          <a:lstStyle/>
+          <a:lstStyle>
+            <a:lvl1pPr>
+              <a:defRPr sz="2800"/>
+            </a:lvl1pPr>
+            <a:lvl2pPr>
+              <a:defRPr sz="2400"/>
+            </a:lvl2pPr>
+            <a:lvl3pPr>
+              <a:defRPr sz="2000"/>
+            </a:lvl3pPr>
+            <a:lvl4pPr>
+              <a:defRPr sz="1800"/>
+            </a:lvl4pPr>
+            <a:lvl5pPr>
+              <a:defRPr sz="1800"/>
+            </a:lvl5pPr>
+            <a:lvl6pPr>
+              <a:defRPr sz="1800"/>
+            </a:lvl6pPr>
+            <a:lvl7pPr>
+              <a:defRPr sz="1800"/>
+            </a:lvl7pPr>
+            <a:lvl8pPr>
+              <a:defRPr sz="1800"/>
+            </a:lvl8pPr>
+            <a:lvl9pPr>
+              <a:defRPr sz="1800"/>
+            </a:lvl9pPr>
+          </a:lstStyle>
           <a:p>
             <a:pPr lvl="0"/>
             <a:r>
@@ -1443,13 +1231,7 @@
       </p:sp>
       <p:sp>
         <p:nvSpPr>
-          <p:cNvPr id="4" name="Content Placeholder 3">
-            <a:extLst>
-              <a:ext uri="{FF2B5EF4-FFF2-40B4-BE49-F238E27FC236}">
-                <a16:creationId xmlns:a16="http://schemas.microsoft.com/office/drawing/2014/main" id="{CDCD23AF-2A5D-D858-F7D1-5D85DD5E5FA0}"/>
-              </a:ext>
-            </a:extLst>
-          </p:cNvPr>
+          <p:cNvPr id="4" name="Content Placeholder 3"/>
           <p:cNvSpPr>
             <a:spLocks noGrp="1"/>
           </p:cNvSpPr>
@@ -1459,13 +1241,41 @@
         </p:nvSpPr>
         <p:spPr>
           <a:xfrm>
-            <a:off x="6172200" y="1825625"/>
-            <a:ext cx="5181600" cy="4351338"/>
+            <a:off x="6197600" y="1600201"/>
+            <a:ext cx="5384800" cy="4525963"/>
           </a:xfrm>
         </p:spPr>
         <p:txBody>
           <a:bodyPr/>
-          <a:lstStyle/>
+          <a:lstStyle>
+            <a:lvl1pPr>
+              <a:defRPr sz="2800"/>
+            </a:lvl1pPr>
+            <a:lvl2pPr>
+              <a:defRPr sz="2400"/>
+            </a:lvl2pPr>
+            <a:lvl3pPr>
+              <a:defRPr sz="2000"/>
+            </a:lvl3pPr>
+            <a:lvl4pPr>
+              <a:defRPr sz="1800"/>
+            </a:lvl4pPr>
+            <a:lvl5pPr>
+              <a:defRPr sz="1800"/>
+            </a:lvl5pPr>
+            <a:lvl6pPr>
+              <a:defRPr sz="1800"/>
+            </a:lvl6pPr>
+            <a:lvl7pPr>
+              <a:defRPr sz="1800"/>
+            </a:lvl7pPr>
+            <a:lvl8pPr>
+              <a:defRPr sz="1800"/>
+            </a:lvl8pPr>
+            <a:lvl9pPr>
+              <a:defRPr sz="1800"/>
+            </a:lvl9pPr>
+          </a:lstStyle>
           <a:p>
             <a:pPr lvl="0"/>
             <a:r>
@@ -1505,13 +1315,7 @@
       </p:sp>
       <p:sp>
         <p:nvSpPr>
-          <p:cNvPr id="5" name="Date Placeholder 4">
-            <a:extLst>
-              <a:ext uri="{FF2B5EF4-FFF2-40B4-BE49-F238E27FC236}">
-                <a16:creationId xmlns:a16="http://schemas.microsoft.com/office/drawing/2014/main" id="{E7571347-7759-E67C-F73F-FE0121EFFB9B}"/>
-              </a:ext>
-            </a:extLst>
-          </p:cNvPr>
+          <p:cNvPr id="5" name="Date Placeholder 4"/>
           <p:cNvSpPr>
             <a:spLocks noGrp="1"/>
           </p:cNvSpPr>
@@ -1524,9 +1328,9 @@
           <a:bodyPr/>
           <a:lstStyle/>
           <a:p>
-            <a:fld id="{28C98AA7-5CB1-4BE3-9D5B-E12C9AF6A819}" type="datetimeFigureOut">
+            <a:fld id="{5BCAD085-E8A6-8845-BD4E-CB4CCA059FC4}" type="datetimeFigureOut">
               <a:rPr lang="en-US" smtClean="0"/>
-              <a:t>3/12/2026</a:t>
+              <a:t>5/13/2026</a:t>
             </a:fld>
             <a:endParaRPr lang="en-US"/>
           </a:p>
@@ -1534,13 +1338,7 @@
       </p:sp>
       <p:sp>
         <p:nvSpPr>
-          <p:cNvPr id="6" name="Footer Placeholder 5">
-            <a:extLst>
-              <a:ext uri="{FF2B5EF4-FFF2-40B4-BE49-F238E27FC236}">
-                <a16:creationId xmlns:a16="http://schemas.microsoft.com/office/drawing/2014/main" id="{EBF14A82-D339-5494-FF7D-1212D988EAC9}"/>
-              </a:ext>
-            </a:extLst>
-          </p:cNvPr>
+          <p:cNvPr id="6" name="Footer Placeholder 5"/>
           <p:cNvSpPr>
             <a:spLocks noGrp="1"/>
           </p:cNvSpPr>
@@ -1559,13 +1357,7 @@
       </p:sp>
       <p:sp>
         <p:nvSpPr>
-          <p:cNvPr id="7" name="Slide Number Placeholder 6">
-            <a:extLst>
-              <a:ext uri="{FF2B5EF4-FFF2-40B4-BE49-F238E27FC236}">
-                <a16:creationId xmlns:a16="http://schemas.microsoft.com/office/drawing/2014/main" id="{CA6E758F-454F-A170-57E8-88AD22178959}"/>
-              </a:ext>
-            </a:extLst>
-          </p:cNvPr>
+          <p:cNvPr id="7" name="Slide Number Placeholder 6"/>
           <p:cNvSpPr>
             <a:spLocks noGrp="1"/>
           </p:cNvSpPr>
@@ -1578,7 +1370,7 @@
           <a:bodyPr/>
           <a:lstStyle/>
           <a:p>
-            <a:fld id="{99BE45E6-D08F-4AE8-A5AB-B3E76F362C9F}" type="slidenum">
+            <a:fld id="{C1FF6DA9-008F-8B48-92A6-B652298478BF}" type="slidenum">
               <a:rPr lang="en-US" smtClean="0"/>
               <a:t>‹#›</a:t>
             </a:fld>
@@ -1589,7 +1381,7 @@
     </p:spTree>
     <p:extLst>
       <p:ext uri="{BB962C8B-B14F-4D97-AF65-F5344CB8AC3E}">
-        <p14:creationId xmlns:p14="http://schemas.microsoft.com/office/powerpoint/2010/main" val="3811006074"/>
+        <p14:creationId xmlns:p14="http://schemas.microsoft.com/office/powerpoint/2010/main" val="2286205965"/>
       </p:ext>
     </p:extLst>
   </p:cSld>
@@ -1618,13 +1410,7 @@
       </p:grpSpPr>
       <p:sp>
         <p:nvSpPr>
-          <p:cNvPr id="2" name="Title 1">
-            <a:extLst>
-              <a:ext uri="{FF2B5EF4-FFF2-40B4-BE49-F238E27FC236}">
-                <a16:creationId xmlns:a16="http://schemas.microsoft.com/office/drawing/2014/main" id="{32B10E74-3BC5-8AAD-C66C-054DBC273535}"/>
-              </a:ext>
-            </a:extLst>
-          </p:cNvPr>
+          <p:cNvPr id="2" name="Title 1"/>
           <p:cNvSpPr>
             <a:spLocks noGrp="1"/>
           </p:cNvSpPr>
@@ -1632,15 +1418,14 @@
             <p:ph type="title"/>
           </p:nvPr>
         </p:nvSpPr>
-        <p:spPr>
-          <a:xfrm>
-            <a:off x="839788" y="365125"/>
-            <a:ext cx="10515600" cy="1325563"/>
-          </a:xfrm>
-        </p:spPr>
+        <p:spPr/>
         <p:txBody>
           <a:bodyPr/>
-          <a:lstStyle/>
+          <a:lstStyle>
+            <a:lvl1pPr>
+              <a:defRPr/>
+            </a:lvl1pPr>
+          </a:lstStyle>
           <a:p>
             <a:r>
               <a:rPr lang="en-US"/>
@@ -1651,13 +1436,7 @@
       </p:sp>
       <p:sp>
         <p:nvSpPr>
-          <p:cNvPr id="3" name="Text Placeholder 2">
-            <a:extLst>
-              <a:ext uri="{FF2B5EF4-FFF2-40B4-BE49-F238E27FC236}">
-                <a16:creationId xmlns:a16="http://schemas.microsoft.com/office/drawing/2014/main" id="{9A4056A8-A836-9771-0D5E-5D639C986E74}"/>
-              </a:ext>
-            </a:extLst>
-          </p:cNvPr>
+          <p:cNvPr id="3" name="Text Placeholder 2"/>
           <p:cNvSpPr>
             <a:spLocks noGrp="1"/>
           </p:cNvSpPr>
@@ -1667,8 +1446,8 @@
         </p:nvSpPr>
         <p:spPr>
           <a:xfrm>
-            <a:off x="839788" y="1681163"/>
-            <a:ext cx="5157787" cy="823912"/>
+            <a:off x="609600" y="1535113"/>
+            <a:ext cx="5386917" cy="639762"/>
           </a:xfrm>
         </p:spPr>
         <p:txBody>
@@ -1722,13 +1501,7 @@
       </p:sp>
       <p:sp>
         <p:nvSpPr>
-          <p:cNvPr id="4" name="Content Placeholder 3">
-            <a:extLst>
-              <a:ext uri="{FF2B5EF4-FFF2-40B4-BE49-F238E27FC236}">
-                <a16:creationId xmlns:a16="http://schemas.microsoft.com/office/drawing/2014/main" id="{D962B667-54E6-3C33-6EFD-922F67D231FA}"/>
-              </a:ext>
-            </a:extLst>
-          </p:cNvPr>
+          <p:cNvPr id="4" name="Content Placeholder 3"/>
           <p:cNvSpPr>
             <a:spLocks noGrp="1"/>
           </p:cNvSpPr>
@@ -1738,13 +1511,41 @@
         </p:nvSpPr>
         <p:spPr>
           <a:xfrm>
-            <a:off x="839788" y="2505075"/>
-            <a:ext cx="5157787" cy="3684588"/>
+            <a:off x="609600" y="2174875"/>
+            <a:ext cx="5386917" cy="3951288"/>
           </a:xfrm>
         </p:spPr>
         <p:txBody>
           <a:bodyPr/>
-          <a:lstStyle/>
+          <a:lstStyle>
+            <a:lvl1pPr>
+              <a:defRPr sz="2400"/>
+            </a:lvl1pPr>
+            <a:lvl2pPr>
+              <a:defRPr sz="2000"/>
+            </a:lvl2pPr>
+            <a:lvl3pPr>
+              <a:defRPr sz="1800"/>
+            </a:lvl3pPr>
+            <a:lvl4pPr>
+              <a:defRPr sz="1600"/>
+            </a:lvl4pPr>
+            <a:lvl5pPr>
+              <a:defRPr sz="1600"/>
+            </a:lvl5pPr>
+            <a:lvl6pPr>
+              <a:defRPr sz="1600"/>
+            </a:lvl6pPr>
+            <a:lvl7pPr>
+              <a:defRPr sz="1600"/>
+            </a:lvl7pPr>
+            <a:lvl8pPr>
+              <a:defRPr sz="1600"/>
+            </a:lvl8pPr>
+            <a:lvl9pPr>
+              <a:defRPr sz="1600"/>
+            </a:lvl9pPr>
+          </a:lstStyle>
           <a:p>
             <a:pPr lvl="0"/>
             <a:r>
@@ -1784,13 +1585,7 @@
       </p:sp>
       <p:sp>
         <p:nvSpPr>
-          <p:cNvPr id="5" name="Text Placeholder 4">
-            <a:extLst>
-              <a:ext uri="{FF2B5EF4-FFF2-40B4-BE49-F238E27FC236}">
-                <a16:creationId xmlns:a16="http://schemas.microsoft.com/office/drawing/2014/main" id="{BD11E956-6E80-83A9-11BD-FC180F11CAE5}"/>
-              </a:ext>
-            </a:extLst>
-          </p:cNvPr>
+          <p:cNvPr id="5" name="Text Placeholder 4"/>
           <p:cNvSpPr>
             <a:spLocks noGrp="1"/>
           </p:cNvSpPr>
@@ -1800,8 +1595,8 @@
         </p:nvSpPr>
         <p:spPr>
           <a:xfrm>
-            <a:off x="6172200" y="1681163"/>
-            <a:ext cx="5183188" cy="823912"/>
+            <a:off x="6193368" y="1535113"/>
+            <a:ext cx="5389033" cy="639762"/>
           </a:xfrm>
         </p:spPr>
         <p:txBody>
@@ -1855,13 +1650,7 @@
       </p:sp>
       <p:sp>
         <p:nvSpPr>
-          <p:cNvPr id="6" name="Content Placeholder 5">
-            <a:extLst>
-              <a:ext uri="{FF2B5EF4-FFF2-40B4-BE49-F238E27FC236}">
-                <a16:creationId xmlns:a16="http://schemas.microsoft.com/office/drawing/2014/main" id="{77E8E639-B24A-DFFF-57B8-B31453078684}"/>
-              </a:ext>
-            </a:extLst>
-          </p:cNvPr>
+          <p:cNvPr id="6" name="Content Placeholder 5"/>
           <p:cNvSpPr>
             <a:spLocks noGrp="1"/>
           </p:cNvSpPr>
@@ -1871,13 +1660,41 @@
         </p:nvSpPr>
         <p:spPr>
           <a:xfrm>
-            <a:off x="6172200" y="2505075"/>
-            <a:ext cx="5183188" cy="3684588"/>
+            <a:off x="6193368" y="2174875"/>
+            <a:ext cx="5389033" cy="3951288"/>
           </a:xfrm>
         </p:spPr>
         <p:txBody>
           <a:bodyPr/>
-          <a:lstStyle/>
+          <a:lstStyle>
+            <a:lvl1pPr>
+              <a:defRPr sz="2400"/>
+            </a:lvl1pPr>
+            <a:lvl2pPr>
+              <a:defRPr sz="2000"/>
+            </a:lvl2pPr>
+            <a:lvl3pPr>
+              <a:defRPr sz="1800"/>
+            </a:lvl3pPr>
+            <a:lvl4pPr>
+              <a:defRPr sz="1600"/>
+            </a:lvl4pPr>
+            <a:lvl5pPr>
+              <a:defRPr sz="1600"/>
+            </a:lvl5pPr>
+            <a:lvl6pPr>
+              <a:defRPr sz="1600"/>
+            </a:lvl6pPr>
+            <a:lvl7pPr>
+              <a:defRPr sz="1600"/>
+            </a:lvl7pPr>
+            <a:lvl8pPr>
+              <a:defRPr sz="1600"/>
+            </a:lvl8pPr>
+            <a:lvl9pPr>
+              <a:defRPr sz="1600"/>
+            </a:lvl9pPr>
+          </a:lstStyle>
           <a:p>
             <a:pPr lvl="0"/>
             <a:r>
@@ -1917,13 +1734,7 @@
       </p:sp>
       <p:sp>
         <p:nvSpPr>
-          <p:cNvPr id="7" name="Date Placeholder 6">
-            <a:extLst>
-              <a:ext uri="{FF2B5EF4-FFF2-40B4-BE49-F238E27FC236}">
-                <a16:creationId xmlns:a16="http://schemas.microsoft.com/office/drawing/2014/main" id="{86F5FAF5-40A5-7BDF-7F25-EFAB4DE42AAA}"/>
-              </a:ext>
-            </a:extLst>
-          </p:cNvPr>
+          <p:cNvPr id="7" name="Date Placeholder 6"/>
           <p:cNvSpPr>
             <a:spLocks noGrp="1"/>
           </p:cNvSpPr>
@@ -1936,9 +1747,9 @@
           <a:bodyPr/>
           <a:lstStyle/>
           <a:p>
-            <a:fld id="{28C98AA7-5CB1-4BE3-9D5B-E12C9AF6A819}" type="datetimeFigureOut">
+            <a:fld id="{5BCAD085-E8A6-8845-BD4E-CB4CCA059FC4}" type="datetimeFigureOut">
               <a:rPr lang="en-US" smtClean="0"/>
-              <a:t>3/12/2026</a:t>
+              <a:t>5/13/2026</a:t>
             </a:fld>
             <a:endParaRPr lang="en-US"/>
           </a:p>
@@ -1946,13 +1757,7 @@
       </p:sp>
       <p:sp>
         <p:nvSpPr>
-          <p:cNvPr id="8" name="Footer Placeholder 7">
-            <a:extLst>
-              <a:ext uri="{FF2B5EF4-FFF2-40B4-BE49-F238E27FC236}">
-                <a16:creationId xmlns:a16="http://schemas.microsoft.com/office/drawing/2014/main" id="{ABB4F78D-126C-CB34-2DDE-94D9051E8030}"/>
-              </a:ext>
-            </a:extLst>
-          </p:cNvPr>
+          <p:cNvPr id="8" name="Footer Placeholder 7"/>
           <p:cNvSpPr>
             <a:spLocks noGrp="1"/>
           </p:cNvSpPr>
@@ -1971,13 +1776,7 @@
       </p:sp>
       <p:sp>
         <p:nvSpPr>
-          <p:cNvPr id="9" name="Slide Number Placeholder 8">
-            <a:extLst>
-              <a:ext uri="{FF2B5EF4-FFF2-40B4-BE49-F238E27FC236}">
-                <a16:creationId xmlns:a16="http://schemas.microsoft.com/office/drawing/2014/main" id="{7625EBE5-632B-EFF8-B4F5-47EF4ADD58C7}"/>
-              </a:ext>
-            </a:extLst>
-          </p:cNvPr>
+          <p:cNvPr id="9" name="Slide Number Placeholder 8"/>
           <p:cNvSpPr>
             <a:spLocks noGrp="1"/>
           </p:cNvSpPr>
@@ -1990,7 +1789,7 @@
           <a:bodyPr/>
           <a:lstStyle/>
           <a:p>
-            <a:fld id="{99BE45E6-D08F-4AE8-A5AB-B3E76F362C9F}" type="slidenum">
+            <a:fld id="{C1FF6DA9-008F-8B48-92A6-B652298478BF}" type="slidenum">
               <a:rPr lang="en-US" smtClean="0"/>
               <a:t>‹#›</a:t>
             </a:fld>
@@ -2001,7 +1800,7 @@
     </p:spTree>
     <p:extLst>
       <p:ext uri="{BB962C8B-B14F-4D97-AF65-F5344CB8AC3E}">
-        <p14:creationId xmlns:p14="http://schemas.microsoft.com/office/powerpoint/2010/main" val="3740760156"/>
+        <p14:creationId xmlns:p14="http://schemas.microsoft.com/office/powerpoint/2010/main" val="3164038928"/>
       </p:ext>
     </p:extLst>
   </p:cSld>
@@ -2030,13 +1829,7 @@
       </p:grpSpPr>
       <p:sp>
         <p:nvSpPr>
-          <p:cNvPr id="2" name="Title 1">
-            <a:extLst>
-              <a:ext uri="{FF2B5EF4-FFF2-40B4-BE49-F238E27FC236}">
-                <a16:creationId xmlns:a16="http://schemas.microsoft.com/office/drawing/2014/main" id="{C4EAC0FB-D2CA-E0D3-B069-520059EC918F}"/>
-              </a:ext>
-            </a:extLst>
-          </p:cNvPr>
+          <p:cNvPr id="2" name="Title 1"/>
           <p:cNvSpPr>
             <a:spLocks noGrp="1"/>
           </p:cNvSpPr>
@@ -2058,13 +1851,7 @@
       </p:sp>
       <p:sp>
         <p:nvSpPr>
-          <p:cNvPr id="3" name="Date Placeholder 2">
-            <a:extLst>
-              <a:ext uri="{FF2B5EF4-FFF2-40B4-BE49-F238E27FC236}">
-                <a16:creationId xmlns:a16="http://schemas.microsoft.com/office/drawing/2014/main" id="{8B827D8E-0372-F7C3-03FF-CC0481C1FB26}"/>
-              </a:ext>
-            </a:extLst>
-          </p:cNvPr>
+          <p:cNvPr id="3" name="Date Placeholder 2"/>
           <p:cNvSpPr>
             <a:spLocks noGrp="1"/>
           </p:cNvSpPr>
@@ -2077,9 +1864,9 @@
           <a:bodyPr/>
           <a:lstStyle/>
           <a:p>
-            <a:fld id="{28C98AA7-5CB1-4BE3-9D5B-E12C9AF6A819}" type="datetimeFigureOut">
+            <a:fld id="{5BCAD085-E8A6-8845-BD4E-CB4CCA059FC4}" type="datetimeFigureOut">
               <a:rPr lang="en-US" smtClean="0"/>
-              <a:t>3/12/2026</a:t>
+              <a:t>5/13/2026</a:t>
             </a:fld>
             <a:endParaRPr lang="en-US"/>
           </a:p>
@@ -2087,13 +1874,7 @@
       </p:sp>
       <p:sp>
         <p:nvSpPr>
-          <p:cNvPr id="4" name="Footer Placeholder 3">
-            <a:extLst>
-              <a:ext uri="{FF2B5EF4-FFF2-40B4-BE49-F238E27FC236}">
-                <a16:creationId xmlns:a16="http://schemas.microsoft.com/office/drawing/2014/main" id="{034DD733-4F71-DF24-1A33-06C7BA3AA9D7}"/>
-              </a:ext>
-            </a:extLst>
-          </p:cNvPr>
+          <p:cNvPr id="4" name="Footer Placeholder 3"/>
           <p:cNvSpPr>
             <a:spLocks noGrp="1"/>
           </p:cNvSpPr>
@@ -2112,13 +1893,7 @@
       </p:sp>
       <p:sp>
         <p:nvSpPr>
-          <p:cNvPr id="5" name="Slide Number Placeholder 4">
-            <a:extLst>
-              <a:ext uri="{FF2B5EF4-FFF2-40B4-BE49-F238E27FC236}">
-                <a16:creationId xmlns:a16="http://schemas.microsoft.com/office/drawing/2014/main" id="{08F20BDD-74DF-6ABB-FB99-F316234B05CC}"/>
-              </a:ext>
-            </a:extLst>
-          </p:cNvPr>
+          <p:cNvPr id="5" name="Slide Number Placeholder 4"/>
           <p:cNvSpPr>
             <a:spLocks noGrp="1"/>
           </p:cNvSpPr>
@@ -2131,7 +1906,7 @@
           <a:bodyPr/>
           <a:lstStyle/>
           <a:p>
-            <a:fld id="{99BE45E6-D08F-4AE8-A5AB-B3E76F362C9F}" type="slidenum">
+            <a:fld id="{C1FF6DA9-008F-8B48-92A6-B652298478BF}" type="slidenum">
               <a:rPr lang="en-US" smtClean="0"/>
               <a:t>‹#›</a:t>
             </a:fld>
@@ -2142,7 +1917,7 @@
     </p:spTree>
     <p:extLst>
       <p:ext uri="{BB962C8B-B14F-4D97-AF65-F5344CB8AC3E}">
-        <p14:creationId xmlns:p14="http://schemas.microsoft.com/office/powerpoint/2010/main" val="236122552"/>
+        <p14:creationId xmlns:p14="http://schemas.microsoft.com/office/powerpoint/2010/main" val="2186083874"/>
       </p:ext>
     </p:extLst>
   </p:cSld>
@@ -2171,13 +1946,7 @@
       </p:grpSpPr>
       <p:sp>
         <p:nvSpPr>
-          <p:cNvPr id="2" name="Date Placeholder 1">
-            <a:extLst>
-              <a:ext uri="{FF2B5EF4-FFF2-40B4-BE49-F238E27FC236}">
-                <a16:creationId xmlns:a16="http://schemas.microsoft.com/office/drawing/2014/main" id="{BF3F7652-B372-55AA-CEDB-8D892FDEE3B9}"/>
-              </a:ext>
-            </a:extLst>
-          </p:cNvPr>
+          <p:cNvPr id="2" name="Date Placeholder 1"/>
           <p:cNvSpPr>
             <a:spLocks noGrp="1"/>
           </p:cNvSpPr>
@@ -2190,9 +1959,9 @@
           <a:bodyPr/>
           <a:lstStyle/>
           <a:p>
-            <a:fld id="{28C98AA7-5CB1-4BE3-9D5B-E12C9AF6A819}" type="datetimeFigureOut">
+            <a:fld id="{5BCAD085-E8A6-8845-BD4E-CB4CCA059FC4}" type="datetimeFigureOut">
               <a:rPr lang="en-US" smtClean="0"/>
-              <a:t>3/12/2026</a:t>
+              <a:t>5/13/2026</a:t>
             </a:fld>
             <a:endParaRPr lang="en-US"/>
           </a:p>
@@ -2200,13 +1969,7 @@
       </p:sp>
       <p:sp>
         <p:nvSpPr>
-          <p:cNvPr id="3" name="Footer Placeholder 2">
-            <a:extLst>
-              <a:ext uri="{FF2B5EF4-FFF2-40B4-BE49-F238E27FC236}">
-                <a16:creationId xmlns:a16="http://schemas.microsoft.com/office/drawing/2014/main" id="{89ED008C-651B-9C92-F2CF-CFE58F5C9E31}"/>
-              </a:ext>
-            </a:extLst>
-          </p:cNvPr>
+          <p:cNvPr id="3" name="Footer Placeholder 2"/>
           <p:cNvSpPr>
             <a:spLocks noGrp="1"/>
           </p:cNvSpPr>
@@ -2225,13 +1988,7 @@
       </p:sp>
       <p:sp>
         <p:nvSpPr>
-          <p:cNvPr id="4" name="Slide Number Placeholder 3">
-            <a:extLst>
-              <a:ext uri="{FF2B5EF4-FFF2-40B4-BE49-F238E27FC236}">
-                <a16:creationId xmlns:a16="http://schemas.microsoft.com/office/drawing/2014/main" id="{1DB73729-A999-7C87-7C87-E4CAFD8214F8}"/>
-              </a:ext>
-            </a:extLst>
-          </p:cNvPr>
+          <p:cNvPr id="4" name="Slide Number Placeholder 3"/>
           <p:cNvSpPr>
             <a:spLocks noGrp="1"/>
           </p:cNvSpPr>
@@ -2244,7 +2001,7 @@
           <a:bodyPr/>
           <a:lstStyle/>
           <a:p>
-            <a:fld id="{99BE45E6-D08F-4AE8-A5AB-B3E76F362C9F}" type="slidenum">
+            <a:fld id="{C1FF6DA9-008F-8B48-92A6-B652298478BF}" type="slidenum">
               <a:rPr lang="en-US" smtClean="0"/>
               <a:t>‹#›</a:t>
             </a:fld>
@@ -2255,7 +2012,7 @@
     </p:spTree>
     <p:extLst>
       <p:ext uri="{BB962C8B-B14F-4D97-AF65-F5344CB8AC3E}">
-        <p14:creationId xmlns:p14="http://schemas.microsoft.com/office/powerpoint/2010/main" val="3988268531"/>
+        <p14:creationId xmlns:p14="http://schemas.microsoft.com/office/powerpoint/2010/main" val="310677379"/>
       </p:ext>
     </p:extLst>
   </p:cSld>
@@ -2284,13 +2041,7 @@
       </p:grpSpPr>
       <p:sp>
         <p:nvSpPr>
-          <p:cNvPr id="2" name="Title 1">
-            <a:extLst>
-              <a:ext uri="{FF2B5EF4-FFF2-40B4-BE49-F238E27FC236}">
-                <a16:creationId xmlns:a16="http://schemas.microsoft.com/office/drawing/2014/main" id="{AF64F8D5-B7DE-D7B9-C481-D3F9534A3348}"/>
-              </a:ext>
-            </a:extLst>
-          </p:cNvPr>
+          <p:cNvPr id="2" name="Title 1"/>
           <p:cNvSpPr>
             <a:spLocks noGrp="1"/>
           </p:cNvSpPr>
@@ -2300,15 +2051,15 @@
         </p:nvSpPr>
         <p:spPr>
           <a:xfrm>
-            <a:off x="839788" y="457200"/>
-            <a:ext cx="3932237" cy="1600200"/>
+            <a:off x="609601" y="273050"/>
+            <a:ext cx="4011084" cy="1162050"/>
           </a:xfrm>
         </p:spPr>
         <p:txBody>
           <a:bodyPr anchor="b"/>
           <a:lstStyle>
-            <a:lvl1pPr>
-              <a:defRPr sz="3200"/>
+            <a:lvl1pPr algn="l">
+              <a:defRPr sz="2000" b="1"/>
             </a:lvl1pPr>
           </a:lstStyle>
           <a:p>
@@ -2321,13 +2072,7 @@
       </p:sp>
       <p:sp>
         <p:nvSpPr>
-          <p:cNvPr id="3" name="Content Placeholder 2">
-            <a:extLst>
-              <a:ext uri="{FF2B5EF4-FFF2-40B4-BE49-F238E27FC236}">
-                <a16:creationId xmlns:a16="http://schemas.microsoft.com/office/drawing/2014/main" id="{72E5F951-94D7-0AC9-82A8-C2558295BF61}"/>
-              </a:ext>
-            </a:extLst>
-          </p:cNvPr>
+          <p:cNvPr id="3" name="Content Placeholder 2"/>
           <p:cNvSpPr>
             <a:spLocks noGrp="1"/>
           </p:cNvSpPr>
@@ -2337,8 +2082,8 @@
         </p:nvSpPr>
         <p:spPr>
           <a:xfrm>
-            <a:off x="5183188" y="987425"/>
-            <a:ext cx="6172200" cy="4873625"/>
+            <a:off x="4766733" y="273051"/>
+            <a:ext cx="6815667" cy="5853113"/>
           </a:xfrm>
         </p:spPr>
         <p:txBody>
@@ -2411,13 +2156,7 @@
       </p:sp>
       <p:sp>
         <p:nvSpPr>
-          <p:cNvPr id="4" name="Text Placeholder 3">
-            <a:extLst>
-              <a:ext uri="{FF2B5EF4-FFF2-40B4-BE49-F238E27FC236}">
-                <a16:creationId xmlns:a16="http://schemas.microsoft.com/office/drawing/2014/main" id="{82613AAB-7D5D-C970-2759-4D3D9D53B509}"/>
-              </a:ext>
-            </a:extLst>
-          </p:cNvPr>
+          <p:cNvPr id="4" name="Text Placeholder 3"/>
           <p:cNvSpPr>
             <a:spLocks noGrp="1"/>
           </p:cNvSpPr>
@@ -2427,8 +2166,8 @@
         </p:nvSpPr>
         <p:spPr>
           <a:xfrm>
-            <a:off x="839788" y="2057400"/>
-            <a:ext cx="3932237" cy="3811588"/>
+            <a:off x="609601" y="1435101"/>
+            <a:ext cx="4011084" cy="4691063"/>
           </a:xfrm>
         </p:spPr>
         <p:txBody>
@@ -2436,39 +2175,39 @@
           <a:lstStyle>
             <a:lvl1pPr marL="0" indent="0">
               <a:buNone/>
-              <a:defRPr sz="1600"/>
+              <a:defRPr sz="1400"/>
             </a:lvl1pPr>
             <a:lvl2pPr marL="457200" indent="0">
               <a:buNone/>
-              <a:defRPr sz="1400"/>
+              <a:defRPr sz="1200"/>
             </a:lvl2pPr>
             <a:lvl3pPr marL="914400" indent="0">
               <a:buNone/>
-              <a:defRPr sz="1200"/>
+              <a:defRPr sz="1000"/>
             </a:lvl3pPr>
             <a:lvl4pPr marL="1371600" indent="0">
               <a:buNone/>
-              <a:defRPr sz="1000"/>
+              <a:defRPr sz="900"/>
             </a:lvl4pPr>
             <a:lvl5pPr marL="1828800" indent="0">
               <a:buNone/>
-              <a:defRPr sz="1000"/>
+              <a:defRPr sz="900"/>
             </a:lvl5pPr>
             <a:lvl6pPr marL="2286000" indent="0">
               <a:buNone/>
-              <a:defRPr sz="1000"/>
+              <a:defRPr sz="900"/>
             </a:lvl6pPr>
             <a:lvl7pPr marL="2743200" indent="0">
               <a:buNone/>
-              <a:defRPr sz="1000"/>
+              <a:defRPr sz="900"/>
             </a:lvl7pPr>
             <a:lvl8pPr marL="3200400" indent="0">
               <a:buNone/>
-              <a:defRPr sz="1000"/>
+              <a:defRPr sz="900"/>
             </a:lvl8pPr>
             <a:lvl9pPr marL="3657600" indent="0">
               <a:buNone/>
-              <a:defRPr sz="1000"/>
+              <a:defRPr sz="900"/>
             </a:lvl9pPr>
           </a:lstStyle>
           <a:p>
@@ -2482,13 +2221,7 @@
       </p:sp>
       <p:sp>
         <p:nvSpPr>
-          <p:cNvPr id="5" name="Date Placeholder 4">
-            <a:extLst>
-              <a:ext uri="{FF2B5EF4-FFF2-40B4-BE49-F238E27FC236}">
-                <a16:creationId xmlns:a16="http://schemas.microsoft.com/office/drawing/2014/main" id="{68738C40-7A47-5504-B876-4E6ACDB0D153}"/>
-              </a:ext>
-            </a:extLst>
-          </p:cNvPr>
+          <p:cNvPr id="5" name="Date Placeholder 4"/>
           <p:cNvSpPr>
             <a:spLocks noGrp="1"/>
           </p:cNvSpPr>
@@ -2501,9 +2234,9 @@
           <a:bodyPr/>
           <a:lstStyle/>
           <a:p>
-            <a:fld id="{28C98AA7-5CB1-4BE3-9D5B-E12C9AF6A819}" type="datetimeFigureOut">
+            <a:fld id="{5BCAD085-E8A6-8845-BD4E-CB4CCA059FC4}" type="datetimeFigureOut">
               <a:rPr lang="en-US" smtClean="0"/>
-              <a:t>3/12/2026</a:t>
+              <a:t>5/13/2026</a:t>
             </a:fld>
             <a:endParaRPr lang="en-US"/>
           </a:p>
@@ -2511,13 +2244,7 @@
       </p:sp>
       <p:sp>
         <p:nvSpPr>
-          <p:cNvPr id="6" name="Footer Placeholder 5">
-            <a:extLst>
-              <a:ext uri="{FF2B5EF4-FFF2-40B4-BE49-F238E27FC236}">
-                <a16:creationId xmlns:a16="http://schemas.microsoft.com/office/drawing/2014/main" id="{B071E85F-6F1C-8F89-2FCA-D1338C8151A8}"/>
-              </a:ext>
-            </a:extLst>
-          </p:cNvPr>
+          <p:cNvPr id="6" name="Footer Placeholder 5"/>
           <p:cNvSpPr>
             <a:spLocks noGrp="1"/>
           </p:cNvSpPr>
@@ -2536,13 +2263,7 @@
       </p:sp>
       <p:sp>
         <p:nvSpPr>
-          <p:cNvPr id="7" name="Slide Number Placeholder 6">
-            <a:extLst>
-              <a:ext uri="{FF2B5EF4-FFF2-40B4-BE49-F238E27FC236}">
-                <a16:creationId xmlns:a16="http://schemas.microsoft.com/office/drawing/2014/main" id="{E852FE30-7B71-280B-A4D0-CAF2CC1D32E3}"/>
-              </a:ext>
-            </a:extLst>
-          </p:cNvPr>
+          <p:cNvPr id="7" name="Slide Number Placeholder 6"/>
           <p:cNvSpPr>
             <a:spLocks noGrp="1"/>
           </p:cNvSpPr>
@@ -2555,7 +2276,7 @@
           <a:bodyPr/>
           <a:lstStyle/>
           <a:p>
-            <a:fld id="{99BE45E6-D08F-4AE8-A5AB-B3E76F362C9F}" type="slidenum">
+            <a:fld id="{C1FF6DA9-008F-8B48-92A6-B652298478BF}" type="slidenum">
               <a:rPr lang="en-US" smtClean="0"/>
               <a:t>‹#›</a:t>
             </a:fld>
@@ -2566,7 +2287,7 @@
     </p:spTree>
     <p:extLst>
       <p:ext uri="{BB962C8B-B14F-4D97-AF65-F5344CB8AC3E}">
-        <p14:creationId xmlns:p14="http://schemas.microsoft.com/office/powerpoint/2010/main" val="1996261623"/>
+        <p14:creationId xmlns:p14="http://schemas.microsoft.com/office/powerpoint/2010/main" val="2334287326"/>
       </p:ext>
     </p:extLst>
   </p:cSld>
@@ -2595,13 +2316,7 @@
       </p:grpSpPr>
       <p:sp>
         <p:nvSpPr>
-          <p:cNvPr id="2" name="Title 1">
-            <a:extLst>
-              <a:ext uri="{FF2B5EF4-FFF2-40B4-BE49-F238E27FC236}">
-                <a16:creationId xmlns:a16="http://schemas.microsoft.com/office/drawing/2014/main" id="{59D7687E-306D-04F7-FECB-DA50338B9AC2}"/>
-              </a:ext>
-            </a:extLst>
-          </p:cNvPr>
+          <p:cNvPr id="2" name="Title 1"/>
           <p:cNvSpPr>
             <a:spLocks noGrp="1"/>
           </p:cNvSpPr>
@@ -2611,15 +2326,15 @@
         </p:nvSpPr>
         <p:spPr>
           <a:xfrm>
-            <a:off x="839788" y="457200"/>
-            <a:ext cx="3932237" cy="1600200"/>
+            <a:off x="2389717" y="4800600"/>
+            <a:ext cx="7315200" cy="566738"/>
           </a:xfrm>
         </p:spPr>
         <p:txBody>
           <a:bodyPr anchor="b"/>
           <a:lstStyle>
-            <a:lvl1pPr>
-              <a:defRPr sz="3200"/>
+            <a:lvl1pPr algn="l">
+              <a:defRPr sz="2000" b="1"/>
             </a:lvl1pPr>
           </a:lstStyle>
           <a:p>
@@ -2632,13 +2347,7 @@
       </p:sp>
       <p:sp>
         <p:nvSpPr>
-          <p:cNvPr id="3" name="Picture Placeholder 2">
-            <a:extLst>
-              <a:ext uri="{FF2B5EF4-FFF2-40B4-BE49-F238E27FC236}">
-                <a16:creationId xmlns:a16="http://schemas.microsoft.com/office/drawing/2014/main" id="{05072779-A033-432B-D075-68BCFAFB223D}"/>
-              </a:ext>
-            </a:extLst>
-          </p:cNvPr>
+          <p:cNvPr id="3" name="Picture Placeholder 2"/>
           <p:cNvSpPr>
             <a:spLocks noGrp="1"/>
           </p:cNvSpPr>
@@ -2648,8 +2357,8 @@
         </p:nvSpPr>
         <p:spPr>
           <a:xfrm>
-            <a:off x="5183188" y="987425"/>
-            <a:ext cx="6172200" cy="4873625"/>
+            <a:off x="2389717" y="612775"/>
+            <a:ext cx="7315200" cy="4114800"/>
           </a:xfrm>
         </p:spPr>
         <p:txBody>
@@ -2699,13 +2408,7 @@
       </p:sp>
       <p:sp>
         <p:nvSpPr>
-          <p:cNvPr id="4" name="Text Placeholder 3">
-            <a:extLst>
-              <a:ext uri="{FF2B5EF4-FFF2-40B4-BE49-F238E27FC236}">
-                <a16:creationId xmlns:a16="http://schemas.microsoft.com/office/drawing/2014/main" id="{2D99F16A-1D16-DE52-B9CB-897B6E54F0F8}"/>
-              </a:ext>
-            </a:extLst>
-          </p:cNvPr>
+          <p:cNvPr id="4" name="Text Placeholder 3"/>
           <p:cNvSpPr>
             <a:spLocks noGrp="1"/>
           </p:cNvSpPr>
@@ -2715,8 +2418,8 @@
         </p:nvSpPr>
         <p:spPr>
           <a:xfrm>
-            <a:off x="839788" y="2057400"/>
-            <a:ext cx="3932237" cy="3811588"/>
+            <a:off x="2389717" y="5367338"/>
+            <a:ext cx="7315200" cy="804862"/>
           </a:xfrm>
         </p:spPr>
         <p:txBody>
@@ -2724,39 +2427,39 @@
           <a:lstStyle>
             <a:lvl1pPr marL="0" indent="0">
               <a:buNone/>
-              <a:defRPr sz="1600"/>
+              <a:defRPr sz="1400"/>
             </a:lvl1pPr>
             <a:lvl2pPr marL="457200" indent="0">
               <a:buNone/>
-              <a:defRPr sz="1400"/>
+              <a:defRPr sz="1200"/>
             </a:lvl2pPr>
             <a:lvl3pPr marL="914400" indent="0">
               <a:buNone/>
-              <a:defRPr sz="1200"/>
+              <a:defRPr sz="1000"/>
             </a:lvl3pPr>
             <a:lvl4pPr marL="1371600" indent="0">
               <a:buNone/>
-              <a:defRPr sz="1000"/>
+              <a:defRPr sz="900"/>
             </a:lvl4pPr>
             <a:lvl5pPr marL="1828800" indent="0">
               <a:buNone/>
-              <a:defRPr sz="1000"/>
+              <a:defRPr sz="900"/>
             </a:lvl5pPr>
             <a:lvl6pPr marL="2286000" indent="0">
               <a:buNone/>
-              <a:defRPr sz="1000"/>
+              <a:defRPr sz="900"/>
             </a:lvl6pPr>
             <a:lvl7pPr marL="2743200" indent="0">
               <a:buNone/>
-              <a:defRPr sz="1000"/>
+              <a:defRPr sz="900"/>
             </a:lvl7pPr>
             <a:lvl8pPr marL="3200400" indent="0">
               <a:buNone/>
-              <a:defRPr sz="1000"/>
+              <a:defRPr sz="900"/>
             </a:lvl8pPr>
             <a:lvl9pPr marL="3657600" indent="0">
               <a:buNone/>
-              <a:defRPr sz="1000"/>
+              <a:defRPr sz="900"/>
             </a:lvl9pPr>
           </a:lstStyle>
           <a:p>
@@ -2770,13 +2473,7 @@
       </p:sp>
       <p:sp>
         <p:nvSpPr>
-          <p:cNvPr id="5" name="Date Placeholder 4">
-            <a:extLst>
-              <a:ext uri="{FF2B5EF4-FFF2-40B4-BE49-F238E27FC236}">
-                <a16:creationId xmlns:a16="http://schemas.microsoft.com/office/drawing/2014/main" id="{A21AB07A-AF2C-AD71-5FF8-9ABDE91D9C4F}"/>
-              </a:ext>
-            </a:extLst>
-          </p:cNvPr>
+          <p:cNvPr id="5" name="Date Placeholder 4"/>
           <p:cNvSpPr>
             <a:spLocks noGrp="1"/>
           </p:cNvSpPr>
@@ -2789,9 +2486,9 @@
           <a:bodyPr/>
           <a:lstStyle/>
           <a:p>
-            <a:fld id="{28C98AA7-5CB1-4BE3-9D5B-E12C9AF6A819}" type="datetimeFigureOut">
+            <a:fld id="{5BCAD085-E8A6-8845-BD4E-CB4CCA059FC4}" type="datetimeFigureOut">
               <a:rPr lang="en-US" smtClean="0"/>
-              <a:t>3/12/2026</a:t>
+              <a:t>5/13/2026</a:t>
             </a:fld>
             <a:endParaRPr lang="en-US"/>
           </a:p>
@@ -2799,13 +2496,7 @@
       </p:sp>
       <p:sp>
         <p:nvSpPr>
-          <p:cNvPr id="6" name="Footer Placeholder 5">
-            <a:extLst>
-              <a:ext uri="{FF2B5EF4-FFF2-40B4-BE49-F238E27FC236}">
-                <a16:creationId xmlns:a16="http://schemas.microsoft.com/office/drawing/2014/main" id="{4C08DFB7-3938-7D6D-81D6-B51F20513F91}"/>
-              </a:ext>
-            </a:extLst>
-          </p:cNvPr>
+          <p:cNvPr id="6" name="Footer Placeholder 5"/>
           <p:cNvSpPr>
             <a:spLocks noGrp="1"/>
           </p:cNvSpPr>
@@ -2824,13 +2515,7 @@
       </p:sp>
       <p:sp>
         <p:nvSpPr>
-          <p:cNvPr id="7" name="Slide Number Placeholder 6">
-            <a:extLst>
-              <a:ext uri="{FF2B5EF4-FFF2-40B4-BE49-F238E27FC236}">
-                <a16:creationId xmlns:a16="http://schemas.microsoft.com/office/drawing/2014/main" id="{E8D670D0-6B8D-01E1-BDB0-3C8AEE995EE2}"/>
-              </a:ext>
-            </a:extLst>
-          </p:cNvPr>
+          <p:cNvPr id="7" name="Slide Number Placeholder 6"/>
           <p:cNvSpPr>
             <a:spLocks noGrp="1"/>
           </p:cNvSpPr>
@@ -2843,7 +2528,7 @@
           <a:bodyPr/>
           <a:lstStyle/>
           <a:p>
-            <a:fld id="{99BE45E6-D08F-4AE8-A5AB-B3E76F362C9F}" type="slidenum">
+            <a:fld id="{C1FF6DA9-008F-8B48-92A6-B652298478BF}" type="slidenum">
               <a:rPr lang="en-US" smtClean="0"/>
               <a:t>‹#›</a:t>
             </a:fld>
@@ -2854,7 +2539,7 @@
     </p:spTree>
     <p:extLst>
       <p:ext uri="{BB962C8B-B14F-4D97-AF65-F5344CB8AC3E}">
-        <p14:creationId xmlns:p14="http://schemas.microsoft.com/office/powerpoint/2010/main" val="476739956"/>
+        <p14:creationId xmlns:p14="http://schemas.microsoft.com/office/powerpoint/2010/main" val="2859306555"/>
       </p:ext>
     </p:extLst>
   </p:cSld>
@@ -2888,13 +2573,7 @@
       </p:grpSpPr>
       <p:sp>
         <p:nvSpPr>
-          <p:cNvPr id="2" name="Title Placeholder 1">
-            <a:extLst>
-              <a:ext uri="{FF2B5EF4-FFF2-40B4-BE49-F238E27FC236}">
-                <a16:creationId xmlns:a16="http://schemas.microsoft.com/office/drawing/2014/main" id="{EA640210-77E2-9484-06A2-5941B0F1DC4A}"/>
-              </a:ext>
-            </a:extLst>
-          </p:cNvPr>
+          <p:cNvPr id="2" name="Title Placeholder 1"/>
           <p:cNvSpPr>
             <a:spLocks noGrp="1"/>
           </p:cNvSpPr>
@@ -2904,8 +2583,8 @@
         </p:nvSpPr>
         <p:spPr>
           <a:xfrm>
-            <a:off x="838200" y="365125"/>
-            <a:ext cx="10515600" cy="1325563"/>
+            <a:off x="609600" y="274638"/>
+            <a:ext cx="10972800" cy="1143000"/>
           </a:xfrm>
           <a:prstGeom prst="rect">
             <a:avLst/>
@@ -2926,13 +2605,7 @@
       </p:sp>
       <p:sp>
         <p:nvSpPr>
-          <p:cNvPr id="3" name="Text Placeholder 2">
-            <a:extLst>
-              <a:ext uri="{FF2B5EF4-FFF2-40B4-BE49-F238E27FC236}">
-                <a16:creationId xmlns:a16="http://schemas.microsoft.com/office/drawing/2014/main" id="{613AAFF1-CF1F-EAE1-7812-81CAA19707ED}"/>
-              </a:ext>
-            </a:extLst>
-          </p:cNvPr>
+          <p:cNvPr id="3" name="Text Placeholder 2"/>
           <p:cNvSpPr>
             <a:spLocks noGrp="1"/>
           </p:cNvSpPr>
@@ -2942,8 +2615,8 @@
         </p:nvSpPr>
         <p:spPr>
           <a:xfrm>
-            <a:off x="838200" y="1825625"/>
-            <a:ext cx="10515600" cy="4351338"/>
+            <a:off x="609600" y="1600201"/>
+            <a:ext cx="10972800" cy="4525963"/>
           </a:xfrm>
           <a:prstGeom prst="rect">
             <a:avLst/>
@@ -2993,13 +2666,7 @@
       </p:sp>
       <p:sp>
         <p:nvSpPr>
-          <p:cNvPr id="4" name="Date Placeholder 3">
-            <a:extLst>
-              <a:ext uri="{FF2B5EF4-FFF2-40B4-BE49-F238E27FC236}">
-                <a16:creationId xmlns:a16="http://schemas.microsoft.com/office/drawing/2014/main" id="{6D39657A-E684-E47A-E282-E7ECB0585117}"/>
-              </a:ext>
-            </a:extLst>
-          </p:cNvPr>
+          <p:cNvPr id="4" name="Date Placeholder 3"/>
           <p:cNvSpPr>
             <a:spLocks noGrp="1"/>
           </p:cNvSpPr>
@@ -3009,8 +2676,8 @@
         </p:nvSpPr>
         <p:spPr>
           <a:xfrm>
-            <a:off x="838200" y="6356350"/>
-            <a:ext cx="2743200" cy="365125"/>
+            <a:off x="609600" y="6356351"/>
+            <a:ext cx="2844800" cy="365125"/>
           </a:xfrm>
           <a:prstGeom prst="rect">
             <a:avLst/>
@@ -3023,16 +2690,16 @@
               <a:defRPr sz="1200">
                 <a:solidFill>
                   <a:schemeClr val="tx1">
-                    <a:tint val="82000"/>
+                    <a:tint val="75000"/>
                   </a:schemeClr>
                 </a:solidFill>
               </a:defRPr>
             </a:lvl1pPr>
           </a:lstStyle>
           <a:p>
-            <a:fld id="{28C98AA7-5CB1-4BE3-9D5B-E12C9AF6A819}" type="datetimeFigureOut">
+            <a:fld id="{5BCAD085-E8A6-8845-BD4E-CB4CCA059FC4}" type="datetimeFigureOut">
               <a:rPr lang="en-US" smtClean="0"/>
-              <a:t>3/12/2026</a:t>
+              <a:t>5/13/2026</a:t>
             </a:fld>
             <a:endParaRPr lang="en-US"/>
           </a:p>
@@ -3040,13 +2707,7 @@
       </p:sp>
       <p:sp>
         <p:nvSpPr>
-          <p:cNvPr id="5" name="Footer Placeholder 4">
-            <a:extLst>
-              <a:ext uri="{FF2B5EF4-FFF2-40B4-BE49-F238E27FC236}">
-                <a16:creationId xmlns:a16="http://schemas.microsoft.com/office/drawing/2014/main" id="{79AB6C9E-B377-6B25-21F4-94763B441F52}"/>
-              </a:ext>
-            </a:extLst>
-          </p:cNvPr>
+          <p:cNvPr id="5" name="Footer Placeholder 4"/>
           <p:cNvSpPr>
             <a:spLocks noGrp="1"/>
           </p:cNvSpPr>
@@ -3056,8 +2717,8 @@
         </p:nvSpPr>
         <p:spPr>
           <a:xfrm>
-            <a:off x="4038600" y="6356350"/>
-            <a:ext cx="4114800" cy="365125"/>
+            <a:off x="4165600" y="6356351"/>
+            <a:ext cx="3860800" cy="365125"/>
           </a:xfrm>
           <a:prstGeom prst="rect">
             <a:avLst/>
@@ -3070,7 +2731,7 @@
               <a:defRPr sz="1200">
                 <a:solidFill>
                   <a:schemeClr val="tx1">
-                    <a:tint val="82000"/>
+                    <a:tint val="75000"/>
                   </a:schemeClr>
                 </a:solidFill>
               </a:defRPr>
@@ -3083,13 +2744,7 @@
       </p:sp>
       <p:sp>
         <p:nvSpPr>
-          <p:cNvPr id="6" name="Slide Number Placeholder 5">
-            <a:extLst>
-              <a:ext uri="{FF2B5EF4-FFF2-40B4-BE49-F238E27FC236}">
-                <a16:creationId xmlns:a16="http://schemas.microsoft.com/office/drawing/2014/main" id="{C99ECC1D-4405-A2DB-D679-487A354A8FB6}"/>
-              </a:ext>
-            </a:extLst>
-          </p:cNvPr>
+          <p:cNvPr id="6" name="Slide Number Placeholder 5"/>
           <p:cNvSpPr>
             <a:spLocks noGrp="1"/>
           </p:cNvSpPr>
@@ -3099,8 +2754,8 @@
         </p:nvSpPr>
         <p:spPr>
           <a:xfrm>
-            <a:off x="8610600" y="6356350"/>
-            <a:ext cx="2743200" cy="365125"/>
+            <a:off x="8737600" y="6356351"/>
+            <a:ext cx="2844800" cy="365125"/>
           </a:xfrm>
           <a:prstGeom prst="rect">
             <a:avLst/>
@@ -3113,14 +2768,14 @@
               <a:defRPr sz="1200">
                 <a:solidFill>
                   <a:schemeClr val="tx1">
-                    <a:tint val="82000"/>
+                    <a:tint val="75000"/>
                   </a:schemeClr>
                 </a:solidFill>
               </a:defRPr>
             </a:lvl1pPr>
           </a:lstStyle>
           <a:p>
-            <a:fld id="{99BE45E6-D08F-4AE8-A5AB-B3E76F362C9F}" type="slidenum">
+            <a:fld id="{C1FF6DA9-008F-8B48-92A6-B652298478BF}" type="slidenum">
               <a:rPr lang="en-US" smtClean="0"/>
               <a:t>‹#›</a:t>
             </a:fld>
@@ -3131,31 +2786,27 @@
     </p:spTree>
     <p:extLst>
       <p:ext uri="{BB962C8B-B14F-4D97-AF65-F5344CB8AC3E}">
-        <p14:creationId xmlns:p14="http://schemas.microsoft.com/office/powerpoint/2010/main" val="974698016"/>
+        <p14:creationId xmlns:p14="http://schemas.microsoft.com/office/powerpoint/2010/main" val="3540135594"/>
       </p:ext>
     </p:extLst>
   </p:cSld>
   <p:clrMap bg1="lt1" tx1="dk1" bg2="lt2" tx2="dk2" accent1="accent1" accent2="accent2" accent3="accent3" accent4="accent4" accent5="accent5" accent6="accent6" hlink="hlink" folHlink="folHlink"/>
   <p:sldLayoutIdLst>
-    <p:sldLayoutId id="2147483649" r:id="rId1"/>
-    <p:sldLayoutId id="2147483650" r:id="rId2"/>
-    <p:sldLayoutId id="2147483651" r:id="rId3"/>
-    <p:sldLayoutId id="2147483652" r:id="rId4"/>
-    <p:sldLayoutId id="2147483653" r:id="rId5"/>
-    <p:sldLayoutId id="2147483654" r:id="rId6"/>
-    <p:sldLayoutId id="2147483655" r:id="rId7"/>
-    <p:sldLayoutId id="2147483656" r:id="rId8"/>
-    <p:sldLayoutId id="2147483657" r:id="rId9"/>
-    <p:sldLayoutId id="2147483658" r:id="rId10"/>
-    <p:sldLayoutId id="2147483659" r:id="rId11"/>
-    <p:sldLayoutId id="2147483660" r:id="rId12"/>
+    <p:sldLayoutId id="2147483661" r:id="rId1"/>
+    <p:sldLayoutId id="2147483662" r:id="rId2"/>
+    <p:sldLayoutId id="2147483663" r:id="rId3"/>
+    <p:sldLayoutId id="2147483664" r:id="rId4"/>
+    <p:sldLayoutId id="2147483665" r:id="rId5"/>
+    <p:sldLayoutId id="2147483666" r:id="rId6"/>
+    <p:sldLayoutId id="2147483667" r:id="rId7"/>
+    <p:sldLayoutId id="2147483668" r:id="rId8"/>
+    <p:sldLayoutId id="2147483669" r:id="rId9"/>
+    <p:sldLayoutId id="2147483670" r:id="rId10"/>
+    <p:sldLayoutId id="2147483671" r:id="rId11"/>
   </p:sldLayoutIdLst>
   <p:txStyles>
     <p:titleStyle>
-      <a:lvl1pPr algn="l" defTabSz="914400" rtl="0" eaLnBrk="1" latinLnBrk="0" hangingPunct="1">
-        <a:lnSpc>
-          <a:spcPct val="90000"/>
-        </a:lnSpc>
+      <a:lvl1pPr algn="ctr" defTabSz="457200" rtl="0" eaLnBrk="1" latinLnBrk="0" hangingPunct="1">
         <a:spcBef>
           <a:spcPct val="0"/>
         </a:spcBef>
@@ -3171,15 +2822,27 @@
       </a:lvl1pPr>
     </p:titleStyle>
     <p:bodyStyle>
-      <a:lvl1pPr marL="228600" indent="-228600" algn="l" defTabSz="914400" rtl="0" eaLnBrk="1" latinLnBrk="0" hangingPunct="1">
-        <a:lnSpc>
-          <a:spcPct val="90000"/>
-        </a:lnSpc>
+      <a:lvl1pPr marL="342900" indent="-342900" algn="l" defTabSz="457200" rtl="0" eaLnBrk="1" latinLnBrk="0" hangingPunct="1">
         <a:spcBef>
-          <a:spcPts val="1000"/>
+          <a:spcPct val="20000"/>
         </a:spcBef>
-        <a:buFont typeface="Arial" panose="020B0604020202020204" pitchFamily="34" charset="0"/>
+        <a:buFont typeface="Arial"/>
         <a:buChar char="•"/>
+        <a:defRPr sz="3200" kern="1200">
+          <a:solidFill>
+            <a:schemeClr val="tx1"/>
+          </a:solidFill>
+          <a:latin typeface="+mn-lt"/>
+          <a:ea typeface="+mn-ea"/>
+          <a:cs typeface="+mn-cs"/>
+        </a:defRPr>
+      </a:lvl1pPr>
+      <a:lvl2pPr marL="742950" indent="-285750" algn="l" defTabSz="457200" rtl="0" eaLnBrk="1" latinLnBrk="0" hangingPunct="1">
+        <a:spcBef>
+          <a:spcPct val="20000"/>
+        </a:spcBef>
+        <a:buFont typeface="Arial"/>
+        <a:buChar char="–"/>
         <a:defRPr sz="2800" kern="1200">
           <a:solidFill>
             <a:schemeClr val="tx1"/>
@@ -3188,15 +2851,12 @@
           <a:ea typeface="+mn-ea"/>
           <a:cs typeface="+mn-cs"/>
         </a:defRPr>
-      </a:lvl1pPr>
-      <a:lvl2pPr marL="685800" indent="-228600" algn="l" defTabSz="914400" rtl="0" eaLnBrk="1" latinLnBrk="0" hangingPunct="1">
-        <a:lnSpc>
-          <a:spcPct val="90000"/>
-        </a:lnSpc>
+      </a:lvl2pPr>
+      <a:lvl3pPr marL="1143000" indent="-228600" algn="l" defTabSz="457200" rtl="0" eaLnBrk="1" latinLnBrk="0" hangingPunct="1">
         <a:spcBef>
-          <a:spcPts val="500"/>
+          <a:spcPct val="20000"/>
         </a:spcBef>
-        <a:buFont typeface="Arial" panose="020B0604020202020204" pitchFamily="34" charset="0"/>
+        <a:buFont typeface="Arial"/>
         <a:buChar char="•"/>
         <a:defRPr sz="2400" kern="1200">
           <a:solidFill>
@@ -3206,15 +2866,42 @@
           <a:ea typeface="+mn-ea"/>
           <a:cs typeface="+mn-cs"/>
         </a:defRPr>
-      </a:lvl2pPr>
-      <a:lvl3pPr marL="1143000" indent="-228600" algn="l" defTabSz="914400" rtl="0" eaLnBrk="1" latinLnBrk="0" hangingPunct="1">
-        <a:lnSpc>
-          <a:spcPct val="90000"/>
-        </a:lnSpc>
+      </a:lvl3pPr>
+      <a:lvl4pPr marL="1600200" indent="-228600" algn="l" defTabSz="457200" rtl="0" eaLnBrk="1" latinLnBrk="0" hangingPunct="1">
         <a:spcBef>
-          <a:spcPts val="500"/>
+          <a:spcPct val="20000"/>
         </a:spcBef>
-        <a:buFont typeface="Arial" panose="020B0604020202020204" pitchFamily="34" charset="0"/>
+        <a:buFont typeface="Arial"/>
+        <a:buChar char="–"/>
+        <a:defRPr sz="2000" kern="1200">
+          <a:solidFill>
+            <a:schemeClr val="tx1"/>
+          </a:solidFill>
+          <a:latin typeface="+mn-lt"/>
+          <a:ea typeface="+mn-ea"/>
+          <a:cs typeface="+mn-cs"/>
+        </a:defRPr>
+      </a:lvl4pPr>
+      <a:lvl5pPr marL="2057400" indent="-228600" algn="l" defTabSz="457200" rtl="0" eaLnBrk="1" latinLnBrk="0" hangingPunct="1">
+        <a:spcBef>
+          <a:spcPct val="20000"/>
+        </a:spcBef>
+        <a:buFont typeface="Arial"/>
+        <a:buChar char="»"/>
+        <a:defRPr sz="2000" kern="1200">
+          <a:solidFill>
+            <a:schemeClr val="tx1"/>
+          </a:solidFill>
+          <a:latin typeface="+mn-lt"/>
+          <a:ea typeface="+mn-ea"/>
+          <a:cs typeface="+mn-cs"/>
+        </a:defRPr>
+      </a:lvl5pPr>
+      <a:lvl6pPr marL="2514600" indent="-228600" algn="l" defTabSz="457200" rtl="0" eaLnBrk="1" latinLnBrk="0" hangingPunct="1">
+        <a:spcBef>
+          <a:spcPct val="20000"/>
+        </a:spcBef>
+        <a:buFont typeface="Arial"/>
         <a:buChar char="•"/>
         <a:defRPr sz="2000" kern="1200">
           <a:solidFill>
@@ -3224,71 +2911,14 @@
           <a:ea typeface="+mn-ea"/>
           <a:cs typeface="+mn-cs"/>
         </a:defRPr>
-      </a:lvl3pPr>
-      <a:lvl4pPr marL="1600200" indent="-228600" algn="l" defTabSz="914400" rtl="0" eaLnBrk="1" latinLnBrk="0" hangingPunct="1">
-        <a:lnSpc>
-          <a:spcPct val="90000"/>
-        </a:lnSpc>
+      </a:lvl6pPr>
+      <a:lvl7pPr marL="2971800" indent="-228600" algn="l" defTabSz="457200" rtl="0" eaLnBrk="1" latinLnBrk="0" hangingPunct="1">
         <a:spcBef>
-          <a:spcPts val="500"/>
+          <a:spcPct val="20000"/>
         </a:spcBef>
-        <a:buFont typeface="Arial" panose="020B0604020202020204" pitchFamily="34" charset="0"/>
+        <a:buFont typeface="Arial"/>
         <a:buChar char="•"/>
-        <a:defRPr sz="1800" kern="1200">
-          <a:solidFill>
-            <a:schemeClr val="tx1"/>
-          </a:solidFill>
-          <a:latin typeface="+mn-lt"/>
-          <a:ea typeface="+mn-ea"/>
-          <a:cs typeface="+mn-cs"/>
-        </a:defRPr>
-      </a:lvl4pPr>
-      <a:lvl5pPr marL="2057400" indent="-228600" algn="l" defTabSz="914400" rtl="0" eaLnBrk="1" latinLnBrk="0" hangingPunct="1">
-        <a:lnSpc>
-          <a:spcPct val="90000"/>
-        </a:lnSpc>
-        <a:spcBef>
-          <a:spcPts val="500"/>
-        </a:spcBef>
-        <a:buFont typeface="Arial" panose="020B0604020202020204" pitchFamily="34" charset="0"/>
-        <a:buChar char="•"/>
-        <a:defRPr sz="1800" kern="1200">
-          <a:solidFill>
-            <a:schemeClr val="tx1"/>
-          </a:solidFill>
-          <a:latin typeface="+mn-lt"/>
-          <a:ea typeface="+mn-ea"/>
-          <a:cs typeface="+mn-cs"/>
-        </a:defRPr>
-      </a:lvl5pPr>
-      <a:lvl6pPr marL="2514600" indent="-228600" algn="l" defTabSz="914400" rtl="0" eaLnBrk="1" latinLnBrk="0" hangingPunct="1">
-        <a:lnSpc>
-          <a:spcPct val="90000"/>
-        </a:lnSpc>
-        <a:spcBef>
-          <a:spcPts val="500"/>
-        </a:spcBef>
-        <a:buFont typeface="Arial" panose="020B0604020202020204" pitchFamily="34" charset="0"/>
-        <a:buChar char="•"/>
-        <a:defRPr sz="1800" kern="1200">
-          <a:solidFill>
-            <a:schemeClr val="tx1"/>
-          </a:solidFill>
-          <a:latin typeface="+mn-lt"/>
-          <a:ea typeface="+mn-ea"/>
-          <a:cs typeface="+mn-cs"/>
-        </a:defRPr>
-      </a:lvl6pPr>
-      <a:lvl7pPr marL="2971800" indent="-228600" algn="l" defTabSz="914400" rtl="0" eaLnBrk="1" latinLnBrk="0" hangingPunct="1">
-        <a:lnSpc>
-          <a:spcPct val="90000"/>
-        </a:lnSpc>
-        <a:spcBef>
-          <a:spcPts val="500"/>
-        </a:spcBef>
-        <a:buFont typeface="Arial" panose="020B0604020202020204" pitchFamily="34" charset="0"/>
-        <a:buChar char="•"/>
-        <a:defRPr sz="1800" kern="1200">
+        <a:defRPr sz="2000" kern="1200">
           <a:solidFill>
             <a:schemeClr val="tx1"/>
           </a:solidFill>
@@ -3297,16 +2927,13 @@
           <a:cs typeface="+mn-cs"/>
         </a:defRPr>
       </a:lvl7pPr>
-      <a:lvl8pPr marL="3429000" indent="-228600" algn="l" defTabSz="914400" rtl="0" eaLnBrk="1" latinLnBrk="0" hangingPunct="1">
-        <a:lnSpc>
-          <a:spcPct val="90000"/>
-        </a:lnSpc>
+      <a:lvl8pPr marL="3429000" indent="-228600" algn="l" defTabSz="457200" rtl="0" eaLnBrk="1" latinLnBrk="0" hangingPunct="1">
         <a:spcBef>
-          <a:spcPts val="500"/>
+          <a:spcPct val="20000"/>
         </a:spcBef>
-        <a:buFont typeface="Arial" panose="020B0604020202020204" pitchFamily="34" charset="0"/>
+        <a:buFont typeface="Arial"/>
         <a:buChar char="•"/>
-        <a:defRPr sz="1800" kern="1200">
+        <a:defRPr sz="2000" kern="1200">
           <a:solidFill>
             <a:schemeClr val="tx1"/>
           </a:solidFill>
@@ -3315,16 +2942,13 @@
           <a:cs typeface="+mn-cs"/>
         </a:defRPr>
       </a:lvl8pPr>
-      <a:lvl9pPr marL="3886200" indent="-228600" algn="l" defTabSz="914400" rtl="0" eaLnBrk="1" latinLnBrk="0" hangingPunct="1">
-        <a:lnSpc>
-          <a:spcPct val="90000"/>
-        </a:lnSpc>
+      <a:lvl9pPr marL="3886200" indent="-228600" algn="l" defTabSz="457200" rtl="0" eaLnBrk="1" latinLnBrk="0" hangingPunct="1">
         <a:spcBef>
-          <a:spcPts val="500"/>
+          <a:spcPct val="20000"/>
         </a:spcBef>
-        <a:buFont typeface="Arial" panose="020B0604020202020204" pitchFamily="34" charset="0"/>
+        <a:buFont typeface="Arial"/>
         <a:buChar char="•"/>
-        <a:defRPr sz="1800" kern="1200">
+        <a:defRPr sz="2000" kern="1200">
           <a:solidFill>
             <a:schemeClr val="tx1"/>
           </a:solidFill>
@@ -3338,7 +2962,7 @@
       <a:defPPr>
         <a:defRPr lang="en-US"/>
       </a:defPPr>
-      <a:lvl1pPr marL="0" algn="l" defTabSz="914400" rtl="0" eaLnBrk="1" latinLnBrk="0" hangingPunct="1">
+      <a:lvl1pPr marL="0" algn="l" defTabSz="457200" rtl="0" eaLnBrk="1" latinLnBrk="0" hangingPunct="1">
         <a:defRPr sz="1800" kern="1200">
           <a:solidFill>
             <a:schemeClr val="tx1"/>
@@ -3348,7 +2972,7 @@
           <a:cs typeface="+mn-cs"/>
         </a:defRPr>
       </a:lvl1pPr>
-      <a:lvl2pPr marL="457200" algn="l" defTabSz="914400" rtl="0" eaLnBrk="1" latinLnBrk="0" hangingPunct="1">
+      <a:lvl2pPr marL="457200" algn="l" defTabSz="457200" rtl="0" eaLnBrk="1" latinLnBrk="0" hangingPunct="1">
         <a:defRPr sz="1800" kern="1200">
           <a:solidFill>
             <a:schemeClr val="tx1"/>
@@ -3358,7 +2982,7 @@
           <a:cs typeface="+mn-cs"/>
         </a:defRPr>
       </a:lvl2pPr>
-      <a:lvl3pPr marL="914400" algn="l" defTabSz="914400" rtl="0" eaLnBrk="1" latinLnBrk="0" hangingPunct="1">
+      <a:lvl3pPr marL="914400" algn="l" defTabSz="457200" rtl="0" eaLnBrk="1" latinLnBrk="0" hangingPunct="1">
         <a:defRPr sz="1800" kern="1200">
           <a:solidFill>
             <a:schemeClr val="tx1"/>
@@ -3368,7 +2992,7 @@
           <a:cs typeface="+mn-cs"/>
         </a:defRPr>
       </a:lvl3pPr>
-      <a:lvl4pPr marL="1371600" algn="l" defTabSz="914400" rtl="0" eaLnBrk="1" latinLnBrk="0" hangingPunct="1">
+      <a:lvl4pPr marL="1371600" algn="l" defTabSz="457200" rtl="0" eaLnBrk="1" latinLnBrk="0" hangingPunct="1">
         <a:defRPr sz="1800" kern="1200">
           <a:solidFill>
             <a:schemeClr val="tx1"/>
@@ -3378,7 +3002,7 @@
           <a:cs typeface="+mn-cs"/>
         </a:defRPr>
       </a:lvl4pPr>
-      <a:lvl5pPr marL="1828800" algn="l" defTabSz="914400" rtl="0" eaLnBrk="1" latinLnBrk="0" hangingPunct="1">
+      <a:lvl5pPr marL="1828800" algn="l" defTabSz="457200" rtl="0" eaLnBrk="1" latinLnBrk="0" hangingPunct="1">
         <a:defRPr sz="1800" kern="1200">
           <a:solidFill>
             <a:schemeClr val="tx1"/>
@@ -3388,7 +3012,7 @@
           <a:cs typeface="+mn-cs"/>
         </a:defRPr>
       </a:lvl5pPr>
-      <a:lvl6pPr marL="2286000" algn="l" defTabSz="914400" rtl="0" eaLnBrk="1" latinLnBrk="0" hangingPunct="1">
+      <a:lvl6pPr marL="2286000" algn="l" defTabSz="457200" rtl="0" eaLnBrk="1" latinLnBrk="0" hangingPunct="1">
         <a:defRPr sz="1800" kern="1200">
           <a:solidFill>
             <a:schemeClr val="tx1"/>
@@ -3398,7 +3022,7 @@
           <a:cs typeface="+mn-cs"/>
         </a:defRPr>
       </a:lvl6pPr>
-      <a:lvl7pPr marL="2743200" algn="l" defTabSz="914400" rtl="0" eaLnBrk="1" latinLnBrk="0" hangingPunct="1">
+      <a:lvl7pPr marL="2743200" algn="l" defTabSz="457200" rtl="0" eaLnBrk="1" latinLnBrk="0" hangingPunct="1">
         <a:defRPr sz="1800" kern="1200">
           <a:solidFill>
             <a:schemeClr val="tx1"/>
@@ -3408,7 +3032,7 @@
           <a:cs typeface="+mn-cs"/>
         </a:defRPr>
       </a:lvl7pPr>
-      <a:lvl8pPr marL="3200400" algn="l" defTabSz="914400" rtl="0" eaLnBrk="1" latinLnBrk="0" hangingPunct="1">
+      <a:lvl8pPr marL="3200400" algn="l" defTabSz="457200" rtl="0" eaLnBrk="1" latinLnBrk="0" hangingPunct="1">
         <a:defRPr sz="1800" kern="1200">
           <a:solidFill>
             <a:schemeClr val="tx1"/>
@@ -3418,7 +3042,7 @@
           <a:cs typeface="+mn-cs"/>
         </a:defRPr>
       </a:lvl8pPr>
-      <a:lvl9pPr marL="3657600" algn="l" defTabSz="914400" rtl="0" eaLnBrk="1" latinLnBrk="0" hangingPunct="1">
+      <a:lvl9pPr marL="3657600" algn="l" defTabSz="457200" rtl="0" eaLnBrk="1" latinLnBrk="0" hangingPunct="1">
         <a:defRPr sz="1800" kern="1200">
           <a:solidFill>
             <a:schemeClr val="tx1"/>
@@ -3452,10 +3076,10 @@
       </p:grpSpPr>
       <p:sp>
         <p:nvSpPr>
-          <p:cNvPr id="23" name="Rectangle 22">
+          <p:cNvPr id="6" name="Rectangle 5">
             <a:extLst>
               <a:ext uri="{FF2B5EF4-FFF2-40B4-BE49-F238E27FC236}">
-                <a16:creationId xmlns:a16="http://schemas.microsoft.com/office/drawing/2014/main" id="{C9CEAF07-016B-B46B-A891-43566D92A9E5}"/>
+                <a16:creationId xmlns:a16="http://schemas.microsoft.com/office/drawing/2014/main" id="{B3D6B11C-6E74-C4A8-4E50-6317CD66A550}"/>
               </a:ext>
             </a:extLst>
           </p:cNvPr>
@@ -3464,8 +3088,8 @@
         </p:nvSpPr>
         <p:spPr>
           <a:xfrm>
-            <a:off x="6060355" y="944547"/>
-            <a:ext cx="5721344" cy="5098537"/>
+            <a:off x="5540661" y="917491"/>
+            <a:ext cx="5919572" cy="5098537"/>
           </a:xfrm>
           <a:prstGeom prst="rect">
             <a:avLst/>
@@ -3512,8 +3136,46 @@
               <a:solidFill>
                 <a:schemeClr val="tx1"/>
               </a:solidFill>
-              <a:latin typeface="Arial" panose="020B0604020202020204" pitchFamily="34" charset="0"/>
-              <a:cs typeface="Arial" panose="020B0604020202020204" pitchFamily="34" charset="0"/>
+              <a:latin typeface="Segoe UI" panose="020B0604020202020204" pitchFamily="34" charset="0"/>
+              <a:cs typeface="Segoe UI" panose="020B0604020202020204" pitchFamily="34" charset="0"/>
+            </a:endParaRPr>
+          </a:p>
+        </p:txBody>
+      </p:sp>
+      <p:sp>
+        <p:nvSpPr>
+          <p:cNvPr id="23" name="Rectangle 22">
+            <a:extLst>
+              <a:ext uri="{FF2B5EF4-FFF2-40B4-BE49-F238E27FC236}">
+                <a16:creationId xmlns:a16="http://schemas.microsoft.com/office/drawing/2014/main" id="{C9CEAF07-016B-B46B-A891-43566D92A9E5}"/>
+              </a:ext>
+            </a:extLst>
+          </p:cNvPr>
+          <p:cNvSpPr/>
+          <p:nvPr/>
+        </p:nvSpPr>
+        <p:spPr>
+          <a:xfrm>
+            <a:off x="5573486" y="944548"/>
+            <a:ext cx="5677106" cy="5098537"/>
+          </a:xfrm>
+          <a:prstGeom prst="rect">
+            <a:avLst/>
+          </a:prstGeom>
+          <a:noFill/>
+        </p:spPr>
+        <p:txBody>
+          <a:bodyPr wrap="square" rtlCol="0">
+            <a:spAutoFit/>
+          </a:bodyPr>
+          <a:lstStyle/>
+          <a:p>
+            <a:pPr defTabSz="457200"/>
+            <a:endParaRPr lang="en-US" sz="900" b="1" dirty="0">
+              <a:solidFill>
+                <a:prstClr val="black"/>
+              </a:solidFill>
+              <a:latin typeface="Segoe UI"/>
             </a:endParaRPr>
           </a:p>
         </p:txBody>
@@ -3536,22 +3198,28 @@
         </p:nvSpPr>
         <p:spPr>
           <a:xfrm>
-            <a:off x="195758" y="144454"/>
-            <a:ext cx="6643170" cy="389949"/>
+            <a:off x="2605667" y="48811"/>
+            <a:ext cx="5823856" cy="1737360"/>
           </a:xfrm>
+          <a:noFill/>
         </p:spPr>
         <p:txBody>
-          <a:bodyPr vert="horz" lIns="0" tIns="0" rIns="0" bIns="0" rtlCol="0" anchor="t" anchorCtr="0">
-            <a:noAutofit/>
+          <a:bodyPr wrap="square">
+            <a:spAutoFit/>
           </a:bodyPr>
           <a:lstStyle/>
           <a:p>
+            <a:pPr algn="l"/>
             <a:r>
-              <a:rPr lang="en-US" sz="2000" dirty="0">
-                <a:latin typeface="Arial" panose="020B0604020202020204" pitchFamily="34" charset="0"/>
-                <a:cs typeface="Arial" panose="020B0604020202020204" pitchFamily="34" charset="0"/>
+              <a:rPr lang="en-US" sz="1300" b="1" dirty="0">
+                <a:solidFill>
+                  <a:srgbClr val="0B1D39"/>
+                </a:solidFill>
+                <a:latin typeface="Segoe UI"/>
+                <a:ea typeface="+mn-ea"/>
+                <a:cs typeface="+mn-cs"/>
               </a:rPr>
-              <a:t>MDA QA INTG: Delivery Updates</a:t>
+              <a:t>                                         MDA QA INTG: Delivery Updates</a:t>
             </a:r>
           </a:p>
         </p:txBody>
@@ -3568,60 +3236,66 @@
           <p:cNvGraphicFramePr>
             <a:graphicFrameLocks noGrp="1"/>
           </p:cNvGraphicFramePr>
-          <p:nvPr/>
+          <p:nvPr>
+            <p:extLst>
+              <p:ext uri="{D42A27DB-BD31-4B8C-83A1-F6EECF244321}">
+                <p14:modId xmlns:p14="http://schemas.microsoft.com/office/powerpoint/2010/main" val="548538075"/>
+              </p:ext>
+            </p:extLst>
+          </p:nvPr>
         </p:nvGraphicFramePr>
         <p:xfrm>
-          <a:off x="6158918" y="4278640"/>
-          <a:ext cx="5492849" cy="1225545"/>
+          <a:off x="5664219" y="4278640"/>
+          <a:ext cx="5292874" cy="1225545"/>
         </p:xfrm>
         <a:graphic>
           <a:graphicData uri="http://schemas.openxmlformats.org/drawingml/2006/table">
             <a:tbl>
               <a:tblPr/>
               <a:tblGrid>
-                <a:gridCol w="1377955">
+                <a:gridCol w="1327790">
                   <a:extLst>
                     <a:ext uri="{9D8B030D-6E8A-4147-A177-3AD203B41FA5}">
                       <a16:colId xmlns:a16="http://schemas.microsoft.com/office/drawing/2014/main" val="1438297696"/>
                     </a:ext>
                   </a:extLst>
                 </a:gridCol>
-                <a:gridCol w="551259">
+                <a:gridCol w="531189">
                   <a:extLst>
                     <a:ext uri="{9D8B030D-6E8A-4147-A177-3AD203B41FA5}">
                       <a16:colId xmlns:a16="http://schemas.microsoft.com/office/drawing/2014/main" val="986964227"/>
                     </a:ext>
                   </a:extLst>
                 </a:gridCol>
-                <a:gridCol w="734198">
+                <a:gridCol w="707468">
                   <a:extLst>
                     <a:ext uri="{9D8B030D-6E8A-4147-A177-3AD203B41FA5}">
                       <a16:colId xmlns:a16="http://schemas.microsoft.com/office/drawing/2014/main" val="872245016"/>
                     </a:ext>
                   </a:extLst>
                 </a:gridCol>
-                <a:gridCol w="543151">
+                <a:gridCol w="523377">
                   <a:extLst>
                     <a:ext uri="{9D8B030D-6E8A-4147-A177-3AD203B41FA5}">
                       <a16:colId xmlns:a16="http://schemas.microsoft.com/office/drawing/2014/main" val="2458755031"/>
                     </a:ext>
                   </a:extLst>
                 </a:gridCol>
-                <a:gridCol w="770517">
+                <a:gridCol w="742465">
                   <a:extLst>
                     <a:ext uri="{9D8B030D-6E8A-4147-A177-3AD203B41FA5}">
                       <a16:colId xmlns:a16="http://schemas.microsoft.com/office/drawing/2014/main" val="1307860481"/>
                     </a:ext>
                   </a:extLst>
                 </a:gridCol>
-                <a:gridCol w="770517">
+                <a:gridCol w="742465">
                   <a:extLst>
                     <a:ext uri="{9D8B030D-6E8A-4147-A177-3AD203B41FA5}">
                       <a16:colId xmlns:a16="http://schemas.microsoft.com/office/drawing/2014/main" val="2449277555"/>
                     </a:ext>
                   </a:extLst>
                 </a:gridCol>
-                <a:gridCol w="745252">
+                <a:gridCol w="718120">
                   <a:extLst>
                     <a:ext uri="{9D8B030D-6E8A-4147-A177-3AD203B41FA5}">
                       <a16:colId xmlns:a16="http://schemas.microsoft.com/office/drawing/2014/main" val="3476617854"/>
@@ -3635,15 +3309,22 @@
                     <a:bodyPr/>
                     <a:lstStyle/>
                     <a:p>
-                      <a:pPr algn="ctr" rtl="0" fontAlgn="ctr"/>
+                      <a:pPr algn="ctr" rtl="0" fontAlgn="ctr">
+                        <a:defRPr sz="1000" b="1">
+                          <a:solidFill>
+                            <a:srgbClr val="FFFFFF"/>
+                          </a:solidFill>
+                          <a:latin typeface="Segoe UI"/>
+                        </a:defRPr>
+                      </a:pPr>
                       <a:r>
-                        <a:rPr lang="en-US" sz="800" b="1" i="0" u="none" strike="noStrike" dirty="0">
+                        <a:rPr lang="en-US" sz="1000" b="1" i="0" u="none" strike="noStrike" dirty="0">
                           <a:solidFill>
-                            <a:srgbClr val="000000"/>
+                            <a:srgbClr val="FFFFFF"/>
                           </a:solidFill>
                           <a:effectLst/>
-                          <a:latin typeface="Arial" panose="020B0604020202020204" pitchFamily="34" charset="0"/>
-                          <a:cs typeface="Arial" panose="020B0604020202020204" pitchFamily="34" charset="0"/>
+                          <a:latin typeface="Segoe UI" panose="020B0604020202020204" pitchFamily="34" charset="0"/>
+                          <a:cs typeface="Segoe UI" panose="020B0604020202020204" pitchFamily="34" charset="0"/>
                         </a:rPr>
                         <a:t>Releases</a:t>
                       </a:r>
@@ -3687,7 +3368,7 @@
                       <a:tailEnd type="none" w="med" len="med"/>
                     </a:lnB>
                     <a:solidFill>
-                      <a:srgbClr val="D9E2F3"/>
+                      <a:schemeClr val="accent1"/>
                     </a:solidFill>
                   </a:tcPr>
                 </a:tc>
@@ -3696,15 +3377,22 @@
                     <a:bodyPr/>
                     <a:lstStyle/>
                     <a:p>
-                      <a:pPr algn="ctr" rtl="0" fontAlgn="ctr"/>
+                      <a:pPr algn="ctr" rtl="0" fontAlgn="ctr">
+                        <a:defRPr sz="1000" b="1">
+                          <a:solidFill>
+                            <a:srgbClr val="FFFFFF"/>
+                          </a:solidFill>
+                          <a:latin typeface="Segoe UI"/>
+                        </a:defRPr>
+                      </a:pPr>
                       <a:r>
-                        <a:rPr lang="en-US" sz="800" b="1" i="0" u="none" strike="noStrike" dirty="0">
+                        <a:rPr lang="en-US" sz="1000" b="1" i="0" u="none" strike="noStrike" dirty="0">
                           <a:solidFill>
-                            <a:srgbClr val="000000"/>
+                            <a:srgbClr val="FFFFFF"/>
                           </a:solidFill>
                           <a:effectLst/>
-                          <a:latin typeface="Arial" panose="020B0604020202020204" pitchFamily="34" charset="0"/>
-                          <a:cs typeface="Arial" panose="020B0604020202020204" pitchFamily="34" charset="0"/>
+                          <a:latin typeface="Segoe UI" panose="020B0604020202020204" pitchFamily="34" charset="0"/>
+                          <a:cs typeface="Segoe UI" panose="020B0604020202020204" pitchFamily="34" charset="0"/>
                         </a:rPr>
                         <a:t>P0</a:t>
                       </a:r>
@@ -3748,7 +3436,7 @@
                       <a:tailEnd type="none" w="med" len="med"/>
                     </a:lnB>
                     <a:solidFill>
-                      <a:srgbClr val="D9E2F3"/>
+                      <a:schemeClr val="accent1"/>
                     </a:solidFill>
                   </a:tcPr>
                 </a:tc>
@@ -3757,15 +3445,22 @@
                     <a:bodyPr/>
                     <a:lstStyle/>
                     <a:p>
-                      <a:pPr algn="ctr" rtl="0" fontAlgn="ctr"/>
+                      <a:pPr algn="ctr" rtl="0" fontAlgn="ctr">
+                        <a:defRPr sz="1000" b="1">
+                          <a:solidFill>
+                            <a:srgbClr val="FFFFFF"/>
+                          </a:solidFill>
+                          <a:latin typeface="Segoe UI"/>
+                        </a:defRPr>
+                      </a:pPr>
                       <a:r>
-                        <a:rPr lang="en-US" sz="800" b="1" i="0" u="none" strike="noStrike" dirty="0">
+                        <a:rPr lang="en-US" sz="1000" b="1" i="0" u="none" strike="noStrike" dirty="0">
                           <a:solidFill>
-                            <a:srgbClr val="000000"/>
+                            <a:srgbClr val="FFFFFF"/>
                           </a:solidFill>
                           <a:effectLst/>
-                          <a:latin typeface="Arial" panose="020B0604020202020204" pitchFamily="34" charset="0"/>
-                          <a:cs typeface="Arial" panose="020B0604020202020204" pitchFamily="34" charset="0"/>
+                          <a:latin typeface="Segoe UI" panose="020B0604020202020204" pitchFamily="34" charset="0"/>
+                          <a:cs typeface="Segoe UI" panose="020B0604020202020204" pitchFamily="34" charset="0"/>
                         </a:rPr>
                         <a:t>P1</a:t>
                       </a:r>
@@ -3809,7 +3504,7 @@
                       <a:tailEnd type="none" w="med" len="med"/>
                     </a:lnB>
                     <a:solidFill>
-                      <a:srgbClr val="D9E2F3"/>
+                      <a:schemeClr val="accent1"/>
                     </a:solidFill>
                   </a:tcPr>
                 </a:tc>
@@ -3818,15 +3513,22 @@
                     <a:bodyPr/>
                     <a:lstStyle/>
                     <a:p>
-                      <a:pPr algn="ctr" rtl="0" fontAlgn="ctr"/>
+                      <a:pPr algn="ctr" rtl="0" fontAlgn="ctr">
+                        <a:defRPr sz="1000" b="1">
+                          <a:solidFill>
+                            <a:srgbClr val="FFFFFF"/>
+                          </a:solidFill>
+                          <a:latin typeface="Segoe UI"/>
+                        </a:defRPr>
+                      </a:pPr>
                       <a:r>
-                        <a:rPr lang="en-US" sz="800" b="1" i="0" u="none" strike="noStrike" dirty="0">
+                        <a:rPr lang="en-US" sz="1000" b="1" i="0" u="none" strike="noStrike" dirty="0">
                           <a:solidFill>
-                            <a:srgbClr val="000000"/>
+                            <a:srgbClr val="FFFFFF"/>
                           </a:solidFill>
                           <a:effectLst/>
-                          <a:latin typeface="Arial" panose="020B0604020202020204" pitchFamily="34" charset="0"/>
-                          <a:cs typeface="Arial" panose="020B0604020202020204" pitchFamily="34" charset="0"/>
+                          <a:latin typeface="Segoe UI" panose="020B0604020202020204" pitchFamily="34" charset="0"/>
+                          <a:cs typeface="Segoe UI" panose="020B0604020202020204" pitchFamily="34" charset="0"/>
                         </a:rPr>
                         <a:t>P2</a:t>
                       </a:r>
@@ -3870,7 +3572,7 @@
                       <a:tailEnd type="none" w="med" len="med"/>
                     </a:lnB>
                     <a:solidFill>
-                      <a:srgbClr val="D9E2F3"/>
+                      <a:schemeClr val="accent1"/>
                     </a:solidFill>
                   </a:tcPr>
                 </a:tc>
@@ -3879,15 +3581,22 @@
                     <a:bodyPr/>
                     <a:lstStyle/>
                     <a:p>
-                      <a:pPr algn="ctr" rtl="0" fontAlgn="ctr"/>
+                      <a:pPr algn="ctr" rtl="0" fontAlgn="ctr">
+                        <a:defRPr sz="1000" b="1">
+                          <a:solidFill>
+                            <a:srgbClr val="FFFFFF"/>
+                          </a:solidFill>
+                          <a:latin typeface="Segoe UI"/>
+                        </a:defRPr>
+                      </a:pPr>
                       <a:r>
-                        <a:rPr lang="en-US" sz="800" b="1" i="0" u="none" strike="noStrike" dirty="0">
+                        <a:rPr lang="en-US" sz="1000" b="1" i="0" u="none" strike="noStrike" dirty="0">
                           <a:solidFill>
-                            <a:srgbClr val="000000"/>
+                            <a:srgbClr val="FFFFFF"/>
                           </a:solidFill>
                           <a:effectLst/>
-                          <a:latin typeface="Arial" panose="020B0604020202020204" pitchFamily="34" charset="0"/>
-                          <a:cs typeface="Arial" panose="020B0604020202020204" pitchFamily="34" charset="0"/>
+                          <a:latin typeface="Segoe UI" panose="020B0604020202020204" pitchFamily="34" charset="0"/>
+                          <a:cs typeface="Segoe UI" panose="020B0604020202020204" pitchFamily="34" charset="0"/>
                         </a:rPr>
                         <a:t>P3</a:t>
                       </a:r>
@@ -3931,7 +3640,7 @@
                       <a:tailEnd type="none" w="med" len="med"/>
                     </a:lnB>
                     <a:solidFill>
-                      <a:srgbClr val="D9E2F3"/>
+                      <a:schemeClr val="accent1"/>
                     </a:solidFill>
                   </a:tcPr>
                 </a:tc>
@@ -3940,15 +3649,22 @@
                     <a:bodyPr/>
                     <a:lstStyle/>
                     <a:p>
-                      <a:pPr algn="ctr" rtl="0" fontAlgn="ctr"/>
+                      <a:pPr algn="ctr" rtl="0" fontAlgn="ctr">
+                        <a:defRPr sz="1000" b="1">
+                          <a:solidFill>
+                            <a:srgbClr val="FFFFFF"/>
+                          </a:solidFill>
+                          <a:latin typeface="Segoe UI"/>
+                        </a:defRPr>
+                      </a:pPr>
                       <a:r>
-                        <a:rPr lang="en-US" sz="800" b="1" i="0" u="none" strike="noStrike" dirty="0">
+                        <a:rPr lang="en-US" sz="1000" b="1" i="0" u="none" strike="noStrike" dirty="0">
                           <a:solidFill>
-                            <a:srgbClr val="000000"/>
+                            <a:srgbClr val="FFFFFF"/>
                           </a:solidFill>
                           <a:effectLst/>
-                          <a:latin typeface="Arial" panose="020B0604020202020204" pitchFamily="34" charset="0"/>
-                          <a:cs typeface="Arial" panose="020B0604020202020204" pitchFamily="34" charset="0"/>
+                          <a:latin typeface="Segoe UI" panose="020B0604020202020204" pitchFamily="34" charset="0"/>
+                          <a:cs typeface="Segoe UI" panose="020B0604020202020204" pitchFamily="34" charset="0"/>
                         </a:rPr>
                         <a:t>P4</a:t>
                       </a:r>
@@ -3992,7 +3708,7 @@
                       <a:tailEnd type="none" w="med" len="med"/>
                     </a:lnB>
                     <a:solidFill>
-                      <a:srgbClr val="D9E2F3"/>
+                      <a:schemeClr val="accent1"/>
                     </a:solidFill>
                   </a:tcPr>
                 </a:tc>
@@ -4001,15 +3717,22 @@
                     <a:bodyPr/>
                     <a:lstStyle/>
                     <a:p>
-                      <a:pPr algn="ctr" rtl="0" fontAlgn="ctr"/>
+                      <a:pPr algn="ctr" rtl="0" fontAlgn="ctr">
+                        <a:defRPr sz="1000" b="1">
+                          <a:solidFill>
+                            <a:srgbClr val="FFFFFF"/>
+                          </a:solidFill>
+                          <a:latin typeface="Segoe UI"/>
+                        </a:defRPr>
+                      </a:pPr>
                       <a:r>
-                        <a:rPr lang="en-US" sz="800" b="1" i="0" u="none" strike="noStrike" dirty="0">
+                        <a:rPr lang="en-US" sz="1000" b="1" i="0" u="none" strike="noStrike" dirty="0">
                           <a:solidFill>
-                            <a:srgbClr val="000000"/>
+                            <a:srgbClr val="FFFFFF"/>
                           </a:solidFill>
                           <a:effectLst/>
-                          <a:latin typeface="Arial" panose="020B0604020202020204" pitchFamily="34" charset="0"/>
-                          <a:cs typeface="Arial" panose="020B0604020202020204" pitchFamily="34" charset="0"/>
+                          <a:latin typeface="Segoe UI" panose="020B0604020202020204" pitchFamily="34" charset="0"/>
+                          <a:cs typeface="Segoe UI" panose="020B0604020202020204" pitchFamily="34" charset="0"/>
                         </a:rPr>
                         <a:t>Total</a:t>
                       </a:r>
@@ -4053,7 +3776,7 @@
                       <a:tailEnd type="none" w="med" len="med"/>
                     </a:lnB>
                     <a:solidFill>
-                      <a:srgbClr val="D9E2F3"/>
+                      <a:schemeClr val="accent1"/>
                     </a:solidFill>
                   </a:tcPr>
                 </a:tc>
@@ -4069,16 +3792,19 @@
                     <a:bodyPr/>
                     <a:lstStyle/>
                     <a:p>
-                      <a:pPr algn="l" rtl="0" fontAlgn="b"/>
+                      <a:pPr>
+                        <a:defRPr sz="800">
+                          <a:latin typeface="Segoe UI"/>
+                        </a:defRPr>
+                      </a:pPr>
                       <a:r>
-                        <a:rPr lang="en-US" sz="800" b="0" i="0" u="none" strike="noStrike" dirty="0">
+                        <a:rPr sz="800" b="0">
                           <a:solidFill>
                             <a:srgbClr val="000000"/>
                           </a:solidFill>
-                          <a:effectLst/>
-                          <a:latin typeface="Arial" panose="020B0604020202020204" pitchFamily="34" charset="0"/>
+                          <a:latin typeface="Segoe UI"/>
                         </a:rPr>
-                        <a:t>Integration progression 51.2</a:t>
+                        <a:t>Integration progression 53.2</a:t>
                       </a:r>
                     </a:p>
                   </a:txBody>
@@ -4126,16 +3852,19 @@
                     <a:bodyPr/>
                     <a:lstStyle/>
                     <a:p>
-                      <a:pPr algn="ctr" rtl="0" fontAlgn="ctr"/>
+                      <a:pPr>
+                        <a:defRPr sz="800">
+                          <a:latin typeface="Segoe UI"/>
+                        </a:defRPr>
+                      </a:pPr>
                       <a:r>
-                        <a:rPr lang="en-US" sz="800" b="0" i="0" u="none" strike="noStrike" dirty="0">
+                        <a:rPr sz="800" b="0">
                           <a:solidFill>
                             <a:srgbClr val="000000"/>
                           </a:solidFill>
-                          <a:effectLst/>
-                          <a:latin typeface="Arial" panose="020B0604020202020204" pitchFamily="34" charset="0"/>
+                          <a:latin typeface="Segoe UI"/>
                         </a:rPr>
-                        <a:t>5</a:t>
+                        <a:t>3</a:t>
                       </a:r>
                     </a:p>
                   </a:txBody>
@@ -4183,14 +3912,17 @@
                     <a:bodyPr/>
                     <a:lstStyle/>
                     <a:p>
-                      <a:pPr algn="ctr" rtl="0" fontAlgn="ctr"/>
+                      <a:pPr>
+                        <a:defRPr sz="800">
+                          <a:latin typeface="Segoe UI"/>
+                        </a:defRPr>
+                      </a:pPr>
                       <a:r>
-                        <a:rPr lang="en-US" sz="800" b="0" i="0" u="none" strike="noStrike" dirty="0">
+                        <a:rPr sz="800" b="0">
                           <a:solidFill>
                             <a:srgbClr val="000000"/>
                           </a:solidFill>
-                          <a:effectLst/>
-                          <a:latin typeface="Arial" panose="020B0604020202020204" pitchFamily="34" charset="0"/>
+                          <a:latin typeface="Segoe UI"/>
                         </a:rPr>
                         <a:t>8</a:t>
                       </a:r>
@@ -4240,16 +3972,19 @@
                     <a:bodyPr/>
                     <a:lstStyle/>
                     <a:p>
-                      <a:pPr algn="ctr" rtl="0" fontAlgn="ctr"/>
+                      <a:pPr>
+                        <a:defRPr sz="800">
+                          <a:latin typeface="Segoe UI"/>
+                        </a:defRPr>
+                      </a:pPr>
                       <a:r>
-                        <a:rPr lang="en-US" sz="800" b="0" i="0" u="none" strike="noStrike" dirty="0">
+                        <a:rPr sz="800" b="0">
                           <a:solidFill>
                             <a:srgbClr val="000000"/>
                           </a:solidFill>
-                          <a:effectLst/>
-                          <a:latin typeface="Arial" panose="020B0604020202020204" pitchFamily="34" charset="0"/>
+                          <a:latin typeface="Segoe UI"/>
                         </a:rPr>
-                        <a:t>5</a:t>
+                        <a:t>8</a:t>
                       </a:r>
                     </a:p>
                   </a:txBody>
@@ -4297,16 +4032,19 @@
                     <a:bodyPr/>
                     <a:lstStyle/>
                     <a:p>
-                      <a:pPr algn="ctr" rtl="0" fontAlgn="ctr"/>
+                      <a:pPr>
+                        <a:defRPr sz="800">
+                          <a:latin typeface="Segoe UI"/>
+                        </a:defRPr>
+                      </a:pPr>
                       <a:r>
-                        <a:rPr lang="en-US" sz="800" b="0" i="0" u="none" strike="noStrike" dirty="0">
+                        <a:rPr sz="800" b="0">
                           <a:solidFill>
                             <a:srgbClr val="000000"/>
                           </a:solidFill>
-                          <a:effectLst/>
-                          <a:latin typeface="Arial" panose="020B0604020202020204" pitchFamily="34" charset="0"/>
+                          <a:latin typeface="Segoe UI"/>
                         </a:rPr>
-                        <a:t>1</a:t>
+                        <a:t>-</a:t>
                       </a:r>
                     </a:p>
                   </a:txBody>
@@ -4354,14 +4092,17 @@
                     <a:bodyPr/>
                     <a:lstStyle/>
                     <a:p>
-                      <a:pPr algn="ctr" rtl="0" fontAlgn="ctr"/>
+                      <a:pPr>
+                        <a:defRPr sz="800">
+                          <a:latin typeface="Segoe UI"/>
+                        </a:defRPr>
+                      </a:pPr>
                       <a:r>
-                        <a:rPr lang="en-US" sz="800" b="0" i="0" u="none" strike="noStrike" dirty="0">
+                        <a:rPr sz="800" b="0">
                           <a:solidFill>
                             <a:srgbClr val="000000"/>
                           </a:solidFill>
-                          <a:effectLst/>
-                          <a:latin typeface="Arial" panose="020B0604020202020204" pitchFamily="34" charset="0"/>
+                          <a:latin typeface="Segoe UI"/>
                         </a:rPr>
                         <a:t>-</a:t>
                       </a:r>
@@ -4411,14 +4152,17 @@
                     <a:bodyPr/>
                     <a:lstStyle/>
                     <a:p>
-                      <a:pPr algn="ctr" rtl="0" fontAlgn="ctr"/>
+                      <a:pPr>
+                        <a:defRPr sz="800">
+                          <a:latin typeface="Segoe UI"/>
+                        </a:defRPr>
+                      </a:pPr>
                       <a:r>
-                        <a:rPr lang="en-US" sz="800" b="1" i="0" u="none" strike="noStrike" dirty="0">
+                        <a:rPr sz="800" b="1">
                           <a:solidFill>
                             <a:srgbClr val="000000"/>
                           </a:solidFill>
-                          <a:effectLst/>
-                          <a:latin typeface="Arial" panose="020B0604020202020204" pitchFamily="34" charset="0"/>
+                          <a:latin typeface="Segoe UI"/>
                         </a:rPr>
                         <a:t>19</a:t>
                       </a:r>
@@ -4475,16 +4219,19 @@
                     <a:bodyPr/>
                     <a:lstStyle/>
                     <a:p>
-                      <a:pPr algn="l" rtl="0" fontAlgn="b"/>
+                      <a:pPr>
+                        <a:defRPr sz="800">
+                          <a:latin typeface="Segoe UI"/>
+                        </a:defRPr>
+                      </a:pPr>
                       <a:r>
-                        <a:rPr lang="en-US" sz="800" b="0" i="0" u="none" strike="noStrike" dirty="0">
+                        <a:rPr sz="800" b="0">
                           <a:solidFill>
                             <a:srgbClr val="000000"/>
                           </a:solidFill>
-                          <a:effectLst/>
-                          <a:latin typeface="Arial" panose="020B0604020202020204" pitchFamily="34" charset="0"/>
+                          <a:latin typeface="Segoe UI"/>
                         </a:rPr>
-                        <a:t>Integration  Regression 51.2</a:t>
+                        <a:t>Integration  Regression 53.2</a:t>
                       </a:r>
                     </a:p>
                   </a:txBody>
@@ -4532,16 +4279,19 @@
                     <a:bodyPr/>
                     <a:lstStyle/>
                     <a:p>
-                      <a:pPr algn="ctr" rtl="0" fontAlgn="ctr"/>
+                      <a:pPr>
+                        <a:defRPr sz="800">
+                          <a:latin typeface="Segoe UI"/>
+                        </a:defRPr>
+                      </a:pPr>
                       <a:r>
-                        <a:rPr lang="en-US" sz="800" b="0" i="0" u="none" strike="noStrike" dirty="0">
+                        <a:rPr sz="800" b="0">
                           <a:solidFill>
                             <a:srgbClr val="000000"/>
                           </a:solidFill>
-                          <a:effectLst/>
-                          <a:latin typeface="Arial" panose="020B0604020202020204" pitchFamily="34" charset="0"/>
+                          <a:latin typeface="Segoe UI"/>
                         </a:rPr>
-                        <a:t>-</a:t>
+                        <a:t>2</a:t>
                       </a:r>
                     </a:p>
                   </a:txBody>
@@ -4589,16 +4339,19 @@
                     <a:bodyPr/>
                     <a:lstStyle/>
                     <a:p>
-                      <a:pPr algn="ctr" rtl="0" fontAlgn="ctr"/>
+                      <a:pPr>
+                        <a:defRPr sz="800">
+                          <a:latin typeface="Segoe UI"/>
+                        </a:defRPr>
+                      </a:pPr>
                       <a:r>
-                        <a:rPr lang="en-US" sz="800" b="0" i="0" u="none" strike="noStrike" dirty="0">
+                        <a:rPr sz="800" b="0">
                           <a:solidFill>
                             <a:srgbClr val="000000"/>
                           </a:solidFill>
-                          <a:effectLst/>
-                          <a:latin typeface="Arial" panose="020B0604020202020204" pitchFamily="34" charset="0"/>
+                          <a:latin typeface="Segoe UI"/>
                         </a:rPr>
-                        <a:t>-</a:t>
+                        <a:t>7</a:t>
                       </a:r>
                     </a:p>
                   </a:txBody>
@@ -4646,16 +4399,19 @@
                     <a:bodyPr/>
                     <a:lstStyle/>
                     <a:p>
-                      <a:pPr algn="ctr" rtl="0" fontAlgn="ctr"/>
+                      <a:pPr>
+                        <a:defRPr sz="800">
+                          <a:latin typeface="Segoe UI"/>
+                        </a:defRPr>
+                      </a:pPr>
                       <a:r>
-                        <a:rPr lang="en-US" sz="800" b="0" i="0" u="none" strike="noStrike" dirty="0">
+                        <a:rPr sz="800" b="0">
                           <a:solidFill>
                             <a:srgbClr val="000000"/>
                           </a:solidFill>
-                          <a:effectLst/>
-                          <a:latin typeface="Arial" panose="020B0604020202020204" pitchFamily="34" charset="0"/>
+                          <a:latin typeface="Segoe UI"/>
                         </a:rPr>
-                        <a:t>-</a:t>
+                        <a:t>5</a:t>
                       </a:r>
                     </a:p>
                   </a:txBody>
@@ -4703,14 +4459,17 @@
                     <a:bodyPr/>
                     <a:lstStyle/>
                     <a:p>
-                      <a:pPr algn="ctr" rtl="0" fontAlgn="ctr"/>
+                      <a:pPr>
+                        <a:defRPr sz="800">
+                          <a:latin typeface="Segoe UI"/>
+                        </a:defRPr>
+                      </a:pPr>
                       <a:r>
-                        <a:rPr lang="en-US" sz="800" b="0" i="0" u="none" strike="noStrike" dirty="0">
+                        <a:rPr sz="800" b="0">
                           <a:solidFill>
                             <a:srgbClr val="000000"/>
                           </a:solidFill>
-                          <a:effectLst/>
-                          <a:latin typeface="Arial" panose="020B0604020202020204" pitchFamily="34" charset="0"/>
+                          <a:latin typeface="Segoe UI"/>
                         </a:rPr>
                         <a:t>-</a:t>
                       </a:r>
@@ -4760,14 +4519,17 @@
                     <a:bodyPr/>
                     <a:lstStyle/>
                     <a:p>
-                      <a:pPr algn="ctr" rtl="0" fontAlgn="ctr"/>
+                      <a:pPr>
+                        <a:defRPr sz="800">
+                          <a:latin typeface="Segoe UI"/>
+                        </a:defRPr>
+                      </a:pPr>
                       <a:r>
-                        <a:rPr lang="en-US" sz="800" b="0" i="0" u="none" strike="noStrike" dirty="0">
+                        <a:rPr sz="800" b="0" dirty="0">
                           <a:solidFill>
                             <a:srgbClr val="000000"/>
                           </a:solidFill>
-                          <a:effectLst/>
-                          <a:latin typeface="Arial" panose="020B0604020202020204" pitchFamily="34" charset="0"/>
+                          <a:latin typeface="Segoe UI"/>
                         </a:rPr>
                         <a:t>-</a:t>
                       </a:r>
@@ -4817,16 +4579,19 @@
                     <a:bodyPr/>
                     <a:lstStyle/>
                     <a:p>
-                      <a:pPr algn="ctr" rtl="0" fontAlgn="ctr"/>
+                      <a:pPr>
+                        <a:defRPr sz="800">
+                          <a:latin typeface="Segoe UI"/>
+                        </a:defRPr>
+                      </a:pPr>
                       <a:r>
-                        <a:rPr lang="en-US" sz="800" b="0" i="0" u="none" strike="noStrike" dirty="0">
+                        <a:rPr sz="800" b="1">
                           <a:solidFill>
                             <a:srgbClr val="000000"/>
                           </a:solidFill>
-                          <a:effectLst/>
-                          <a:latin typeface="Arial" panose="020B0604020202020204" pitchFamily="34" charset="0"/>
+                          <a:latin typeface="Segoe UI"/>
                         </a:rPr>
-                        <a:t>-</a:t>
+                        <a:t>14</a:t>
                       </a:r>
                     </a:p>
                   </a:txBody>
@@ -4881,22 +4646,19 @@
                     <a:bodyPr/>
                     <a:lstStyle/>
                     <a:p>
-                      <a:pPr algn="l" fontAlgn="b">
-                        <a:lnSpc>
-                          <a:spcPct val="150000"/>
-                        </a:lnSpc>
+                      <a:pPr>
+                        <a:defRPr sz="800">
+                          <a:latin typeface="Segoe UI"/>
+                        </a:defRPr>
                       </a:pPr>
                       <a:r>
-                        <a:rPr lang="en-US" sz="800" b="0" i="0" u="none" strike="noStrike" kern="1200" dirty="0">
+                        <a:rPr sz="800" b="0">
                           <a:solidFill>
                             <a:srgbClr val="000000"/>
                           </a:solidFill>
-                          <a:effectLst/>
-                          <a:latin typeface="Arial" panose="020B0604020202020204" pitchFamily="34" charset="0"/>
-                          <a:ea typeface="+mn-ea"/>
-                          <a:cs typeface="Arial" panose="020B0604020202020204" pitchFamily="34" charset="0"/>
+                          <a:latin typeface="Segoe UI"/>
                         </a:rPr>
-                        <a:t>Automation Regression 50 X</a:t>
+                        <a:t>Automation Regression 53 X</a:t>
                       </a:r>
                     </a:p>
                   </a:txBody>
@@ -4944,16 +4706,20 @@
                     <a:bodyPr/>
                     <a:lstStyle/>
                     <a:p>
-                      <a:pPr marL="0" marR="0" algn="ctr"/>
-                      <a:endParaRPr lang="en-US" sz="800" b="0" i="0" u="none" strike="noStrike" kern="1200" dirty="0">
-                        <a:solidFill>
-                          <a:srgbClr val="000000"/>
-                        </a:solidFill>
-                        <a:effectLst/>
-                        <a:latin typeface="Arial" panose="020B0604020202020204" pitchFamily="34" charset="0"/>
-                        <a:ea typeface="+mn-ea"/>
-                        <a:cs typeface="Arial" panose="020B0604020202020204" pitchFamily="34" charset="0"/>
-                      </a:endParaRPr>
+                      <a:pPr>
+                        <a:defRPr sz="800">
+                          <a:latin typeface="Segoe UI"/>
+                        </a:defRPr>
+                      </a:pPr>
+                      <a:r>
+                        <a:rPr sz="800" b="0">
+                          <a:solidFill>
+                            <a:srgbClr val="000000"/>
+                          </a:solidFill>
+                          <a:latin typeface="Segoe UI"/>
+                        </a:rPr>
+                        <a:t>-</a:t>
+                      </a:r>
                     </a:p>
                   </a:txBody>
                   <a:tcPr marL="68580" marR="68580" marT="0" marB="0" anchor="ctr">
@@ -5000,16 +4766,20 @@
                     <a:bodyPr/>
                     <a:lstStyle/>
                     <a:p>
-                      <a:pPr marL="0" marR="0" algn="ctr"/>
-                      <a:endParaRPr lang="en-US" sz="800" b="0" i="0" u="none" strike="noStrike" kern="1200" dirty="0">
-                        <a:solidFill>
-                          <a:srgbClr val="000000"/>
-                        </a:solidFill>
-                        <a:effectLst/>
-                        <a:latin typeface="Arial" panose="020B0604020202020204" pitchFamily="34" charset="0"/>
-                        <a:ea typeface="+mn-ea"/>
-                        <a:cs typeface="Arial" panose="020B0604020202020204" pitchFamily="34" charset="0"/>
-                      </a:endParaRPr>
+                      <a:pPr>
+                        <a:defRPr sz="800">
+                          <a:latin typeface="Segoe UI"/>
+                        </a:defRPr>
+                      </a:pPr>
+                      <a:r>
+                        <a:rPr sz="800" b="0">
+                          <a:solidFill>
+                            <a:srgbClr val="000000"/>
+                          </a:solidFill>
+                          <a:latin typeface="Segoe UI"/>
+                        </a:rPr>
+                        <a:t>-</a:t>
+                      </a:r>
                     </a:p>
                   </a:txBody>
                   <a:tcPr marL="68580" marR="68580" marT="0" marB="0" anchor="ctr">
@@ -5056,16 +4826,20 @@
                     <a:bodyPr/>
                     <a:lstStyle/>
                     <a:p>
-                      <a:pPr marL="0" marR="0" algn="ctr"/>
-                      <a:endParaRPr lang="en-US" sz="800" b="0" i="0" u="none" strike="noStrike" kern="1200" dirty="0">
-                        <a:solidFill>
-                          <a:srgbClr val="000000"/>
-                        </a:solidFill>
-                        <a:effectLst/>
-                        <a:latin typeface="Arial" panose="020B0604020202020204" pitchFamily="34" charset="0"/>
-                        <a:ea typeface="+mn-ea"/>
-                        <a:cs typeface="Arial" panose="020B0604020202020204" pitchFamily="34" charset="0"/>
-                      </a:endParaRPr>
+                      <a:pPr>
+                        <a:defRPr sz="800">
+                          <a:latin typeface="Segoe UI"/>
+                        </a:defRPr>
+                      </a:pPr>
+                      <a:r>
+                        <a:rPr sz="800" b="0">
+                          <a:solidFill>
+                            <a:srgbClr val="000000"/>
+                          </a:solidFill>
+                          <a:latin typeface="Segoe UI"/>
+                        </a:rPr>
+                        <a:t>-</a:t>
+                      </a:r>
                     </a:p>
                   </a:txBody>
                   <a:tcPr marL="68580" marR="68580" marT="0" marB="0" anchor="ctr">
@@ -5112,16 +4886,20 @@
                     <a:bodyPr/>
                     <a:lstStyle/>
                     <a:p>
-                      <a:pPr marL="0" marR="0" algn="ctr"/>
-                      <a:endParaRPr lang="en-US" sz="800" b="0" i="0" u="none" strike="noStrike" kern="1200" dirty="0">
-                        <a:solidFill>
-                          <a:srgbClr val="000000"/>
-                        </a:solidFill>
-                        <a:effectLst/>
-                        <a:latin typeface="Arial" panose="020B0604020202020204" pitchFamily="34" charset="0"/>
-                        <a:ea typeface="+mn-ea"/>
-                        <a:cs typeface="Arial" panose="020B0604020202020204" pitchFamily="34" charset="0"/>
-                      </a:endParaRPr>
+                      <a:pPr>
+                        <a:defRPr sz="800">
+                          <a:latin typeface="Segoe UI"/>
+                        </a:defRPr>
+                      </a:pPr>
+                      <a:r>
+                        <a:rPr sz="800" b="0">
+                          <a:solidFill>
+                            <a:srgbClr val="000000"/>
+                          </a:solidFill>
+                          <a:latin typeface="Segoe UI"/>
+                        </a:rPr>
+                        <a:t>-</a:t>
+                      </a:r>
                     </a:p>
                   </a:txBody>
                   <a:tcPr marL="68580" marR="68580" marT="0" marB="0" anchor="ctr">
@@ -5168,16 +4946,20 @@
                     <a:bodyPr/>
                     <a:lstStyle/>
                     <a:p>
-                      <a:pPr marL="0" marR="0" algn="ctr"/>
-                      <a:endParaRPr lang="en-US" sz="800" b="0" i="0" u="none" strike="noStrike" kern="1200" dirty="0">
-                        <a:solidFill>
-                          <a:srgbClr val="000000"/>
-                        </a:solidFill>
-                        <a:effectLst/>
-                        <a:latin typeface="Arial" panose="020B0604020202020204" pitchFamily="34" charset="0"/>
-                        <a:ea typeface="+mn-ea"/>
-                        <a:cs typeface="Arial" panose="020B0604020202020204" pitchFamily="34" charset="0"/>
-                      </a:endParaRPr>
+                      <a:pPr>
+                        <a:defRPr sz="800">
+                          <a:latin typeface="Segoe UI"/>
+                        </a:defRPr>
+                      </a:pPr>
+                      <a:r>
+                        <a:rPr sz="800" b="0">
+                          <a:solidFill>
+                            <a:srgbClr val="000000"/>
+                          </a:solidFill>
+                          <a:latin typeface="Segoe UI"/>
+                        </a:rPr>
+                        <a:t>-</a:t>
+                      </a:r>
                     </a:p>
                   </a:txBody>
                   <a:tcPr marL="68580" marR="68580" marT="0" marB="0" anchor="ctr">
@@ -5224,16 +5006,20 @@
                     <a:bodyPr/>
                     <a:lstStyle/>
                     <a:p>
-                      <a:pPr marL="0" marR="0" algn="ctr"/>
-                      <a:endParaRPr lang="en-US" sz="800" b="1" i="0" u="none" strike="noStrike" kern="1200" dirty="0">
-                        <a:solidFill>
-                          <a:srgbClr val="000000"/>
-                        </a:solidFill>
-                        <a:effectLst/>
-                        <a:latin typeface="Arial" panose="020B0604020202020204" pitchFamily="34" charset="0"/>
-                        <a:ea typeface="+mn-ea"/>
-                        <a:cs typeface="Arial" panose="020B0604020202020204" pitchFamily="34" charset="0"/>
-                      </a:endParaRPr>
+                      <a:pPr>
+                        <a:defRPr sz="800">
+                          <a:latin typeface="Segoe UI"/>
+                        </a:defRPr>
+                      </a:pPr>
+                      <a:r>
+                        <a:rPr sz="800" b="0">
+                          <a:solidFill>
+                            <a:srgbClr val="000000"/>
+                          </a:solidFill>
+                          <a:latin typeface="Segoe UI"/>
+                        </a:rPr>
+                        <a:t>-</a:t>
+                      </a:r>
                     </a:p>
                   </a:txBody>
                   <a:tcPr marL="68580" marR="68580" marT="0" marB="0" anchor="ctr">
@@ -5287,20 +5073,17 @@
                     <a:bodyPr/>
                     <a:lstStyle/>
                     <a:p>
-                      <a:pPr algn="l" fontAlgn="b">
-                        <a:lnSpc>
-                          <a:spcPct val="150000"/>
-                        </a:lnSpc>
+                      <a:pPr>
+                        <a:defRPr sz="800">
+                          <a:latin typeface="Segoe UI"/>
+                        </a:defRPr>
                       </a:pPr>
                       <a:r>
-                        <a:rPr lang="en-US" sz="800" b="0" i="0" u="none" strike="noStrike" kern="1200" dirty="0">
+                        <a:rPr sz="800" b="0">
                           <a:solidFill>
                             <a:srgbClr val="000000"/>
                           </a:solidFill>
-                          <a:effectLst/>
-                          <a:latin typeface="Arial" panose="020B0604020202020204" pitchFamily="34" charset="0"/>
-                          <a:ea typeface="+mn-ea"/>
-                          <a:cs typeface="Arial" panose="020B0604020202020204" pitchFamily="34" charset="0"/>
+                          <a:latin typeface="Segoe UI"/>
                         </a:rPr>
                         <a:t>Smoke testing</a:t>
                       </a:r>
@@ -5350,16 +5133,20 @@
                     <a:bodyPr/>
                     <a:lstStyle/>
                     <a:p>
-                      <a:pPr marL="0" marR="0" algn="ctr"/>
-                      <a:endParaRPr lang="en-US" sz="800" b="0" i="0" u="none" strike="noStrike" kern="1200" dirty="0">
-                        <a:solidFill>
-                          <a:srgbClr val="000000"/>
-                        </a:solidFill>
-                        <a:effectLst/>
-                        <a:latin typeface="Arial" panose="020B0604020202020204" pitchFamily="34" charset="0"/>
-                        <a:ea typeface="+mn-ea"/>
-                        <a:cs typeface="Arial" panose="020B0604020202020204" pitchFamily="34" charset="0"/>
-                      </a:endParaRPr>
+                      <a:pPr>
+                        <a:defRPr sz="800">
+                          <a:latin typeface="Segoe UI"/>
+                        </a:defRPr>
+                      </a:pPr>
+                      <a:r>
+                        <a:rPr sz="800" b="0">
+                          <a:solidFill>
+                            <a:srgbClr val="000000"/>
+                          </a:solidFill>
+                          <a:latin typeface="Segoe UI"/>
+                        </a:rPr>
+                        <a:t>-</a:t>
+                      </a:r>
                     </a:p>
                   </a:txBody>
                   <a:tcPr marL="68580" marR="68580" marT="0" marB="0" anchor="ctr">
@@ -5406,16 +5193,20 @@
                     <a:bodyPr/>
                     <a:lstStyle/>
                     <a:p>
-                      <a:pPr marL="0" marR="0" algn="ctr"/>
-                      <a:endParaRPr lang="en-US" sz="800" b="0" i="0" u="none" strike="noStrike" kern="1200" dirty="0">
-                        <a:solidFill>
-                          <a:srgbClr val="000000"/>
-                        </a:solidFill>
-                        <a:effectLst/>
-                        <a:latin typeface="Arial" panose="020B0604020202020204" pitchFamily="34" charset="0"/>
-                        <a:ea typeface="+mn-ea"/>
-                        <a:cs typeface="Arial" panose="020B0604020202020204" pitchFamily="34" charset="0"/>
-                      </a:endParaRPr>
+                      <a:pPr>
+                        <a:defRPr sz="800">
+                          <a:latin typeface="Segoe UI"/>
+                        </a:defRPr>
+                      </a:pPr>
+                      <a:r>
+                        <a:rPr sz="800" b="0">
+                          <a:solidFill>
+                            <a:srgbClr val="000000"/>
+                          </a:solidFill>
+                          <a:latin typeface="Segoe UI"/>
+                        </a:rPr>
+                        <a:t>-</a:t>
+                      </a:r>
                     </a:p>
                   </a:txBody>
                   <a:tcPr marL="68580" marR="68580" marT="0" marB="0" anchor="ctr">
@@ -5462,16 +5253,20 @@
                     <a:bodyPr/>
                     <a:lstStyle/>
                     <a:p>
-                      <a:pPr marL="0" marR="0" algn="ctr"/>
-                      <a:endParaRPr lang="en-US" sz="800" b="0" i="0" u="none" strike="noStrike" kern="1200" dirty="0">
-                        <a:solidFill>
-                          <a:srgbClr val="000000"/>
-                        </a:solidFill>
-                        <a:effectLst/>
-                        <a:latin typeface="Arial" panose="020B0604020202020204" pitchFamily="34" charset="0"/>
-                        <a:ea typeface="+mn-ea"/>
-                        <a:cs typeface="Arial" panose="020B0604020202020204" pitchFamily="34" charset="0"/>
-                      </a:endParaRPr>
+                      <a:pPr>
+                        <a:defRPr sz="800">
+                          <a:latin typeface="Segoe UI"/>
+                        </a:defRPr>
+                      </a:pPr>
+                      <a:r>
+                        <a:rPr sz="800" b="0">
+                          <a:solidFill>
+                            <a:srgbClr val="000000"/>
+                          </a:solidFill>
+                          <a:latin typeface="Segoe UI"/>
+                        </a:rPr>
+                        <a:t>-</a:t>
+                      </a:r>
                     </a:p>
                   </a:txBody>
                   <a:tcPr marL="68580" marR="68580" marT="0" marB="0" anchor="ctr">
@@ -5518,16 +5313,20 @@
                     <a:bodyPr/>
                     <a:lstStyle/>
                     <a:p>
-                      <a:pPr marL="0" marR="0" algn="ctr"/>
-                      <a:endParaRPr lang="en-US" sz="800" b="0" i="0" u="none" strike="noStrike" kern="1200" dirty="0">
-                        <a:solidFill>
-                          <a:srgbClr val="000000"/>
-                        </a:solidFill>
-                        <a:effectLst/>
-                        <a:latin typeface="Arial" panose="020B0604020202020204" pitchFamily="34" charset="0"/>
-                        <a:ea typeface="+mn-ea"/>
-                        <a:cs typeface="Arial" panose="020B0604020202020204" pitchFamily="34" charset="0"/>
-                      </a:endParaRPr>
+                      <a:pPr>
+                        <a:defRPr sz="800">
+                          <a:latin typeface="Segoe UI"/>
+                        </a:defRPr>
+                      </a:pPr>
+                      <a:r>
+                        <a:rPr sz="800" b="0">
+                          <a:solidFill>
+                            <a:srgbClr val="000000"/>
+                          </a:solidFill>
+                          <a:latin typeface="Segoe UI"/>
+                        </a:rPr>
+                        <a:t>-</a:t>
+                      </a:r>
                     </a:p>
                   </a:txBody>
                   <a:tcPr marL="68580" marR="68580" marT="0" marB="0" anchor="ctr">
@@ -5574,16 +5373,20 @@
                     <a:bodyPr/>
                     <a:lstStyle/>
                     <a:p>
-                      <a:pPr marL="0" marR="0" algn="ctr"/>
-                      <a:endParaRPr lang="en-US" sz="800" b="0" i="0" u="none" strike="noStrike" kern="1200" dirty="0">
-                        <a:solidFill>
-                          <a:srgbClr val="000000"/>
-                        </a:solidFill>
-                        <a:effectLst/>
-                        <a:latin typeface="Arial" panose="020B0604020202020204" pitchFamily="34" charset="0"/>
-                        <a:ea typeface="+mn-ea"/>
-                        <a:cs typeface="Arial" panose="020B0604020202020204" pitchFamily="34" charset="0"/>
-                      </a:endParaRPr>
+                      <a:pPr>
+                        <a:defRPr sz="800">
+                          <a:latin typeface="Segoe UI"/>
+                        </a:defRPr>
+                      </a:pPr>
+                      <a:r>
+                        <a:rPr sz="800" b="0">
+                          <a:solidFill>
+                            <a:srgbClr val="000000"/>
+                          </a:solidFill>
+                          <a:latin typeface="Segoe UI"/>
+                        </a:rPr>
+                        <a:t>-</a:t>
+                      </a:r>
                     </a:p>
                   </a:txBody>
                   <a:tcPr marL="68580" marR="68580" marT="0" marB="0" anchor="ctr">
@@ -5630,16 +5433,20 @@
                     <a:bodyPr/>
                     <a:lstStyle/>
                     <a:p>
-                      <a:pPr marL="0" marR="0" algn="ctr"/>
-                      <a:endParaRPr lang="en-US" sz="800" b="1" i="0" u="none" strike="noStrike" kern="1200" dirty="0">
-                        <a:solidFill>
-                          <a:srgbClr val="000000"/>
-                        </a:solidFill>
-                        <a:effectLst/>
-                        <a:latin typeface="Arial" panose="020B0604020202020204" pitchFamily="34" charset="0"/>
-                        <a:ea typeface="+mn-ea"/>
-                        <a:cs typeface="Arial" panose="020B0604020202020204" pitchFamily="34" charset="0"/>
-                      </a:endParaRPr>
+                      <a:pPr>
+                        <a:defRPr sz="800">
+                          <a:latin typeface="Segoe UI"/>
+                        </a:defRPr>
+                      </a:pPr>
+                      <a:r>
+                        <a:rPr sz="800" b="0" dirty="0">
+                          <a:solidFill>
+                            <a:srgbClr val="000000"/>
+                          </a:solidFill>
+                          <a:latin typeface="Segoe UI"/>
+                        </a:rPr>
+                        <a:t>-</a:t>
+                      </a:r>
                     </a:p>
                   </a:txBody>
                   <a:tcPr marL="68580" marR="68580" marT="0" marB="0" anchor="ctr">
@@ -5705,8 +5512,8 @@
         </p:nvSpPr>
         <p:spPr>
           <a:xfrm>
-            <a:off x="6614327" y="530777"/>
-            <a:ext cx="3927168" cy="294554"/>
+            <a:off x="5540661" y="589515"/>
+            <a:ext cx="2945376" cy="294554"/>
           </a:xfrm>
           <a:prstGeom prst="roundRect">
             <a:avLst/>
@@ -5732,28 +5539,34 @@
           <a:bodyPr rtlCol="0" anchor="ctr"/>
           <a:lstStyle/>
           <a:p>
-            <a:pPr algn="ctr"/>
+            <a:pPr algn="ctr" defTabSz="457200"/>
             <a:r>
               <a:rPr lang="en-US" sz="1100" b="1" i="1" dirty="0">
-                <a:latin typeface="Arial" panose="020B0604020202020204" pitchFamily="34" charset="0"/>
-                <a:cs typeface="Arial" panose="020B0604020202020204" pitchFamily="34" charset="0"/>
+                <a:solidFill>
+                  <a:prstClr val="white"/>
+                </a:solidFill>
+                <a:latin typeface="Segoe UI" panose="020B0604020202020204" pitchFamily="34" charset="0"/>
+                <a:cs typeface="Segoe UI" panose="020B0604020202020204" pitchFamily="34" charset="0"/>
               </a:rPr>
               <a:t>Execution</a:t>
             </a:r>
             <a:r>
               <a:rPr lang="en-US" sz="1100" b="1" dirty="0">
                 <a:solidFill>
-                  <a:schemeClr val="bg1"/>
+                  <a:prstClr val="white"/>
                 </a:solidFill>
-                <a:latin typeface="Arial" panose="020B0604020202020204" pitchFamily="34" charset="0"/>
-                <a:cs typeface="Arial" panose="020B0604020202020204" pitchFamily="34" charset="0"/>
+                <a:latin typeface="Segoe UI" panose="020B0604020202020204" pitchFamily="34" charset="0"/>
+                <a:cs typeface="Segoe UI" panose="020B0604020202020204" pitchFamily="34" charset="0"/>
               </a:rPr>
               <a:t> </a:t>
             </a:r>
             <a:r>
               <a:rPr lang="en-US" sz="1100" b="1" i="1" dirty="0">
-                <a:latin typeface="Arial" panose="020B0604020202020204" pitchFamily="34" charset="0"/>
-                <a:cs typeface="Arial" panose="020B0604020202020204" pitchFamily="34" charset="0"/>
+                <a:solidFill>
+                  <a:prstClr val="white"/>
+                </a:solidFill>
+                <a:latin typeface="Segoe UI" panose="020B0604020202020204" pitchFamily="34" charset="0"/>
+                <a:cs typeface="Segoe UI" panose="020B0604020202020204" pitchFamily="34" charset="0"/>
               </a:rPr>
               <a:t>Highlights</a:t>
             </a:r>
@@ -5761,8 +5574,8 @@
               <a:solidFill>
                 <a:srgbClr val="FF0000"/>
               </a:solidFill>
-              <a:latin typeface="Arial" panose="020B0604020202020204" pitchFamily="34" charset="0"/>
-              <a:cs typeface="Arial" panose="020B0604020202020204" pitchFamily="34" charset="0"/>
+              <a:latin typeface="Segoe UI" panose="020B0604020202020204" pitchFamily="34" charset="0"/>
+              <a:cs typeface="Segoe UI" panose="020B0604020202020204" pitchFamily="34" charset="0"/>
             </a:endParaRPr>
           </a:p>
         </p:txBody>
@@ -5781,8 +5594,8 @@
         </p:nvSpPr>
         <p:spPr>
           <a:xfrm>
-            <a:off x="255486" y="1557882"/>
-            <a:ext cx="5542569" cy="2309113"/>
+            <a:off x="731767" y="1557883"/>
+            <a:ext cx="3749015" cy="2309113"/>
           </a:xfrm>
           <a:prstGeom prst="rect">
             <a:avLst/>
@@ -5818,7 +5631,7 @@
           <a:bodyPr rtlCol="0" anchor="ctr"/>
           <a:lstStyle/>
           <a:p>
-            <a:pPr marL="171450" indent="-171450">
+            <a:pPr marL="171450" indent="-171450" defTabSz="457200">
               <a:lnSpc>
                 <a:spcPct val="150000"/>
               </a:lnSpc>
@@ -5830,14 +5643,14 @@
                 <a:solidFill>
                   <a:srgbClr val="000000"/>
                 </a:solidFill>
-                <a:latin typeface="Arial" panose="020B0604020202020204" pitchFamily="34" charset="0"/>
-                <a:cs typeface="Arial" panose="020B0604020202020204" pitchFamily="34" charset="0"/>
+                <a:latin typeface="Segoe UI"/>
+                <a:cs typeface="Segoe UI"/>
               </a:rPr>
               <a:t>Offshore team is actively engaged in T-Mobile testing</a:t>
             </a:r>
           </a:p>
           <a:p>
-            <a:pPr marL="628650" lvl="1" indent="-171450">
+            <a:pPr marL="628650" lvl="1" indent="-171450" defTabSz="457200">
               <a:lnSpc>
                 <a:spcPct val="150000"/>
               </a:lnSpc>
@@ -5849,18 +5662,18 @@
                 <a:solidFill>
                   <a:srgbClr val="000000"/>
                 </a:solidFill>
-                <a:latin typeface="Arial" panose="020B0604020202020204" pitchFamily="34" charset="0"/>
-                <a:cs typeface="Arial" panose="020B0604020202020204" pitchFamily="34" charset="0"/>
+                <a:latin typeface="Segoe UI"/>
+                <a:cs typeface="Segoe UI"/>
               </a:rPr>
-              <a:t>Integration Progression 51.2: Execution</a:t>
+              <a:t>Integration Progression 54.2: Execution</a:t>
             </a:r>
             <a:r>
               <a:rPr lang="en-US" sz="1000" b="1" dirty="0">
                 <a:solidFill>
                   <a:srgbClr val="000000"/>
                 </a:solidFill>
-                <a:latin typeface="Arial" panose="020B0604020202020204" pitchFamily="34" charset="0"/>
-                <a:cs typeface="Arial" panose="020B0604020202020204" pitchFamily="34" charset="0"/>
+                <a:latin typeface="Segoe UI"/>
+                <a:cs typeface="Segoe UI"/>
               </a:rPr>
               <a:t> - </a:t>
             </a:r>
@@ -5869,21 +5682,14 @@
                 <a:solidFill>
                   <a:srgbClr val="000000"/>
                 </a:solidFill>
-                <a:latin typeface="Arial" panose="020B0604020202020204" pitchFamily="34" charset="0"/>
-                <a:cs typeface="Arial" panose="020B0604020202020204" pitchFamily="34" charset="0"/>
+                <a:latin typeface="Segoe UI"/>
+                <a:cs typeface="Segoe UI"/>
               </a:rPr>
               <a:t>In Progress</a:t>
             </a:r>
-            <a:endParaRPr lang="en-US" sz="1000" b="1" dirty="0">
-              <a:solidFill>
-                <a:srgbClr val="000000"/>
-              </a:solidFill>
-              <a:latin typeface="Arial" panose="020B0604020202020204" pitchFamily="34" charset="0"/>
-              <a:cs typeface="Arial" panose="020B0604020202020204" pitchFamily="34" charset="0"/>
-            </a:endParaRPr>
-          </a:p>
-          <a:p>
-            <a:pPr marL="628650" lvl="1" indent="-171450">
+          </a:p>
+          <a:p>
+            <a:pPr marL="628650" lvl="1" indent="-171450" defTabSz="457200">
               <a:lnSpc>
                 <a:spcPct val="150000"/>
               </a:lnSpc>
@@ -5895,18 +5701,18 @@
                 <a:solidFill>
                   <a:srgbClr val="000000"/>
                 </a:solidFill>
-                <a:latin typeface="Arial" panose="020B0604020202020204" pitchFamily="34" charset="0"/>
-                <a:cs typeface="Arial" panose="020B0604020202020204" pitchFamily="34" charset="0"/>
+                <a:latin typeface="Segoe UI"/>
+                <a:cs typeface="Segoe UI"/>
               </a:rPr>
-              <a:t>Integration Regression 51.2: Execution </a:t>
+              <a:t>Integration Regression 54.2: Execution </a:t>
             </a:r>
             <a:r>
               <a:rPr lang="en-US" sz="1000" b="1" dirty="0">
                 <a:solidFill>
                   <a:srgbClr val="000000"/>
                 </a:solidFill>
-                <a:latin typeface="Arial" panose="020B0604020202020204" pitchFamily="34" charset="0"/>
-                <a:cs typeface="Arial" panose="020B0604020202020204" pitchFamily="34" charset="0"/>
+                <a:latin typeface="Segoe UI"/>
+                <a:cs typeface="Segoe UI"/>
               </a:rPr>
               <a:t>- </a:t>
             </a:r>
@@ -5915,14 +5721,14 @@
                 <a:solidFill>
                   <a:srgbClr val="000000"/>
                 </a:solidFill>
-                <a:latin typeface="Arial" panose="020B0604020202020204" pitchFamily="34" charset="0"/>
-                <a:cs typeface="Arial" panose="020B0604020202020204" pitchFamily="34" charset="0"/>
+                <a:latin typeface="Segoe UI"/>
+                <a:cs typeface="Segoe UI"/>
               </a:rPr>
               <a:t>In Progress</a:t>
             </a:r>
           </a:p>
           <a:p>
-            <a:pPr marL="628650" lvl="1" indent="-171450">
+            <a:pPr marL="628650" lvl="1" indent="-171450" defTabSz="457200">
               <a:lnSpc>
                 <a:spcPct val="150000"/>
               </a:lnSpc>
@@ -5934,18 +5740,18 @@
                 <a:solidFill>
                   <a:srgbClr val="000000"/>
                 </a:solidFill>
-                <a:latin typeface="Arial" panose="020B0604020202020204" pitchFamily="34" charset="0"/>
-                <a:cs typeface="Arial" panose="020B0604020202020204" pitchFamily="34" charset="0"/>
+                <a:latin typeface="Segoe UI"/>
+                <a:cs typeface="Segoe UI"/>
               </a:rPr>
-              <a:t>Integration Regression 50.2: Execution </a:t>
+              <a:t>Integration Regression 53.2: Execution </a:t>
             </a:r>
             <a:r>
               <a:rPr lang="en-US" sz="1000" b="1" dirty="0">
                 <a:solidFill>
                   <a:srgbClr val="000000"/>
                 </a:solidFill>
-                <a:latin typeface="Arial" panose="020B0604020202020204" pitchFamily="34" charset="0"/>
-                <a:cs typeface="Arial" panose="020B0604020202020204" pitchFamily="34" charset="0"/>
+                <a:latin typeface="Segoe UI"/>
+                <a:cs typeface="Segoe UI"/>
               </a:rPr>
               <a:t>- </a:t>
             </a:r>
@@ -5954,14 +5760,14 @@
                 <a:solidFill>
                   <a:srgbClr val="000000"/>
                 </a:solidFill>
-                <a:latin typeface="Arial" panose="020B0604020202020204" pitchFamily="34" charset="0"/>
-                <a:cs typeface="Arial" panose="020B0604020202020204" pitchFamily="34" charset="0"/>
+                <a:latin typeface="Segoe UI"/>
+                <a:cs typeface="Segoe UI"/>
               </a:rPr>
               <a:t>Completed</a:t>
             </a:r>
           </a:p>
           <a:p>
-            <a:pPr marL="628650" lvl="1" indent="-171450">
+            <a:pPr marL="628650" lvl="1" indent="-171450" defTabSz="457200">
               <a:lnSpc>
                 <a:spcPct val="150000"/>
               </a:lnSpc>
@@ -5973,18 +5779,18 @@
                 <a:solidFill>
                   <a:srgbClr val="000000"/>
                 </a:solidFill>
-                <a:latin typeface="Arial" panose="020B0604020202020204" pitchFamily="34" charset="0"/>
-                <a:cs typeface="Arial" panose="020B0604020202020204" pitchFamily="34" charset="0"/>
+                <a:latin typeface="Segoe UI"/>
+                <a:cs typeface="Segoe UI"/>
               </a:rPr>
-              <a:t>Integration Progression 50.2: Execution</a:t>
+              <a:t>Integration Progression 53.2: Execution</a:t>
             </a:r>
             <a:r>
               <a:rPr lang="en-US" sz="1000" b="1" dirty="0">
                 <a:solidFill>
                   <a:srgbClr val="000000"/>
                 </a:solidFill>
-                <a:latin typeface="Arial" panose="020B0604020202020204" pitchFamily="34" charset="0"/>
-                <a:cs typeface="Arial" panose="020B0604020202020204" pitchFamily="34" charset="0"/>
+                <a:latin typeface="Segoe UI"/>
+                <a:cs typeface="Segoe UI"/>
               </a:rPr>
               <a:t> - </a:t>
             </a:r>
@@ -5993,21 +5799,14 @@
                 <a:solidFill>
                   <a:srgbClr val="000000"/>
                 </a:solidFill>
-                <a:latin typeface="Arial" panose="020B0604020202020204" pitchFamily="34" charset="0"/>
-                <a:cs typeface="Arial" panose="020B0604020202020204" pitchFamily="34" charset="0"/>
+                <a:latin typeface="Segoe UI"/>
+                <a:cs typeface="Segoe UI"/>
               </a:rPr>
               <a:t>Completed</a:t>
             </a:r>
-            <a:endParaRPr lang="en-US" sz="1000" b="1" dirty="0">
-              <a:solidFill>
-                <a:srgbClr val="000000"/>
-              </a:solidFill>
-              <a:latin typeface="Arial" panose="020B0604020202020204" pitchFamily="34" charset="0"/>
-              <a:cs typeface="Arial" panose="020B0604020202020204" pitchFamily="34" charset="0"/>
-            </a:endParaRPr>
-          </a:p>
-          <a:p>
-            <a:pPr marL="628650" lvl="1" indent="-171450">
+          </a:p>
+          <a:p>
+            <a:pPr marL="628650" lvl="1" indent="-171450" defTabSz="457200">
               <a:lnSpc>
                 <a:spcPct val="150000"/>
               </a:lnSpc>
@@ -6018,12 +5817,12 @@
               <a:solidFill>
                 <a:srgbClr val="000000"/>
               </a:solidFill>
-              <a:latin typeface="Arial" panose="020B0604020202020204" pitchFamily="34" charset="0"/>
-              <a:cs typeface="Arial" panose="020B0604020202020204" pitchFamily="34" charset="0"/>
+              <a:latin typeface="Segoe UI" panose="020B0604020202020204" pitchFamily="34" charset="0"/>
+              <a:cs typeface="Segoe UI" panose="020B0604020202020204" pitchFamily="34" charset="0"/>
             </a:endParaRPr>
           </a:p>
           <a:p>
-            <a:pPr marL="171450" indent="-171450">
+            <a:pPr marL="171450" indent="-171450" defTabSz="457200">
               <a:lnSpc>
                 <a:spcPct val="150000"/>
               </a:lnSpc>
@@ -6035,14 +5834,14 @@
                 <a:solidFill>
                   <a:srgbClr val="000000"/>
                 </a:solidFill>
-                <a:latin typeface="Arial" panose="020B0604020202020204" pitchFamily="34" charset="0"/>
-                <a:cs typeface="Arial" panose="020B0604020202020204" pitchFamily="34" charset="0"/>
+                <a:latin typeface="Segoe UI"/>
+                <a:cs typeface="Segoe UI"/>
               </a:rPr>
               <a:t>Automation regression testing update</a:t>
             </a:r>
           </a:p>
           <a:p>
-            <a:pPr marL="628650" lvl="1" indent="-171450">
+            <a:pPr marL="628650" lvl="1" indent="-171450" defTabSz="457200">
               <a:lnSpc>
                 <a:spcPct val="150000"/>
               </a:lnSpc>
@@ -6054,10 +5853,10 @@
                 <a:solidFill>
                   <a:srgbClr val="000000"/>
                 </a:solidFill>
-                <a:latin typeface="Arial" panose="020B0604020202020204" pitchFamily="34" charset="0"/>
-                <a:cs typeface="Arial" panose="020B0604020202020204" pitchFamily="34" charset="0"/>
+                <a:latin typeface="Segoe UI"/>
+                <a:cs typeface="Segoe UI"/>
               </a:rPr>
-              <a:t>Yet to have</a:t>
+              <a:t>TBD</a:t>
             </a:r>
           </a:p>
         </p:txBody>
@@ -6076,12 +5875,17 @@
         </p:nvSpPr>
         <p:spPr>
           <a:xfrm>
-            <a:off x="815273" y="546855"/>
-            <a:ext cx="3826615" cy="303924"/>
+            <a:off x="741401" y="1208259"/>
+            <a:ext cx="2869961" cy="303924"/>
           </a:xfrm>
           <a:prstGeom prst="roundRect">
             <a:avLst/>
           </a:prstGeom>
+          <a:ln>
+            <a:solidFill>
+              <a:schemeClr val="accent1"/>
+            </a:solidFill>
+          </a:ln>
         </p:spPr>
         <p:style>
           <a:lnRef idx="2">
@@ -6103,11 +5907,14 @@
           <a:bodyPr rtlCol="0" anchor="ctr"/>
           <a:lstStyle/>
           <a:p>
-            <a:pPr algn="ctr"/>
+            <a:pPr algn="ctr" defTabSz="457200"/>
             <a:r>
               <a:rPr lang="en-US" sz="1100" b="1" i="1" dirty="0">
-                <a:latin typeface="Arial" panose="020B0604020202020204" pitchFamily="34" charset="0"/>
-                <a:cs typeface="Arial" panose="020B0604020202020204" pitchFamily="34" charset="0"/>
+                <a:solidFill>
+                  <a:prstClr val="white"/>
+                </a:solidFill>
+                <a:latin typeface="Segoe UI" panose="020B0604020202020204" pitchFamily="34" charset="0"/>
+                <a:cs typeface="Segoe UI" panose="020B0604020202020204" pitchFamily="34" charset="0"/>
               </a:rPr>
               <a:t>Key Highlights</a:t>
             </a:r>
@@ -6115,8 +5922,8 @@
               <a:solidFill>
                 <a:srgbClr val="FF0000"/>
               </a:solidFill>
-              <a:latin typeface="Arial" panose="020B0604020202020204" pitchFamily="34" charset="0"/>
-              <a:cs typeface="Arial" panose="020B0604020202020204" pitchFamily="34" charset="0"/>
+              <a:latin typeface="Segoe UI" panose="020B0604020202020204" pitchFamily="34" charset="0"/>
+              <a:cs typeface="Segoe UI" panose="020B0604020202020204" pitchFamily="34" charset="0"/>
             </a:endParaRPr>
           </a:p>
         </p:txBody>
@@ -6135,8 +5942,8 @@
         </p:nvSpPr>
         <p:spPr>
           <a:xfrm>
-            <a:off x="6060355" y="1037658"/>
-            <a:ext cx="2517556" cy="230832"/>
+            <a:off x="5594769" y="1206309"/>
+            <a:ext cx="2461211" cy="230832"/>
           </a:xfrm>
           <a:prstGeom prst="rect">
             <a:avLst/>
@@ -6149,55 +5956,15 @@
           </a:bodyPr>
           <a:lstStyle/>
           <a:p>
+            <a:pPr defTabSz="457200"/>
             <a:r>
-              <a:rPr lang="en-US" sz="900" b="1" dirty="0">
-                <a:highlight>
-                  <a:srgbClr val="C0C0C0"/>
-                </a:highlight>
-                <a:latin typeface="Arial" panose="020B0604020202020204" pitchFamily="34" charset="0"/>
-                <a:cs typeface="Arial" panose="020B0604020202020204" pitchFamily="34" charset="0"/>
+              <a:rPr sz="900" b="1" dirty="0">
+                <a:solidFill>
+                  <a:prstClr val="black"/>
+                </a:solidFill>
+                <a:latin typeface="Segoe UI"/>
               </a:rPr>
-              <a:t>Manual (9</a:t>
-            </a:r>
-            <a:r>
-              <a:rPr lang="en-US" sz="900" b="1" baseline="30000" dirty="0">
-                <a:highlight>
-                  <a:srgbClr val="C0C0C0"/>
-                </a:highlight>
-                <a:latin typeface="Arial" panose="020B0604020202020204" pitchFamily="34" charset="0"/>
-                <a:cs typeface="Arial" panose="020B0604020202020204" pitchFamily="34" charset="0"/>
-              </a:rPr>
-              <a:t>th</a:t>
-            </a:r>
-            <a:r>
-              <a:rPr lang="en-US" sz="900" b="1" dirty="0">
-                <a:highlight>
-                  <a:srgbClr val="C0C0C0"/>
-                </a:highlight>
-                <a:latin typeface="Arial" panose="020B0604020202020204" pitchFamily="34" charset="0"/>
-                <a:cs typeface="Arial" panose="020B0604020202020204" pitchFamily="34" charset="0"/>
-              </a:rPr>
-              <a:t> Feb to 13</a:t>
-            </a:r>
-            <a:r>
-              <a:rPr lang="en-US" sz="900" b="1" baseline="30000" dirty="0">
-                <a:highlight>
-                  <a:srgbClr val="C0C0C0"/>
-                </a:highlight>
-                <a:latin typeface="Arial" panose="020B0604020202020204" pitchFamily="34" charset="0"/>
-                <a:cs typeface="Arial" panose="020B0604020202020204" pitchFamily="34" charset="0"/>
-              </a:rPr>
-              <a:t>th</a:t>
-            </a:r>
-            <a:r>
-              <a:rPr lang="en-US" sz="900" b="1" dirty="0">
-                <a:highlight>
-                  <a:srgbClr val="C0C0C0"/>
-                </a:highlight>
-                <a:latin typeface="Arial" panose="020B0604020202020204" pitchFamily="34" charset="0"/>
-                <a:cs typeface="Arial" panose="020B0604020202020204" pitchFamily="34" charset="0"/>
-              </a:rPr>
-              <a:t> Feb)</a:t>
+              <a:t>Manual (11th May to 15th May)</a:t>
             </a:r>
           </a:p>
         </p:txBody>
@@ -6216,8 +5983,8 @@
         </p:nvSpPr>
         <p:spPr>
           <a:xfrm>
-            <a:off x="6090070" y="2853362"/>
-            <a:ext cx="2239932" cy="230832"/>
+            <a:off x="5581202" y="2961017"/>
+            <a:ext cx="1679949" cy="230832"/>
           </a:xfrm>
           <a:prstGeom prst="rect">
             <a:avLst/>
@@ -6228,16 +5995,22 @@
           <a:bodyPr wrap="square" rtlCol="0">
             <a:spAutoFit/>
           </a:bodyPr>
-          <a:lstStyle/>
+          <a:lstStyle>
+            <a:defPPr>
+              <a:defRPr lang="en-US"/>
+            </a:defPPr>
+            <a:lvl1pPr defTabSz="457200">
+              <a:defRPr sz="900" b="1">
+                <a:solidFill>
+                  <a:prstClr val="black"/>
+                </a:solidFill>
+                <a:latin typeface="Segoe UI"/>
+              </a:defRPr>
+            </a:lvl1pPr>
+          </a:lstStyle>
           <a:p>
             <a:r>
-              <a:rPr lang="en-US" sz="900" b="1" dirty="0">
-                <a:highlight>
-                  <a:srgbClr val="C0C0C0"/>
-                </a:highlight>
-                <a:latin typeface="Arial" panose="020B0604020202020204" pitchFamily="34" charset="0"/>
-                <a:cs typeface="Arial" panose="020B0604020202020204" pitchFamily="34" charset="0"/>
-              </a:rPr>
+              <a:rPr lang="en-US" dirty="0"/>
               <a:t>Automation</a:t>
             </a:r>
           </a:p>
@@ -6255,46 +6028,52 @@
           <p:cNvGraphicFramePr>
             <a:graphicFrameLocks noGrp="1"/>
           </p:cNvGraphicFramePr>
-          <p:nvPr/>
+          <p:nvPr>
+            <p:extLst>
+              <p:ext uri="{D42A27DB-BD31-4B8C-83A1-F6EECF244321}">
+                <p14:modId xmlns:p14="http://schemas.microsoft.com/office/powerpoint/2010/main" val="504410525"/>
+              </p:ext>
+            </p:extLst>
+          </p:nvPr>
         </p:nvGraphicFramePr>
         <p:xfrm>
-          <a:off x="6179862" y="3133974"/>
-          <a:ext cx="5492849" cy="752003"/>
+          <a:off x="5679927" y="3191849"/>
+          <a:ext cx="5292874" cy="752003"/>
         </p:xfrm>
         <a:graphic>
           <a:graphicData uri="http://schemas.openxmlformats.org/drawingml/2006/table">
             <a:tbl>
               <a:tblPr/>
               <a:tblGrid>
-                <a:gridCol w="1392185">
+                <a:gridCol w="1341500">
                   <a:extLst>
                     <a:ext uri="{9D8B030D-6E8A-4147-A177-3AD203B41FA5}">
                       <a16:colId xmlns:a16="http://schemas.microsoft.com/office/drawing/2014/main" val="4010521003"/>
                     </a:ext>
                   </a:extLst>
                 </a:gridCol>
-                <a:gridCol w="748223">
+                <a:gridCol w="720983">
                   <a:extLst>
                     <a:ext uri="{9D8B030D-6E8A-4147-A177-3AD203B41FA5}">
                       <a16:colId xmlns:a16="http://schemas.microsoft.com/office/drawing/2014/main" val="2043686837"/>
                     </a:ext>
                   </a:extLst>
                 </a:gridCol>
-                <a:gridCol w="940735">
+                <a:gridCol w="906487">
                   <a:extLst>
                     <a:ext uri="{9D8B030D-6E8A-4147-A177-3AD203B41FA5}">
                       <a16:colId xmlns:a16="http://schemas.microsoft.com/office/drawing/2014/main" val="3116995582"/>
                     </a:ext>
                   </a:extLst>
                 </a:gridCol>
-                <a:gridCol w="1205853">
+                <a:gridCol w="1161952">
                   <a:extLst>
                     <a:ext uri="{9D8B030D-6E8A-4147-A177-3AD203B41FA5}">
                       <a16:colId xmlns:a16="http://schemas.microsoft.com/office/drawing/2014/main" val="2056568984"/>
                     </a:ext>
                   </a:extLst>
                 </a:gridCol>
-                <a:gridCol w="1205853">
+                <a:gridCol w="1161952">
                   <a:extLst>
                     <a:ext uri="{9D8B030D-6E8A-4147-A177-3AD203B41FA5}">
                       <a16:colId xmlns:a16="http://schemas.microsoft.com/office/drawing/2014/main" val="3846826528"/>
@@ -6308,15 +6087,22 @@
                     <a:bodyPr/>
                     <a:lstStyle/>
                     <a:p>
-                      <a:pPr algn="ctr" rtl="0" fontAlgn="ctr"/>
+                      <a:pPr algn="ctr" rtl="0" fontAlgn="ctr">
+                        <a:defRPr sz="1000" b="1">
+                          <a:solidFill>
+                            <a:srgbClr val="FFFFFF"/>
+                          </a:solidFill>
+                          <a:latin typeface="Segoe UI"/>
+                        </a:defRPr>
+                      </a:pPr>
                       <a:r>
-                        <a:rPr lang="en-US" sz="800" b="1" i="0" u="none" strike="noStrike" dirty="0">
+                        <a:rPr lang="en-US" sz="1000" b="1" i="0" u="none" strike="noStrike" dirty="0">
                           <a:solidFill>
-                            <a:srgbClr val="000000"/>
+                            <a:srgbClr val="FFFFFF"/>
                           </a:solidFill>
                           <a:effectLst/>
-                          <a:latin typeface="Arial" panose="020B0604020202020204" pitchFamily="34" charset="0"/>
-                          <a:cs typeface="Arial" panose="020B0604020202020204" pitchFamily="34" charset="0"/>
+                          <a:latin typeface="Segoe UI" panose="020B0604020202020204" pitchFamily="34" charset="0"/>
+                          <a:cs typeface="Segoe UI" panose="020B0604020202020204" pitchFamily="34" charset="0"/>
                         </a:rPr>
                         <a:t>Release#</a:t>
                       </a:r>
@@ -6360,7 +6146,7 @@
                       <a:tailEnd type="none" w="med" len="med"/>
                     </a:lnB>
                     <a:solidFill>
-                      <a:srgbClr val="D9E2F3"/>
+                      <a:schemeClr val="accent1"/>
                     </a:solidFill>
                   </a:tcPr>
                 </a:tc>
@@ -6369,15 +6155,22 @@
                     <a:bodyPr/>
                     <a:lstStyle/>
                     <a:p>
-                      <a:pPr algn="ctr" rtl="0" fontAlgn="ctr"/>
+                      <a:pPr algn="ctr" rtl="0" fontAlgn="ctr">
+                        <a:defRPr sz="1000" b="1">
+                          <a:solidFill>
+                            <a:srgbClr val="FFFFFF"/>
+                          </a:solidFill>
+                          <a:latin typeface="Segoe UI"/>
+                        </a:defRPr>
+                      </a:pPr>
                       <a:r>
-                        <a:rPr lang="en-US" sz="800" b="1" i="0" u="none" strike="noStrike" dirty="0">
+                        <a:rPr lang="en-US" sz="1000" b="1" i="0" u="none" strike="noStrike" dirty="0">
                           <a:solidFill>
-                            <a:srgbClr val="000000"/>
+                            <a:srgbClr val="FFFFFF"/>
                           </a:solidFill>
                           <a:effectLst/>
-                          <a:latin typeface="Arial" panose="020B0604020202020204" pitchFamily="34" charset="0"/>
-                          <a:cs typeface="Arial" panose="020B0604020202020204" pitchFamily="34" charset="0"/>
+                          <a:latin typeface="Segoe UI" panose="020B0604020202020204" pitchFamily="34" charset="0"/>
+                          <a:cs typeface="Segoe UI" panose="020B0604020202020204" pitchFamily="34" charset="0"/>
                         </a:rPr>
                         <a:t>Executed</a:t>
                       </a:r>
@@ -6421,7 +6214,7 @@
                       <a:tailEnd type="none" w="med" len="med"/>
                     </a:lnB>
                     <a:solidFill>
-                      <a:srgbClr val="D9E2F3"/>
+                      <a:schemeClr val="accent1"/>
                     </a:solidFill>
                   </a:tcPr>
                 </a:tc>
@@ -6430,15 +6223,22 @@
                     <a:bodyPr/>
                     <a:lstStyle/>
                     <a:p>
-                      <a:pPr algn="ctr" rtl="0" fontAlgn="ctr"/>
+                      <a:pPr algn="ctr" rtl="0" fontAlgn="ctr">
+                        <a:defRPr sz="1000" b="1">
+                          <a:solidFill>
+                            <a:srgbClr val="FFFFFF"/>
+                          </a:solidFill>
+                          <a:latin typeface="Segoe UI"/>
+                        </a:defRPr>
+                      </a:pPr>
                       <a:r>
-                        <a:rPr lang="en-US" sz="800" b="1" i="0" u="none" strike="noStrike" dirty="0">
+                        <a:rPr lang="en-US" sz="1000" b="1" i="0" u="none" strike="noStrike" dirty="0">
                           <a:solidFill>
-                            <a:srgbClr val="000000"/>
+                            <a:srgbClr val="FFFFFF"/>
                           </a:solidFill>
                           <a:effectLst/>
-                          <a:latin typeface="Arial" panose="020B0604020202020204" pitchFamily="34" charset="0"/>
-                          <a:cs typeface="Arial" panose="020B0604020202020204" pitchFamily="34" charset="0"/>
+                          <a:latin typeface="Segoe UI" panose="020B0604020202020204" pitchFamily="34" charset="0"/>
+                          <a:cs typeface="Segoe UI" panose="020B0604020202020204" pitchFamily="34" charset="0"/>
                         </a:rPr>
                         <a:t>Passed</a:t>
                       </a:r>
@@ -6482,7 +6282,7 @@
                       <a:tailEnd type="none" w="med" len="med"/>
                     </a:lnB>
                     <a:solidFill>
-                      <a:srgbClr val="D9E2F3"/>
+                      <a:schemeClr val="accent1"/>
                     </a:solidFill>
                   </a:tcPr>
                 </a:tc>
@@ -6491,15 +6291,22 @@
                     <a:bodyPr/>
                     <a:lstStyle/>
                     <a:p>
-                      <a:pPr algn="ctr" rtl="0" fontAlgn="ctr"/>
+                      <a:pPr algn="ctr" rtl="0" fontAlgn="ctr">
+                        <a:defRPr sz="1000" b="1">
+                          <a:solidFill>
+                            <a:srgbClr val="FFFFFF"/>
+                          </a:solidFill>
+                          <a:latin typeface="Segoe UI"/>
+                        </a:defRPr>
+                      </a:pPr>
                       <a:r>
-                        <a:rPr lang="en-US" sz="800" b="1" i="0" u="none" strike="noStrike" dirty="0">
+                        <a:rPr lang="en-US" sz="1000" b="1" i="0" u="none" strike="noStrike" dirty="0">
                           <a:solidFill>
-                            <a:srgbClr val="000000"/>
+                            <a:srgbClr val="FFFFFF"/>
                           </a:solidFill>
                           <a:effectLst/>
-                          <a:latin typeface="Arial" panose="020B0604020202020204" pitchFamily="34" charset="0"/>
-                          <a:cs typeface="Arial" panose="020B0604020202020204" pitchFamily="34" charset="0"/>
+                          <a:latin typeface="Segoe UI" panose="020B0604020202020204" pitchFamily="34" charset="0"/>
+                          <a:cs typeface="Segoe UI" panose="020B0604020202020204" pitchFamily="34" charset="0"/>
                         </a:rPr>
                         <a:t>Failed</a:t>
                       </a:r>
@@ -6543,7 +6350,7 @@
                       <a:tailEnd type="none" w="med" len="med"/>
                     </a:lnB>
                     <a:solidFill>
-                      <a:srgbClr val="D9E2F3"/>
+                      <a:schemeClr val="accent1"/>
                     </a:solidFill>
                   </a:tcPr>
                 </a:tc>
@@ -6552,17 +6359,22 @@
                     <a:bodyPr/>
                     <a:lstStyle/>
                     <a:p>
-                      <a:pPr algn="ctr" rtl="0" fontAlgn="ctr"/>
+                      <a:pPr>
+                        <a:defRPr sz="1000" b="1">
+                          <a:solidFill>
+                            <a:srgbClr val="FFFFFF"/>
+                          </a:solidFill>
+                          <a:latin typeface="Segoe UI"/>
+                        </a:defRPr>
+                      </a:pPr>
                       <a:r>
-                        <a:rPr lang="en-US" sz="800" b="1" i="0" u="none" strike="noStrike" dirty="0">
+                        <a:rPr sz="1000" b="1" dirty="0">
                           <a:solidFill>
-                            <a:srgbClr val="000000"/>
+                            <a:srgbClr val="FFFFFF"/>
                           </a:solidFill>
-                          <a:effectLst/>
-                          <a:latin typeface="Arial" panose="020B0604020202020204" pitchFamily="34" charset="0"/>
-                          <a:cs typeface="Arial" panose="020B0604020202020204" pitchFamily="34" charset="0"/>
+                          <a:latin typeface="Segoe UI"/>
                         </a:rPr>
-                        <a:t>In Progress</a:t>
+                        <a:t>In Prog</a:t>
                       </a:r>
                     </a:p>
                   </a:txBody>
@@ -6604,7 +6416,7 @@
                       <a:tailEnd type="none" w="med" len="med"/>
                     </a:lnB>
                     <a:solidFill>
-                      <a:srgbClr val="D9E2F3"/>
+                      <a:schemeClr val="accent1"/>
                     </a:solidFill>
                   </a:tcPr>
                 </a:tc>
@@ -6624,15 +6436,18 @@
                         <a:lnSpc>
                           <a:spcPct val="150000"/>
                         </a:lnSpc>
+                        <a:defRPr sz="800">
+                          <a:latin typeface="Segoe UI"/>
+                        </a:defRPr>
                       </a:pPr>
                       <a:endParaRPr lang="en-US" sz="800" b="0" i="0" u="none" strike="noStrike" kern="1200" dirty="0">
                         <a:solidFill>
                           <a:srgbClr val="000000"/>
                         </a:solidFill>
                         <a:effectLst/>
-                        <a:latin typeface="Arial" panose="020B0604020202020204" pitchFamily="34" charset="0"/>
+                        <a:latin typeface="Segoe UI" panose="020B0604020202020204" pitchFamily="34" charset="0"/>
                         <a:ea typeface="+mn-ea"/>
-                        <a:cs typeface="Arial" panose="020B0604020202020204" pitchFamily="34" charset="0"/>
+                        <a:cs typeface="Segoe UI" panose="020B0604020202020204" pitchFamily="34" charset="0"/>
                       </a:endParaRPr>
                     </a:p>
                   </a:txBody>
@@ -6680,15 +6495,19 @@
                     <a:bodyPr/>
                     <a:lstStyle/>
                     <a:p>
-                      <a:pPr marL="0" marR="0" algn="ctr"/>
+                      <a:pPr marL="0" marR="0" algn="ctr">
+                        <a:defRPr sz="800">
+                          <a:latin typeface="Segoe UI"/>
+                        </a:defRPr>
+                      </a:pPr>
                       <a:endParaRPr lang="en-US" sz="800" b="0" i="0" u="none" strike="noStrike" kern="1200" dirty="0">
                         <a:solidFill>
                           <a:srgbClr val="000000"/>
                         </a:solidFill>
                         <a:effectLst/>
-                        <a:latin typeface="Arial" panose="020B0604020202020204" pitchFamily="34" charset="0"/>
+                        <a:latin typeface="Segoe UI" panose="020B0604020202020204" pitchFamily="34" charset="0"/>
                         <a:ea typeface="+mn-ea"/>
-                        <a:cs typeface="Arial" panose="020B0604020202020204" pitchFamily="34" charset="0"/>
+                        <a:cs typeface="Segoe UI" panose="020B0604020202020204" pitchFamily="34" charset="0"/>
                       </a:endParaRPr>
                     </a:p>
                   </a:txBody>
@@ -6736,15 +6555,19 @@
                     <a:bodyPr/>
                     <a:lstStyle/>
                     <a:p>
-                      <a:pPr marL="0" marR="0" algn="ctr"/>
+                      <a:pPr marL="0" marR="0" algn="ctr">
+                        <a:defRPr sz="800">
+                          <a:latin typeface="Segoe UI"/>
+                        </a:defRPr>
+                      </a:pPr>
                       <a:endParaRPr lang="en-US" sz="800" b="0" i="0" u="none" strike="noStrike" kern="1200" dirty="0">
                         <a:solidFill>
                           <a:srgbClr val="000000"/>
                         </a:solidFill>
                         <a:effectLst/>
-                        <a:latin typeface="Arial" panose="020B0604020202020204" pitchFamily="34" charset="0"/>
+                        <a:latin typeface="Segoe UI" panose="020B0604020202020204" pitchFamily="34" charset="0"/>
                         <a:ea typeface="+mn-ea"/>
-                        <a:cs typeface="Arial" panose="020B0604020202020204" pitchFamily="34" charset="0"/>
+                        <a:cs typeface="Segoe UI" panose="020B0604020202020204" pitchFamily="34" charset="0"/>
                       </a:endParaRPr>
                     </a:p>
                   </a:txBody>
@@ -6792,15 +6615,19 @@
                     <a:bodyPr/>
                     <a:lstStyle/>
                     <a:p>
-                      <a:pPr marL="0" marR="0" algn="ctr"/>
+                      <a:pPr marL="0" marR="0" algn="ctr">
+                        <a:defRPr sz="800">
+                          <a:latin typeface="Segoe UI"/>
+                        </a:defRPr>
+                      </a:pPr>
                       <a:endParaRPr lang="en-US" sz="800" b="0" i="0" u="none" strike="noStrike" kern="1200" dirty="0">
                         <a:solidFill>
                           <a:srgbClr val="000000"/>
                         </a:solidFill>
                         <a:effectLst/>
-                        <a:latin typeface="Arial" panose="020B0604020202020204" pitchFamily="34" charset="0"/>
+                        <a:latin typeface="Segoe UI" panose="020B0604020202020204" pitchFamily="34" charset="0"/>
                         <a:ea typeface="+mn-ea"/>
-                        <a:cs typeface="Arial" panose="020B0604020202020204" pitchFamily="34" charset="0"/>
+                        <a:cs typeface="Segoe UI" panose="020B0604020202020204" pitchFamily="34" charset="0"/>
                       </a:endParaRPr>
                     </a:p>
                   </a:txBody>
@@ -6848,15 +6675,19 @@
                     <a:bodyPr/>
                     <a:lstStyle/>
                     <a:p>
-                      <a:pPr marL="0" marR="0" algn="ctr"/>
+                      <a:pPr marL="0" marR="0" algn="ctr">
+                        <a:defRPr sz="800">
+                          <a:latin typeface="Segoe UI"/>
+                        </a:defRPr>
+                      </a:pPr>
                       <a:endParaRPr lang="en-US" sz="800" b="0" i="0" u="none" strike="noStrike" kern="1200" dirty="0">
                         <a:solidFill>
                           <a:srgbClr val="000000"/>
                         </a:solidFill>
                         <a:effectLst/>
-                        <a:latin typeface="Arial" panose="020B0604020202020204" pitchFamily="34" charset="0"/>
+                        <a:latin typeface="Segoe UI" panose="020B0604020202020204" pitchFamily="34" charset="0"/>
                         <a:ea typeface="+mn-ea"/>
-                        <a:cs typeface="Arial" panose="020B0604020202020204" pitchFamily="34" charset="0"/>
+                        <a:cs typeface="Segoe UI" panose="020B0604020202020204" pitchFamily="34" charset="0"/>
                       </a:endParaRPr>
                     </a:p>
                   </a:txBody>
@@ -6915,15 +6746,18 @@
                         <a:lnSpc>
                           <a:spcPct val="150000"/>
                         </a:lnSpc>
+                        <a:defRPr sz="800">
+                          <a:latin typeface="Segoe UI"/>
+                        </a:defRPr>
                       </a:pPr>
                       <a:endParaRPr lang="en-US" sz="800" b="0" i="0" u="none" strike="noStrike" kern="1200" dirty="0">
                         <a:solidFill>
                           <a:srgbClr val="000000"/>
                         </a:solidFill>
                         <a:effectLst/>
-                        <a:latin typeface="Arial" panose="020B0604020202020204" pitchFamily="34" charset="0"/>
+                        <a:latin typeface="Segoe UI" panose="020B0604020202020204" pitchFamily="34" charset="0"/>
                         <a:ea typeface="+mn-ea"/>
-                        <a:cs typeface="Arial" panose="020B0604020202020204" pitchFamily="34" charset="0"/>
+                        <a:cs typeface="Segoe UI" panose="020B0604020202020204" pitchFamily="34" charset="0"/>
                       </a:endParaRPr>
                     </a:p>
                   </a:txBody>
@@ -6971,15 +6805,19 @@
                     <a:bodyPr/>
                     <a:lstStyle/>
                     <a:p>
-                      <a:pPr marL="0" marR="0" algn="ctr"/>
+                      <a:pPr marL="0" marR="0" algn="ctr">
+                        <a:defRPr sz="800">
+                          <a:latin typeface="Segoe UI"/>
+                        </a:defRPr>
+                      </a:pPr>
                       <a:endParaRPr lang="en-US" sz="800" b="0" i="0" u="none" strike="noStrike" kern="1200" dirty="0">
                         <a:solidFill>
                           <a:srgbClr val="000000"/>
                         </a:solidFill>
                         <a:effectLst/>
-                        <a:latin typeface="Arial" panose="020B0604020202020204" pitchFamily="34" charset="0"/>
+                        <a:latin typeface="Segoe UI" panose="020B0604020202020204" pitchFamily="34" charset="0"/>
                         <a:ea typeface="+mn-ea"/>
-                        <a:cs typeface="Arial" panose="020B0604020202020204" pitchFamily="34" charset="0"/>
+                        <a:cs typeface="Segoe UI" panose="020B0604020202020204" pitchFamily="34" charset="0"/>
                       </a:endParaRPr>
                     </a:p>
                   </a:txBody>
@@ -7027,15 +6865,19 @@
                     <a:bodyPr/>
                     <a:lstStyle/>
                     <a:p>
-                      <a:pPr marL="0" marR="0" algn="ctr"/>
+                      <a:pPr marL="0" marR="0" algn="ctr">
+                        <a:defRPr sz="800">
+                          <a:latin typeface="Segoe UI"/>
+                        </a:defRPr>
+                      </a:pPr>
                       <a:endParaRPr lang="en-US" sz="800" b="0" i="0" u="none" strike="noStrike" kern="1200" dirty="0">
                         <a:solidFill>
                           <a:srgbClr val="000000"/>
                         </a:solidFill>
                         <a:effectLst/>
-                        <a:latin typeface="Arial" panose="020B0604020202020204" pitchFamily="34" charset="0"/>
+                        <a:latin typeface="Segoe UI" panose="020B0604020202020204" pitchFamily="34" charset="0"/>
                         <a:ea typeface="+mn-ea"/>
-                        <a:cs typeface="Arial" panose="020B0604020202020204" pitchFamily="34" charset="0"/>
+                        <a:cs typeface="Segoe UI" panose="020B0604020202020204" pitchFamily="34" charset="0"/>
                       </a:endParaRPr>
                     </a:p>
                   </a:txBody>
@@ -7083,15 +6925,19 @@
                     <a:bodyPr/>
                     <a:lstStyle/>
                     <a:p>
-                      <a:pPr marL="0" marR="0" algn="ctr"/>
+                      <a:pPr marL="0" marR="0" algn="ctr">
+                        <a:defRPr sz="800">
+                          <a:latin typeface="Segoe UI"/>
+                        </a:defRPr>
+                      </a:pPr>
                       <a:endParaRPr lang="en-US" sz="800" b="0" i="0" u="none" strike="noStrike" kern="1200" dirty="0">
                         <a:solidFill>
                           <a:srgbClr val="000000"/>
                         </a:solidFill>
                         <a:effectLst/>
-                        <a:latin typeface="Arial" panose="020B0604020202020204" pitchFamily="34" charset="0"/>
+                        <a:latin typeface="Segoe UI" panose="020B0604020202020204" pitchFamily="34" charset="0"/>
                         <a:ea typeface="+mn-ea"/>
-                        <a:cs typeface="Arial" panose="020B0604020202020204" pitchFamily="34" charset="0"/>
+                        <a:cs typeface="Segoe UI" panose="020B0604020202020204" pitchFamily="34" charset="0"/>
                       </a:endParaRPr>
                     </a:p>
                   </a:txBody>
@@ -7139,15 +6985,19 @@
                     <a:bodyPr/>
                     <a:lstStyle/>
                     <a:p>
-                      <a:pPr marL="0" marR="0" algn="ctr"/>
+                      <a:pPr marL="0" marR="0" algn="ctr">
+                        <a:defRPr sz="800">
+                          <a:latin typeface="Segoe UI"/>
+                        </a:defRPr>
+                      </a:pPr>
                       <a:endParaRPr lang="en-US" sz="800" b="0" i="0" u="none" strike="noStrike" kern="1200" dirty="0">
                         <a:solidFill>
                           <a:srgbClr val="000000"/>
                         </a:solidFill>
                         <a:effectLst/>
-                        <a:latin typeface="Arial" panose="020B0604020202020204" pitchFamily="34" charset="0"/>
+                        <a:latin typeface="Segoe UI" panose="020B0604020202020204" pitchFamily="34" charset="0"/>
                         <a:ea typeface="+mn-ea"/>
-                        <a:cs typeface="Arial" panose="020B0604020202020204" pitchFamily="34" charset="0"/>
+                        <a:cs typeface="Segoe UI" panose="020B0604020202020204" pitchFamily="34" charset="0"/>
                       </a:endParaRPr>
                     </a:p>
                   </a:txBody>
@@ -7214,8 +7064,8 @@
         </p:nvSpPr>
         <p:spPr>
           <a:xfrm>
-            <a:off x="6096000" y="3972903"/>
-            <a:ext cx="2239932" cy="230832"/>
+            <a:off x="5573486" y="4017569"/>
+            <a:ext cx="1679949" cy="230832"/>
           </a:xfrm>
           <a:prstGeom prst="rect">
             <a:avLst/>
@@ -7226,16 +7076,22 @@
           <a:bodyPr wrap="square" rtlCol="0">
             <a:spAutoFit/>
           </a:bodyPr>
-          <a:lstStyle/>
+          <a:lstStyle>
+            <a:defPPr>
+              <a:defRPr lang="en-US"/>
+            </a:defPPr>
+            <a:lvl1pPr defTabSz="457200">
+              <a:defRPr sz="900" b="1">
+                <a:solidFill>
+                  <a:prstClr val="black"/>
+                </a:solidFill>
+                <a:latin typeface="Segoe UI"/>
+              </a:defRPr>
+            </a:lvl1pPr>
+          </a:lstStyle>
           <a:p>
             <a:r>
-              <a:rPr lang="en-US" sz="900" b="1" dirty="0">
-                <a:highlight>
-                  <a:srgbClr val="C0C0C0"/>
-                </a:highlight>
-                <a:latin typeface="Arial" panose="020B0604020202020204" pitchFamily="34" charset="0"/>
-                <a:cs typeface="Arial" panose="020B0604020202020204" pitchFamily="34" charset="0"/>
-              </a:rPr>
+              <a:rPr lang="en-US" dirty="0"/>
               <a:t>Defect Summary</a:t>
             </a:r>
           </a:p>
@@ -7259,8 +7115,8 @@
         </p:nvSpPr>
         <p:spPr>
           <a:xfrm>
-            <a:off x="640080" y="6126480"/>
-            <a:ext cx="460300" cy="731520"/>
+            <a:off x="2004061" y="6126480"/>
+            <a:ext cx="345225" cy="731520"/>
           </a:xfrm>
         </p:spPr>
         <p:txBody>
@@ -7269,21 +7125,35 @@
           </a:bodyPr>
           <a:lstStyle/>
           <a:p>
-            <a:pPr>
+            <a:pPr defTabSz="457200">
               <a:spcAft>
                 <a:spcPts val="600"/>
               </a:spcAft>
             </a:pPr>
             <a:fld id="{C53C0A73-EE5C-9246-97B4-6AF29FD73FB0}" type="slidenum">
-              <a:rPr lang="en-US" smtClean="0"/>
-              <a:pPr>
+              <a:rPr lang="en-US">
+                <a:solidFill>
+                  <a:prstClr val="black">
+                    <a:tint val="75000"/>
+                  </a:prstClr>
+                </a:solidFill>
+                <a:latin typeface="Calibri"/>
+              </a:rPr>
+              <a:pPr defTabSz="457200">
                 <a:spcAft>
                   <a:spcPts val="600"/>
                 </a:spcAft>
               </a:pPr>
               <a:t>1</a:t>
             </a:fld>
-            <a:endParaRPr lang="en-US" dirty="0"/>
+            <a:endParaRPr lang="en-US" dirty="0">
+              <a:solidFill>
+                <a:prstClr val="black">
+                  <a:tint val="75000"/>
+                </a:prstClr>
+              </a:solidFill>
+              <a:latin typeface="Calibri"/>
+            </a:endParaRPr>
           </a:p>
         </p:txBody>
       </p:sp>
@@ -7299,67 +7169,73 @@
           <p:cNvGraphicFramePr>
             <a:graphicFrameLocks noGrp="1"/>
           </p:cNvGraphicFramePr>
-          <p:nvPr/>
+          <p:nvPr>
+            <p:extLst>
+              <p:ext uri="{D42A27DB-BD31-4B8C-83A1-F6EECF244321}">
+                <p14:modId xmlns:p14="http://schemas.microsoft.com/office/powerpoint/2010/main" val="3545688655"/>
+              </p:ext>
+            </p:extLst>
+          </p:nvPr>
         </p:nvGraphicFramePr>
         <p:xfrm>
-          <a:off x="6147120" y="1450334"/>
-          <a:ext cx="5513794" cy="1357497"/>
+          <a:off x="5655370" y="1450335"/>
+          <a:ext cx="5401334" cy="1284659"/>
         </p:xfrm>
         <a:graphic>
           <a:graphicData uri="http://schemas.openxmlformats.org/drawingml/2006/table">
             <a:tbl>
               <a:tblPr/>
               <a:tblGrid>
-                <a:gridCol w="1608429">
+                <a:gridCol w="1585878">
                   <a:extLst>
                     <a:ext uri="{9D8B030D-6E8A-4147-A177-3AD203B41FA5}">
                       <a16:colId xmlns:a16="http://schemas.microsoft.com/office/drawing/2014/main" val="4010521003"/>
                     </a:ext>
                   </a:extLst>
                 </a:gridCol>
-                <a:gridCol w="376063">
+                <a:gridCol w="420862">
                   <a:extLst>
                     <a:ext uri="{9D8B030D-6E8A-4147-A177-3AD203B41FA5}">
                       <a16:colId xmlns:a16="http://schemas.microsoft.com/office/drawing/2014/main" val="4063194916"/>
                     </a:ext>
                   </a:extLst>
                 </a:gridCol>
-                <a:gridCol w="707588">
+                <a:gridCol w="663758">
                   <a:extLst>
                     <a:ext uri="{9D8B030D-6E8A-4147-A177-3AD203B41FA5}">
                       <a16:colId xmlns:a16="http://schemas.microsoft.com/office/drawing/2014/main" val="2043686837"/>
                     </a:ext>
                   </a:extLst>
                 </a:gridCol>
-                <a:gridCol w="540327">
+                <a:gridCol w="506858">
                   <a:extLst>
                     <a:ext uri="{9D8B030D-6E8A-4147-A177-3AD203B41FA5}">
                       <a16:colId xmlns:a16="http://schemas.microsoft.com/office/drawing/2014/main" val="1615312928"/>
                     </a:ext>
                   </a:extLst>
                 </a:gridCol>
-                <a:gridCol w="678873">
+                <a:gridCol w="720725">
                   <a:extLst>
                     <a:ext uri="{9D8B030D-6E8A-4147-A177-3AD203B41FA5}">
                       <a16:colId xmlns:a16="http://schemas.microsoft.com/office/drawing/2014/main" val="3116995582"/>
                     </a:ext>
                   </a:extLst>
                 </a:gridCol>
-                <a:gridCol w="436418">
+                <a:gridCol w="409386">
                   <a:extLst>
                     <a:ext uri="{9D8B030D-6E8A-4147-A177-3AD203B41FA5}">
                       <a16:colId xmlns:a16="http://schemas.microsoft.com/office/drawing/2014/main" val="2056568984"/>
                     </a:ext>
                   </a:extLst>
                 </a:gridCol>
-                <a:gridCol w="436418">
+                <a:gridCol w="409386">
                   <a:extLst>
                     <a:ext uri="{9D8B030D-6E8A-4147-A177-3AD203B41FA5}">
                       <a16:colId xmlns:a16="http://schemas.microsoft.com/office/drawing/2014/main" val="1051215358"/>
                     </a:ext>
                   </a:extLst>
                 </a:gridCol>
-                <a:gridCol w="729678">
+                <a:gridCol w="684481">
                   <a:extLst>
                     <a:ext uri="{9D8B030D-6E8A-4147-A177-3AD203B41FA5}">
                       <a16:colId xmlns:a16="http://schemas.microsoft.com/office/drawing/2014/main" val="1585227193"/>
@@ -7373,15 +7249,22 @@
                     <a:bodyPr/>
                     <a:lstStyle/>
                     <a:p>
-                      <a:pPr algn="ctr" rtl="0" fontAlgn="ctr"/>
+                      <a:pPr algn="ctr" rtl="0" fontAlgn="ctr">
+                        <a:defRPr sz="1000" b="1">
+                          <a:solidFill>
+                            <a:srgbClr val="FFFFFF"/>
+                          </a:solidFill>
+                          <a:latin typeface="Segoe UI"/>
+                        </a:defRPr>
+                      </a:pPr>
                       <a:r>
-                        <a:rPr lang="en-US" sz="800" b="1" i="0" u="none" strike="noStrike" dirty="0">
+                        <a:rPr lang="en-US" sz="1000" b="1" i="0" u="none" strike="noStrike" dirty="0">
                           <a:solidFill>
-                            <a:srgbClr val="000000"/>
+                            <a:srgbClr val="FFFFFF"/>
                           </a:solidFill>
                           <a:effectLst/>
-                          <a:latin typeface="Arial" panose="020B0604020202020204" pitchFamily="34" charset="0"/>
-                          <a:cs typeface="Arial" panose="020B0604020202020204" pitchFamily="34" charset="0"/>
+                          <a:latin typeface="Segoe UI" panose="020B0604020202020204" pitchFamily="34" charset="0"/>
+                          <a:cs typeface="Segoe UI" panose="020B0604020202020204" pitchFamily="34" charset="0"/>
                         </a:rPr>
                         <a:t>Release#</a:t>
                       </a:r>
@@ -7425,7 +7308,7 @@
                       <a:tailEnd type="none" w="med" len="med"/>
                     </a:lnB>
                     <a:solidFill>
-                      <a:srgbClr val="D9E2F3"/>
+                      <a:schemeClr val="accent1"/>
                     </a:solidFill>
                   </a:tcPr>
                 </a:tc>
@@ -7434,15 +7317,22 @@
                     <a:bodyPr/>
                     <a:lstStyle/>
                     <a:p>
-                      <a:pPr algn="ctr" rtl="0" fontAlgn="ctr"/>
+                      <a:pPr algn="ctr" rtl="0" fontAlgn="ctr">
+                        <a:defRPr sz="1000" b="1">
+                          <a:solidFill>
+                            <a:srgbClr val="FFFFFF"/>
+                          </a:solidFill>
+                          <a:latin typeface="Segoe UI"/>
+                        </a:defRPr>
+                      </a:pPr>
                       <a:r>
-                        <a:rPr lang="en-US" sz="800" b="1" i="0" u="none" strike="noStrike" dirty="0">
+                        <a:rPr lang="en-US" sz="1000" b="1" i="0" u="none" strike="noStrike" dirty="0">
                           <a:solidFill>
-                            <a:srgbClr val="000000"/>
+                            <a:srgbClr val="FFFFFF"/>
                           </a:solidFill>
                           <a:effectLst/>
-                          <a:latin typeface="Arial" panose="020B0604020202020204" pitchFamily="34" charset="0"/>
-                          <a:cs typeface="Arial" panose="020B0604020202020204" pitchFamily="34" charset="0"/>
+                          <a:latin typeface="Segoe UI" panose="020B0604020202020204" pitchFamily="34" charset="0"/>
+                          <a:cs typeface="Segoe UI" panose="020B0604020202020204" pitchFamily="34" charset="0"/>
                         </a:rPr>
                         <a:t> Total</a:t>
                       </a:r>
@@ -7486,7 +7376,7 @@
                       <a:tailEnd type="none" w="med" len="med"/>
                     </a:lnB>
                     <a:solidFill>
-                      <a:srgbClr val="D9E2F3"/>
+                      <a:schemeClr val="accent1"/>
                     </a:solidFill>
                   </a:tcPr>
                 </a:tc>
@@ -7495,15 +7385,22 @@
                     <a:bodyPr/>
                     <a:lstStyle/>
                     <a:p>
-                      <a:pPr algn="ctr" rtl="0" fontAlgn="ctr"/>
+                      <a:pPr algn="ctr" rtl="0" fontAlgn="ctr">
+                        <a:defRPr sz="1000" b="1">
+                          <a:solidFill>
+                            <a:srgbClr val="FFFFFF"/>
+                          </a:solidFill>
+                          <a:latin typeface="Segoe UI"/>
+                        </a:defRPr>
+                      </a:pPr>
                       <a:r>
-                        <a:rPr lang="en-US" sz="800" b="1" i="0" u="none" strike="noStrike" dirty="0">
+                        <a:rPr lang="en-US" sz="1000" b="1" i="0" u="none" strike="noStrike" dirty="0">
                           <a:solidFill>
-                            <a:srgbClr val="000000"/>
+                            <a:srgbClr val="FFFFFF"/>
                           </a:solidFill>
                           <a:effectLst/>
-                          <a:latin typeface="Arial" panose="020B0604020202020204" pitchFamily="34" charset="0"/>
-                          <a:cs typeface="Arial" panose="020B0604020202020204" pitchFamily="34" charset="0"/>
+                          <a:latin typeface="Segoe UI" panose="020B0604020202020204" pitchFamily="34" charset="0"/>
+                          <a:cs typeface="Segoe UI" panose="020B0604020202020204" pitchFamily="34" charset="0"/>
                         </a:rPr>
                         <a:t>Passed</a:t>
                       </a:r>
@@ -7547,7 +7444,7 @@
                       <a:tailEnd type="none" w="med" len="med"/>
                     </a:lnB>
                     <a:solidFill>
-                      <a:srgbClr val="D9E2F3"/>
+                      <a:schemeClr val="accent1"/>
                     </a:solidFill>
                   </a:tcPr>
                 </a:tc>
@@ -7556,15 +7453,22 @@
                     <a:bodyPr/>
                     <a:lstStyle/>
                     <a:p>
-                      <a:pPr algn="ctr" rtl="0" fontAlgn="ctr"/>
+                      <a:pPr algn="ctr" rtl="0" fontAlgn="ctr">
+                        <a:defRPr sz="1000" b="1">
+                          <a:solidFill>
+                            <a:srgbClr val="FFFFFF"/>
+                          </a:solidFill>
+                          <a:latin typeface="Segoe UI"/>
+                        </a:defRPr>
+                      </a:pPr>
                       <a:r>
-                        <a:rPr lang="en-US" sz="800" b="1" i="0" u="none" strike="noStrike" dirty="0">
+                        <a:rPr lang="en-US" sz="1000" b="1" i="0" u="none" strike="noStrike" dirty="0">
                           <a:solidFill>
-                            <a:srgbClr val="000000"/>
+                            <a:srgbClr val="FFFFFF"/>
                           </a:solidFill>
                           <a:effectLst/>
-                          <a:latin typeface="Arial" panose="020B0604020202020204" pitchFamily="34" charset="0"/>
-                          <a:cs typeface="Arial" panose="020B0604020202020204" pitchFamily="34" charset="0"/>
+                          <a:latin typeface="Segoe UI" panose="020B0604020202020204" pitchFamily="34" charset="0"/>
+                          <a:cs typeface="Segoe UI" panose="020B0604020202020204" pitchFamily="34" charset="0"/>
                         </a:rPr>
                         <a:t>Failed</a:t>
                       </a:r>
@@ -7608,7 +7512,7 @@
                       <a:tailEnd type="none" w="med" len="med"/>
                     </a:lnB>
                     <a:solidFill>
-                      <a:srgbClr val="D9E2F3"/>
+                      <a:schemeClr val="accent1"/>
                     </a:solidFill>
                   </a:tcPr>
                 </a:tc>
@@ -7617,18 +7521,38 @@
                     <a:bodyPr/>
                     <a:lstStyle/>
                     <a:p>
-                      <a:pPr algn="ctr" rtl="0" fontAlgn="ctr"/>
+                      <a:pPr>
+                        <a:defRPr sz="1000" b="1">
+                          <a:solidFill>
+                            <a:srgbClr val="FFFFFF"/>
+                          </a:solidFill>
+                          <a:latin typeface="Segoe UI"/>
+                        </a:defRPr>
+                      </a:pPr>
                       <a:r>
-                        <a:rPr lang="en-US" sz="800" b="1" i="0" u="none" strike="noStrike" dirty="0">
+                        <a:rPr sz="1000" b="1" dirty="0">
                           <a:solidFill>
-                            <a:srgbClr val="000000"/>
+                            <a:srgbClr val="FFFFFF"/>
                           </a:solidFill>
-                          <a:effectLst/>
-                          <a:latin typeface="Arial" panose="020B0604020202020204" pitchFamily="34" charset="0"/>
-                          <a:cs typeface="Arial" panose="020B0604020202020204" pitchFamily="34" charset="0"/>
+                          <a:latin typeface="Segoe UI"/>
                         </a:rPr>
-                        <a:t>In Progress</a:t>
+                        <a:t>In Prog</a:t>
                       </a:r>
+                      <a:r>
+                        <a:rPr lang="en-US" sz="1000" b="1" dirty="0">
+                          <a:solidFill>
+                            <a:srgbClr val="FFFFFF"/>
+                          </a:solidFill>
+                          <a:latin typeface="Segoe UI"/>
+                        </a:rPr>
+                        <a:t>ress</a:t>
+                      </a:r>
+                      <a:endParaRPr sz="1000" b="1" dirty="0">
+                        <a:solidFill>
+                          <a:srgbClr val="FFFFFF"/>
+                        </a:solidFill>
+                        <a:latin typeface="Segoe UI"/>
+                      </a:endParaRPr>
                     </a:p>
                   </a:txBody>
                   <a:tcPr marL="9525" marR="9525" marT="9525" marB="0" anchor="ctr">
@@ -7669,7 +7593,7 @@
                       <a:tailEnd type="none" w="med" len="med"/>
                     </a:lnB>
                     <a:solidFill>
-                      <a:srgbClr val="D9E2F3"/>
+                      <a:schemeClr val="accent1"/>
                     </a:solidFill>
                   </a:tcPr>
                 </a:tc>
@@ -7693,16 +7617,21 @@
                         <a:buFontTx/>
                         <a:buNone/>
                         <a:tabLst/>
-                        <a:defRPr/>
+                        <a:defRPr sz="1000" b="1">
+                          <a:solidFill>
+                            <a:srgbClr val="FFFFFF"/>
+                          </a:solidFill>
+                          <a:latin typeface="Segoe UI"/>
+                        </a:defRPr>
                       </a:pPr>
                       <a:r>
-                        <a:rPr lang="en-US" sz="800" b="1" i="0" u="none" strike="noStrike" dirty="0">
+                        <a:rPr lang="en-US" sz="1000" b="1" i="0" u="none" strike="noStrike" dirty="0">
                           <a:solidFill>
-                            <a:srgbClr val="000000"/>
+                            <a:srgbClr val="FFFFFF"/>
                           </a:solidFill>
                           <a:effectLst/>
-                          <a:latin typeface="Arial" panose="020B0604020202020204" pitchFamily="34" charset="0"/>
-                          <a:cs typeface="Arial" panose="020B0604020202020204" pitchFamily="34" charset="0"/>
+                          <a:latin typeface="Segoe UI" panose="020B0604020202020204" pitchFamily="34" charset="0"/>
+                          <a:cs typeface="Segoe UI" panose="020B0604020202020204" pitchFamily="34" charset="0"/>
                         </a:rPr>
                         <a:t>No Run</a:t>
                       </a:r>
@@ -7746,7 +7675,73 @@
                       <a:tailEnd type="none" w="med" len="med"/>
                     </a:lnB>
                     <a:solidFill>
-                      <a:srgbClr val="D9E2F3"/>
+                      <a:schemeClr val="accent1"/>
+                    </a:solidFill>
+                  </a:tcPr>
+                </a:tc>
+                <a:tc>
+                  <a:txBody>
+                    <a:bodyPr/>
+                    <a:lstStyle/>
+                    <a:p>
+                      <a:pPr>
+                        <a:defRPr sz="1000" b="1">
+                          <a:solidFill>
+                            <a:srgbClr val="FFFFFF"/>
+                          </a:solidFill>
+                          <a:latin typeface="Segoe UI"/>
+                        </a:defRPr>
+                      </a:pPr>
+                      <a:r>
+                        <a:rPr sz="1000" b="1" dirty="0">
+                          <a:solidFill>
+                            <a:srgbClr val="FFFFFF"/>
+                          </a:solidFill>
+                          <a:latin typeface="Segoe UI"/>
+                        </a:rPr>
+                        <a:t>NA</a:t>
+                      </a:r>
+                    </a:p>
+                  </a:txBody>
+                  <a:tcPr marL="9525" marR="9525" marT="9525" marB="0" anchor="ctr">
+                    <a:lnL w="12700" cap="flat" cmpd="sng" algn="ctr">
+                      <a:solidFill>
+                        <a:schemeClr val="tx1"/>
+                      </a:solidFill>
+                      <a:prstDash val="solid"/>
+                      <a:round/>
+                      <a:headEnd type="none" w="med" len="med"/>
+                      <a:tailEnd type="none" w="med" len="med"/>
+                    </a:lnL>
+                    <a:lnR w="12700" cap="flat" cmpd="sng" algn="ctr">
+                      <a:solidFill>
+                        <a:schemeClr val="tx1"/>
+                      </a:solidFill>
+                      <a:prstDash val="solid"/>
+                      <a:round/>
+                      <a:headEnd type="none" w="med" len="med"/>
+                      <a:tailEnd type="none" w="med" len="med"/>
+                    </a:lnR>
+                    <a:lnT w="12700" cap="flat" cmpd="sng" algn="ctr">
+                      <a:solidFill>
+                        <a:schemeClr val="tx1"/>
+                      </a:solidFill>
+                      <a:prstDash val="solid"/>
+                      <a:round/>
+                      <a:headEnd type="none" w="med" len="med"/>
+                      <a:tailEnd type="none" w="med" len="med"/>
+                    </a:lnT>
+                    <a:lnB w="12700" cap="flat" cmpd="sng" algn="ctr">
+                      <a:solidFill>
+                        <a:schemeClr val="tx1"/>
+                      </a:solidFill>
+                      <a:prstDash val="solid"/>
+                      <a:round/>
+                      <a:headEnd type="none" w="med" len="med"/>
+                      <a:tailEnd type="none" w="med" len="med"/>
+                    </a:lnB>
+                    <a:solidFill>
+                      <a:schemeClr val="accent1"/>
                     </a:solidFill>
                   </a:tcPr>
                 </a:tc>
@@ -7770,93 +7765,21 @@
                         <a:buFontTx/>
                         <a:buNone/>
                         <a:tabLst/>
-                        <a:defRPr/>
+                        <a:defRPr sz="1000" b="1">
+                          <a:solidFill>
+                            <a:srgbClr val="FFFFFF"/>
+                          </a:solidFill>
+                          <a:latin typeface="Segoe UI"/>
+                        </a:defRPr>
                       </a:pPr>
                       <a:r>
-                        <a:rPr lang="en-US" sz="800" b="1" i="0" u="none" strike="noStrike" dirty="0">
+                        <a:rPr lang="en-US" sz="1000" b="1" i="0" u="none" strike="noStrike" dirty="0">
                           <a:solidFill>
-                            <a:srgbClr val="000000"/>
+                            <a:srgbClr val="FFFFFF"/>
                           </a:solidFill>
                           <a:effectLst/>
-                          <a:latin typeface="Arial" panose="020B0604020202020204" pitchFamily="34" charset="0"/>
-                          <a:cs typeface="Arial" panose="020B0604020202020204" pitchFamily="34" charset="0"/>
-                        </a:rPr>
-                        <a:t>Not Applicable</a:t>
-                      </a:r>
-                    </a:p>
-                  </a:txBody>
-                  <a:tcPr marL="9525" marR="9525" marT="9525" marB="0" anchor="ctr">
-                    <a:lnL w="12700" cap="flat" cmpd="sng" algn="ctr">
-                      <a:solidFill>
-                        <a:schemeClr val="tx1"/>
-                      </a:solidFill>
-                      <a:prstDash val="solid"/>
-                      <a:round/>
-                      <a:headEnd type="none" w="med" len="med"/>
-                      <a:tailEnd type="none" w="med" len="med"/>
-                    </a:lnL>
-                    <a:lnR w="12700" cap="flat" cmpd="sng" algn="ctr">
-                      <a:solidFill>
-                        <a:schemeClr val="tx1"/>
-                      </a:solidFill>
-                      <a:prstDash val="solid"/>
-                      <a:round/>
-                      <a:headEnd type="none" w="med" len="med"/>
-                      <a:tailEnd type="none" w="med" len="med"/>
-                    </a:lnR>
-                    <a:lnT w="12700" cap="flat" cmpd="sng" algn="ctr">
-                      <a:solidFill>
-                        <a:schemeClr val="tx1"/>
-                      </a:solidFill>
-                      <a:prstDash val="solid"/>
-                      <a:round/>
-                      <a:headEnd type="none" w="med" len="med"/>
-                      <a:tailEnd type="none" w="med" len="med"/>
-                    </a:lnT>
-                    <a:lnB w="12700" cap="flat" cmpd="sng" algn="ctr">
-                      <a:solidFill>
-                        <a:schemeClr val="tx1"/>
-                      </a:solidFill>
-                      <a:prstDash val="solid"/>
-                      <a:round/>
-                      <a:headEnd type="none" w="med" len="med"/>
-                      <a:tailEnd type="none" w="med" len="med"/>
-                    </a:lnB>
-                    <a:solidFill>
-                      <a:srgbClr val="D9E2F3"/>
-                    </a:solidFill>
-                  </a:tcPr>
-                </a:tc>
-                <a:tc>
-                  <a:txBody>
-                    <a:bodyPr/>
-                    <a:lstStyle/>
-                    <a:p>
-                      <a:pPr marL="0" marR="0" lvl="0" indent="0" algn="ctr" defTabSz="914400" rtl="0" eaLnBrk="1" fontAlgn="ctr" latinLnBrk="0" hangingPunct="1">
-                        <a:lnSpc>
-                          <a:spcPct val="100000"/>
-                        </a:lnSpc>
-                        <a:spcBef>
-                          <a:spcPts val="0"/>
-                        </a:spcBef>
-                        <a:spcAft>
-                          <a:spcPts val="0"/>
-                        </a:spcAft>
-                        <a:buClrTx/>
-                        <a:buSzTx/>
-                        <a:buFontTx/>
-                        <a:buNone/>
-                        <a:tabLst/>
-                        <a:defRPr/>
-                      </a:pPr>
-                      <a:r>
-                        <a:rPr lang="en-US" sz="800" b="1" i="0" u="none" strike="noStrike" dirty="0">
-                          <a:solidFill>
-                            <a:srgbClr val="000000"/>
-                          </a:solidFill>
-                          <a:effectLst/>
-                          <a:latin typeface="Arial" panose="020B0604020202020204" pitchFamily="34" charset="0"/>
-                          <a:cs typeface="Arial" panose="020B0604020202020204" pitchFamily="34" charset="0"/>
+                          <a:latin typeface="Segoe UI" panose="020B0604020202020204" pitchFamily="34" charset="0"/>
+                          <a:cs typeface="Segoe UI" panose="020B0604020202020204" pitchFamily="34" charset="0"/>
                         </a:rPr>
                         <a:t>Blocked</a:t>
                       </a:r>
@@ -7900,7 +7823,7 @@
                       <a:tailEnd type="none" w="med" len="med"/>
                     </a:lnB>
                     <a:solidFill>
-                      <a:srgbClr val="D9E2F3"/>
+                      <a:schemeClr val="accent1"/>
                     </a:solidFill>
                   </a:tcPr>
                 </a:tc>
@@ -7916,16 +7839,19 @@
                     <a:bodyPr/>
                     <a:lstStyle/>
                     <a:p>
-                      <a:pPr algn="l" rtl="0" fontAlgn="ctr"/>
+                      <a:pPr>
+                        <a:defRPr sz="800">
+                          <a:latin typeface="Segoe UI"/>
+                        </a:defRPr>
+                      </a:pPr>
                       <a:r>
-                        <a:rPr lang="en-US" sz="800" b="0" i="0" u="none" strike="noStrike" dirty="0">
+                        <a:rPr sz="800" b="0">
                           <a:solidFill>
                             <a:srgbClr val="000000"/>
                           </a:solidFill>
-                          <a:effectLst/>
-                          <a:latin typeface="Arial" panose="020B0604020202020204" pitchFamily="34" charset="0"/>
+                          <a:latin typeface="Segoe UI"/>
                         </a:rPr>
-                        <a:t>Integration progression 51.2</a:t>
+                        <a:t>Integration progression 53.2</a:t>
                       </a:r>
                     </a:p>
                   </a:txBody>
@@ -7973,16 +7899,19 @@
                     <a:bodyPr/>
                     <a:lstStyle/>
                     <a:p>
-                      <a:pPr algn="ctr" rtl="0" fontAlgn="ctr"/>
+                      <a:pPr>
+                        <a:defRPr sz="800">
+                          <a:latin typeface="Segoe UI"/>
+                        </a:defRPr>
+                      </a:pPr>
                       <a:r>
-                        <a:rPr lang="en-US" sz="800" b="0" i="0" u="none" strike="noStrike" dirty="0">
+                        <a:rPr sz="800" b="1">
                           <a:solidFill>
                             <a:srgbClr val="000000"/>
                           </a:solidFill>
-                          <a:effectLst/>
-                          <a:latin typeface="Arial" panose="020B0604020202020204" pitchFamily="34" charset="0"/>
+                          <a:latin typeface="Segoe UI"/>
                         </a:rPr>
-                        <a:t>215</a:t>
+                        <a:t>-</a:t>
                       </a:r>
                     </a:p>
                   </a:txBody>
@@ -8030,16 +7959,19 @@
                     <a:bodyPr/>
                     <a:lstStyle/>
                     <a:p>
-                      <a:pPr algn="ctr" rtl="0" fontAlgn="ctr"/>
+                      <a:pPr>
+                        <a:defRPr sz="800">
+                          <a:latin typeface="Segoe UI"/>
+                        </a:defRPr>
+                      </a:pPr>
                       <a:r>
-                        <a:rPr lang="en-US" sz="800" b="0" i="0" u="none" strike="noStrike" dirty="0">
+                        <a:rPr sz="800" b="0">
                           <a:solidFill>
                             <a:srgbClr val="000000"/>
                           </a:solidFill>
-                          <a:effectLst/>
-                          <a:latin typeface="Arial" panose="020B0604020202020204" pitchFamily="34" charset="0"/>
+                          <a:latin typeface="Segoe UI"/>
                         </a:rPr>
-                        <a:t>107</a:t>
+                        <a:t>-</a:t>
                       </a:r>
                     </a:p>
                   </a:txBody>
@@ -8087,16 +8019,19 @@
                     <a:bodyPr/>
                     <a:lstStyle/>
                     <a:p>
-                      <a:pPr algn="ctr" rtl="0" fontAlgn="ctr"/>
+                      <a:pPr>
+                        <a:defRPr sz="800">
+                          <a:latin typeface="Segoe UI"/>
+                        </a:defRPr>
+                      </a:pPr>
                       <a:r>
-                        <a:rPr lang="en-US" sz="800" b="0" i="0" u="none" strike="noStrike" dirty="0">
+                        <a:rPr sz="800" b="0">
                           <a:solidFill>
                             <a:srgbClr val="000000"/>
                           </a:solidFill>
-                          <a:effectLst/>
-                          <a:latin typeface="Arial" panose="020B0604020202020204" pitchFamily="34" charset="0"/>
+                          <a:latin typeface="Segoe UI"/>
                         </a:rPr>
-                        <a:t>12</a:t>
+                        <a:t>-</a:t>
                       </a:r>
                     </a:p>
                   </a:txBody>
@@ -8144,32 +8079,19 @@
                     <a:bodyPr/>
                     <a:lstStyle/>
                     <a:p>
-                      <a:pPr marL="0" marR="0" lvl="0" indent="0" algn="ctr" defTabSz="914400" rtl="0" eaLnBrk="1" fontAlgn="ctr" latinLnBrk="0" hangingPunct="1">
-                        <a:lnSpc>
-                          <a:spcPct val="100000"/>
-                        </a:lnSpc>
-                        <a:spcBef>
-                          <a:spcPts val="0"/>
-                        </a:spcBef>
-                        <a:spcAft>
-                          <a:spcPts val="0"/>
-                        </a:spcAft>
-                        <a:buClrTx/>
-                        <a:buSzTx/>
-                        <a:buFontTx/>
-                        <a:buNone/>
-                        <a:tabLst/>
-                        <a:defRPr/>
+                      <a:pPr>
+                        <a:defRPr sz="800">
+                          <a:latin typeface="Segoe UI"/>
+                        </a:defRPr>
                       </a:pPr>
                       <a:r>
-                        <a:rPr lang="en-US" sz="800" b="0" i="0" u="none" strike="noStrike" dirty="0">
+                        <a:rPr sz="800" b="0">
                           <a:solidFill>
                             <a:srgbClr val="000000"/>
                           </a:solidFill>
-                          <a:effectLst/>
-                          <a:latin typeface="Arial" panose="020B0604020202020204" pitchFamily="34" charset="0"/>
+                          <a:latin typeface="Segoe UI"/>
                         </a:rPr>
-                        <a:t>12</a:t>
+                        <a:t>-</a:t>
                       </a:r>
                     </a:p>
                   </a:txBody>
@@ -8217,16 +8139,19 @@
                     <a:bodyPr/>
                     <a:lstStyle/>
                     <a:p>
-                      <a:pPr algn="ctr" rtl="0" fontAlgn="ctr"/>
+                      <a:pPr>
+                        <a:defRPr sz="800">
+                          <a:latin typeface="Segoe UI"/>
+                        </a:defRPr>
+                      </a:pPr>
                       <a:r>
-                        <a:rPr lang="en-US" sz="800" b="0" i="0" u="none" strike="noStrike" dirty="0">
+                        <a:rPr sz="800" b="0">
                           <a:solidFill>
                             <a:srgbClr val="000000"/>
                           </a:solidFill>
-                          <a:effectLst/>
-                          <a:latin typeface="Arial" panose="020B0604020202020204" pitchFamily="34" charset="0"/>
+                          <a:latin typeface="Segoe UI"/>
                         </a:rPr>
-                        <a:t>48</a:t>
+                        <a:t>-</a:t>
                       </a:r>
                     </a:p>
                   </a:txBody>
@@ -8274,18 +8199,19 @@
                     <a:bodyPr/>
                     <a:lstStyle/>
                     <a:p>
-                      <a:pPr marL="0" algn="ctr" defTabSz="914400" rtl="0" eaLnBrk="1" fontAlgn="ctr" latinLnBrk="0" hangingPunct="1"/>
+                      <a:pPr>
+                        <a:defRPr sz="800">
+                          <a:latin typeface="Segoe UI"/>
+                        </a:defRPr>
+                      </a:pPr>
                       <a:r>
-                        <a:rPr lang="en-US" sz="800" b="0" i="0" u="none" strike="noStrike" kern="1200" dirty="0">
+                        <a:rPr sz="800" b="0">
                           <a:solidFill>
                             <a:srgbClr val="000000"/>
                           </a:solidFill>
-                          <a:effectLst/>
-                          <a:latin typeface="Arial" panose="020B0604020202020204" pitchFamily="34" charset="0"/>
-                          <a:ea typeface="+mn-ea"/>
-                          <a:cs typeface="+mn-cs"/>
+                          <a:latin typeface="Segoe UI"/>
                         </a:rPr>
-                        <a:t>11</a:t>
+                        <a:t>-</a:t>
                       </a:r>
                     </a:p>
                   </a:txBody>
@@ -8333,32 +8259,19 @@
                     <a:bodyPr/>
                     <a:lstStyle/>
                     <a:p>
-                      <a:pPr marL="0" marR="0" lvl="0" indent="0" algn="ctr" defTabSz="914400" rtl="0" eaLnBrk="1" fontAlgn="ctr" latinLnBrk="0" hangingPunct="1">
-                        <a:lnSpc>
-                          <a:spcPct val="100000"/>
-                        </a:lnSpc>
-                        <a:spcBef>
-                          <a:spcPts val="0"/>
-                        </a:spcBef>
-                        <a:spcAft>
-                          <a:spcPts val="0"/>
-                        </a:spcAft>
-                        <a:buClrTx/>
-                        <a:buSzTx/>
-                        <a:buFontTx/>
-                        <a:buNone/>
-                        <a:tabLst/>
-                        <a:defRPr/>
+                      <a:pPr>
+                        <a:defRPr sz="800">
+                          <a:latin typeface="Segoe UI"/>
+                        </a:defRPr>
                       </a:pPr>
                       <a:r>
-                        <a:rPr lang="en-US" sz="800" b="0" i="0" u="none" strike="noStrike" dirty="0">
+                        <a:rPr sz="800" b="0">
                           <a:solidFill>
                             <a:srgbClr val="000000"/>
                           </a:solidFill>
-                          <a:effectLst/>
-                          <a:latin typeface="Arial" panose="020B0604020202020204" pitchFamily="34" charset="0"/>
+                          <a:latin typeface="Segoe UI"/>
                         </a:rPr>
-                        <a:t>25</a:t>
+                        <a:t>-</a:t>
                       </a:r>
                     </a:p>
                   </a:txBody>
@@ -8413,16 +8326,19 @@
                     <a:bodyPr/>
                     <a:lstStyle/>
                     <a:p>
-                      <a:pPr algn="l" rtl="0" fontAlgn="ctr"/>
+                      <a:pPr>
+                        <a:defRPr sz="800">
+                          <a:latin typeface="Segoe UI"/>
+                        </a:defRPr>
+                      </a:pPr>
                       <a:r>
-                        <a:rPr lang="en-US" sz="800" b="0" i="0" u="none" strike="noStrike" dirty="0">
+                        <a:rPr sz="800" b="0">
                           <a:solidFill>
                             <a:srgbClr val="000000"/>
                           </a:solidFill>
-                          <a:effectLst/>
-                          <a:latin typeface="Arial" panose="020B0604020202020204" pitchFamily="34" charset="0"/>
+                          <a:latin typeface="Segoe UI"/>
                         </a:rPr>
-                        <a:t>Integration Regression 51.2</a:t>
+                        <a:t>Integration Regression 53.2</a:t>
                       </a:r>
                     </a:p>
                   </a:txBody>
@@ -8470,16 +8386,19 @@
                     <a:bodyPr/>
                     <a:lstStyle/>
                     <a:p>
-                      <a:pPr algn="ctr" rtl="0" fontAlgn="ctr"/>
+                      <a:pPr>
+                        <a:defRPr sz="800">
+                          <a:latin typeface="Segoe UI"/>
+                        </a:defRPr>
+                      </a:pPr>
                       <a:r>
-                        <a:rPr lang="en-US" sz="800" b="0" i="0" u="none" strike="noStrike" dirty="0">
+                        <a:rPr sz="800" b="1">
                           <a:solidFill>
                             <a:srgbClr val="000000"/>
                           </a:solidFill>
-                          <a:effectLst/>
-                          <a:latin typeface="Arial" panose="020B0604020202020204" pitchFamily="34" charset="0"/>
+                          <a:latin typeface="Segoe UI"/>
                         </a:rPr>
-                        <a:t>27</a:t>
+                        <a:t>-</a:t>
                       </a:r>
                     </a:p>
                   </a:txBody>
@@ -8527,16 +8446,19 @@
                     <a:bodyPr/>
                     <a:lstStyle/>
                     <a:p>
-                      <a:pPr algn="ctr" rtl="0" fontAlgn="ctr"/>
+                      <a:pPr>
+                        <a:defRPr sz="800">
+                          <a:latin typeface="Segoe UI"/>
+                        </a:defRPr>
+                      </a:pPr>
                       <a:r>
-                        <a:rPr lang="en-US" sz="800" b="0" i="0" u="none" strike="noStrike" dirty="0">
+                        <a:rPr sz="800" b="0">
                           <a:solidFill>
                             <a:srgbClr val="000000"/>
                           </a:solidFill>
-                          <a:effectLst/>
-                          <a:latin typeface="Arial" panose="020B0604020202020204" pitchFamily="34" charset="0"/>
+                          <a:latin typeface="Segoe UI"/>
                         </a:rPr>
-                        <a:t>14</a:t>
+                        <a:t>-</a:t>
                       </a:r>
                     </a:p>
                   </a:txBody>
@@ -8584,16 +8506,19 @@
                     <a:bodyPr/>
                     <a:lstStyle/>
                     <a:p>
-                      <a:pPr algn="ctr" rtl="0" fontAlgn="ctr"/>
+                      <a:pPr>
+                        <a:defRPr sz="800">
+                          <a:latin typeface="Segoe UI"/>
+                        </a:defRPr>
+                      </a:pPr>
                       <a:r>
-                        <a:rPr lang="en-US" sz="800" b="0" i="0" u="none" strike="noStrike" dirty="0">
+                        <a:rPr sz="800" b="0">
                           <a:solidFill>
                             <a:srgbClr val="000000"/>
                           </a:solidFill>
-                          <a:effectLst/>
-                          <a:latin typeface="Arial" panose="020B0604020202020204" pitchFamily="34" charset="0"/>
+                          <a:latin typeface="Segoe UI"/>
                         </a:rPr>
-                        <a:t>0</a:t>
+                        <a:t>-</a:t>
                       </a:r>
                     </a:p>
                   </a:txBody>
@@ -8641,32 +8566,19 @@
                     <a:bodyPr/>
                     <a:lstStyle/>
                     <a:p>
-                      <a:pPr marL="0" marR="0" lvl="0" indent="0" algn="ctr" defTabSz="914400" rtl="0" eaLnBrk="1" fontAlgn="ctr" latinLnBrk="0" hangingPunct="1">
-                        <a:lnSpc>
-                          <a:spcPct val="100000"/>
-                        </a:lnSpc>
-                        <a:spcBef>
-                          <a:spcPts val="0"/>
-                        </a:spcBef>
-                        <a:spcAft>
-                          <a:spcPts val="0"/>
-                        </a:spcAft>
-                        <a:buClrTx/>
-                        <a:buSzTx/>
-                        <a:buFontTx/>
-                        <a:buNone/>
-                        <a:tabLst/>
-                        <a:defRPr/>
+                      <a:pPr>
+                        <a:defRPr sz="800">
+                          <a:latin typeface="Segoe UI"/>
+                        </a:defRPr>
                       </a:pPr>
                       <a:r>
-                        <a:rPr lang="en-US" sz="800" b="0" i="0" u="none" strike="noStrike" dirty="0">
+                        <a:rPr sz="800" b="0">
                           <a:solidFill>
                             <a:srgbClr val="000000"/>
                           </a:solidFill>
-                          <a:effectLst/>
-                          <a:latin typeface="Arial" panose="020B0604020202020204" pitchFamily="34" charset="0"/>
+                          <a:latin typeface="Segoe UI"/>
                         </a:rPr>
-                        <a:t>13</a:t>
+                        <a:t>-</a:t>
                       </a:r>
                     </a:p>
                   </a:txBody>
@@ -8714,16 +8626,19 @@
                     <a:bodyPr/>
                     <a:lstStyle/>
                     <a:p>
-                      <a:pPr algn="ctr" rtl="0" fontAlgn="ctr"/>
+                      <a:pPr>
+                        <a:defRPr sz="800">
+                          <a:latin typeface="Segoe UI"/>
+                        </a:defRPr>
+                      </a:pPr>
                       <a:r>
-                        <a:rPr lang="en-US" sz="800" b="0" i="0" u="none" strike="noStrike" dirty="0">
+                        <a:rPr sz="800" b="0">
                           <a:solidFill>
                             <a:srgbClr val="000000"/>
                           </a:solidFill>
-                          <a:effectLst/>
-                          <a:latin typeface="Arial" panose="020B0604020202020204" pitchFamily="34" charset="0"/>
+                          <a:latin typeface="Segoe UI"/>
                         </a:rPr>
-                        <a:t>0</a:t>
+                        <a:t>-</a:t>
                       </a:r>
                     </a:p>
                   </a:txBody>
@@ -8771,14 +8686,20 @@
                     <a:bodyPr/>
                     <a:lstStyle/>
                     <a:p>
-                      <a:pPr algn="ctr" rtl="0" fontAlgn="ctr"/>
-                      <a:endParaRPr lang="en-US" sz="800" b="0" i="0" u="none" strike="noStrike" dirty="0">
-                        <a:solidFill>
-                          <a:srgbClr val="000000"/>
-                        </a:solidFill>
-                        <a:effectLst/>
-                        <a:latin typeface="Arial" panose="020B0604020202020204" pitchFamily="34" charset="0"/>
-                      </a:endParaRPr>
+                      <a:pPr>
+                        <a:defRPr sz="800">
+                          <a:latin typeface="Segoe UI"/>
+                        </a:defRPr>
+                      </a:pPr>
+                      <a:r>
+                        <a:rPr sz="800" b="0">
+                          <a:solidFill>
+                            <a:srgbClr val="000000"/>
+                          </a:solidFill>
+                          <a:latin typeface="Segoe UI"/>
+                        </a:rPr>
+                        <a:t>-</a:t>
+                      </a:r>
                     </a:p>
                   </a:txBody>
                   <a:tcPr marL="9525" marR="9525" marT="9525" marB="0" anchor="ctr">
@@ -8825,32 +8746,19 @@
                     <a:bodyPr/>
                     <a:lstStyle/>
                     <a:p>
-                      <a:pPr marL="0" marR="0" lvl="0" indent="0" algn="ctr" defTabSz="914400" rtl="0" eaLnBrk="1" fontAlgn="ctr" latinLnBrk="0" hangingPunct="1">
-                        <a:lnSpc>
-                          <a:spcPct val="100000"/>
-                        </a:lnSpc>
-                        <a:spcBef>
-                          <a:spcPts val="0"/>
-                        </a:spcBef>
-                        <a:spcAft>
-                          <a:spcPts val="0"/>
-                        </a:spcAft>
-                        <a:buClrTx/>
-                        <a:buSzTx/>
-                        <a:buFontTx/>
-                        <a:buNone/>
-                        <a:tabLst/>
-                        <a:defRPr/>
+                      <a:pPr>
+                        <a:defRPr sz="800">
+                          <a:latin typeface="Segoe UI"/>
+                        </a:defRPr>
                       </a:pPr>
                       <a:r>
-                        <a:rPr lang="en-US" sz="800" b="0" i="0" u="none" strike="noStrike" dirty="0">
+                        <a:rPr sz="800" b="0">
                           <a:solidFill>
                             <a:srgbClr val="000000"/>
                           </a:solidFill>
-                          <a:effectLst/>
-                          <a:latin typeface="Arial" panose="020B0604020202020204" pitchFamily="34" charset="0"/>
+                          <a:latin typeface="Segoe UI"/>
                         </a:rPr>
-                        <a:t>0</a:t>
+                        <a:t>-</a:t>
                       </a:r>
                     </a:p>
                   </a:txBody>
@@ -8905,16 +8813,19 @@
                     <a:bodyPr/>
                     <a:lstStyle/>
                     <a:p>
-                      <a:pPr algn="l" rtl="0" fontAlgn="ctr"/>
+                      <a:pPr>
+                        <a:defRPr sz="800">
+                          <a:latin typeface="Segoe UI"/>
+                        </a:defRPr>
+                      </a:pPr>
                       <a:r>
-                        <a:rPr lang="en-US" sz="800" b="0" i="0" u="none" strike="noStrike" dirty="0">
+                        <a:rPr sz="800" b="0" dirty="0">
                           <a:solidFill>
                             <a:srgbClr val="000000"/>
                           </a:solidFill>
-                          <a:effectLst/>
-                          <a:latin typeface="Arial" panose="020B0604020202020204" pitchFamily="34" charset="0"/>
+                          <a:latin typeface="Segoe UI"/>
                         </a:rPr>
-                        <a:t>Prod defects 50.X</a:t>
+                        <a:t>Prod defects 53.X</a:t>
                       </a:r>
                     </a:p>
                   </a:txBody>
@@ -8962,14 +8873,17 @@
                     <a:bodyPr/>
                     <a:lstStyle/>
                     <a:p>
-                      <a:pPr algn="ctr" rtl="0" fontAlgn="ctr"/>
+                      <a:pPr>
+                        <a:defRPr sz="800">
+                          <a:latin typeface="Segoe UI"/>
+                        </a:defRPr>
+                      </a:pPr>
                       <a:r>
-                        <a:rPr lang="en-US" sz="800" b="0" i="0" u="none" strike="noStrike" dirty="0">
+                        <a:rPr sz="800" b="0" dirty="0">
                           <a:solidFill>
                             <a:srgbClr val="000000"/>
                           </a:solidFill>
-                          <a:effectLst/>
-                          <a:latin typeface="Arial" panose="020B0604020202020204" pitchFamily="34" charset="0"/>
+                          <a:latin typeface="Segoe UI"/>
                         </a:rPr>
                         <a:t>-</a:t>
                       </a:r>
@@ -9019,14 +8933,17 @@
                     <a:bodyPr/>
                     <a:lstStyle/>
                     <a:p>
-                      <a:pPr algn="ctr" rtl="0" fontAlgn="ctr"/>
+                      <a:pPr>
+                        <a:defRPr sz="800">
+                          <a:latin typeface="Segoe UI"/>
+                        </a:defRPr>
+                      </a:pPr>
                       <a:r>
-                        <a:rPr lang="en-US" sz="800" b="0" i="0" u="none" strike="noStrike" dirty="0">
+                        <a:rPr sz="800" b="0">
                           <a:solidFill>
                             <a:srgbClr val="000000"/>
                           </a:solidFill>
-                          <a:effectLst/>
-                          <a:latin typeface="Arial" panose="020B0604020202020204" pitchFamily="34" charset="0"/>
+                          <a:latin typeface="Segoe UI"/>
                         </a:rPr>
                         <a:t>-</a:t>
                       </a:r>
@@ -9076,40 +8993,20 @@
                     <a:bodyPr/>
                     <a:lstStyle/>
                     <a:p>
-                      <a:pPr marL="0" marR="0" lvl="0" indent="0" algn="ctr" defTabSz="914400" rtl="0" eaLnBrk="1" fontAlgn="ctr" latinLnBrk="0" hangingPunct="1">
-                        <a:lnSpc>
-                          <a:spcPct val="100000"/>
-                        </a:lnSpc>
-                        <a:spcBef>
-                          <a:spcPts val="0"/>
-                        </a:spcBef>
-                        <a:spcAft>
-                          <a:spcPts val="0"/>
-                        </a:spcAft>
-                        <a:buClrTx/>
-                        <a:buSzTx/>
-                        <a:buFontTx/>
-                        <a:buNone/>
-                        <a:tabLst/>
-                        <a:defRPr/>
+                      <a:pPr>
+                        <a:defRPr sz="800">
+                          <a:latin typeface="Segoe UI"/>
+                        </a:defRPr>
                       </a:pPr>
                       <a:r>
-                        <a:rPr lang="en-US" sz="1800" b="0" i="0" u="none" strike="noStrike" dirty="0">
+                        <a:rPr sz="800" b="0">
                           <a:solidFill>
                             <a:srgbClr val="000000"/>
                           </a:solidFill>
-                          <a:effectLst/>
-                          <a:latin typeface="Arial" panose="020B0604020202020204" pitchFamily="34" charset="0"/>
+                          <a:latin typeface="Segoe UI"/>
                         </a:rPr>
                         <a:t>-</a:t>
                       </a:r>
-                      <a:endParaRPr lang="en-US" sz="800" b="0" i="0" u="none" strike="noStrike" dirty="0">
-                        <a:solidFill>
-                          <a:srgbClr val="000000"/>
-                        </a:solidFill>
-                        <a:effectLst/>
-                        <a:latin typeface="Arial" panose="020B0604020202020204" pitchFamily="34" charset="0"/>
-                      </a:endParaRPr>
                     </a:p>
                   </a:txBody>
                   <a:tcPr marL="9525" marR="9525" marT="9525" marB="0" anchor="ctr">
@@ -9156,30 +9053,17 @@
                     <a:bodyPr/>
                     <a:lstStyle/>
                     <a:p>
-                      <a:pPr marL="0" marR="0" lvl="0" indent="0" algn="ctr" defTabSz="914400" rtl="0" eaLnBrk="1" fontAlgn="ctr" latinLnBrk="0" hangingPunct="1">
-                        <a:lnSpc>
-                          <a:spcPct val="100000"/>
-                        </a:lnSpc>
-                        <a:spcBef>
-                          <a:spcPts val="0"/>
-                        </a:spcBef>
-                        <a:spcAft>
-                          <a:spcPts val="0"/>
-                        </a:spcAft>
-                        <a:buClrTx/>
-                        <a:buSzTx/>
-                        <a:buFontTx/>
-                        <a:buNone/>
-                        <a:tabLst/>
-                        <a:defRPr/>
+                      <a:pPr>
+                        <a:defRPr sz="800">
+                          <a:latin typeface="Segoe UI"/>
+                        </a:defRPr>
                       </a:pPr>
                       <a:r>
-                        <a:rPr lang="en-US" sz="800" b="0" i="0" u="none" strike="noStrike" dirty="0">
+                        <a:rPr sz="800" b="0">
                           <a:solidFill>
                             <a:srgbClr val="000000"/>
                           </a:solidFill>
-                          <a:effectLst/>
-                          <a:latin typeface="Arial" panose="020B0604020202020204" pitchFamily="34" charset="0"/>
+                          <a:latin typeface="Segoe UI"/>
                         </a:rPr>
                         <a:t>-</a:t>
                       </a:r>
@@ -9229,14 +9113,17 @@
                     <a:bodyPr/>
                     <a:lstStyle/>
                     <a:p>
-                      <a:pPr algn="ctr" rtl="0" fontAlgn="ctr"/>
+                      <a:pPr>
+                        <a:defRPr sz="800">
+                          <a:latin typeface="Segoe UI"/>
+                        </a:defRPr>
+                      </a:pPr>
                       <a:r>
-                        <a:rPr lang="en-US" sz="800" b="0" i="0" u="none" strike="noStrike" dirty="0">
+                        <a:rPr sz="800" b="0">
                           <a:solidFill>
                             <a:srgbClr val="000000"/>
                           </a:solidFill>
-                          <a:effectLst/>
-                          <a:latin typeface="Arial" panose="020B0604020202020204" pitchFamily="34" charset="0"/>
+                          <a:latin typeface="Segoe UI"/>
                         </a:rPr>
                         <a:t>-</a:t>
                       </a:r>
@@ -9286,14 +9173,20 @@
                     <a:bodyPr/>
                     <a:lstStyle/>
                     <a:p>
-                      <a:pPr algn="ctr" rtl="0" fontAlgn="ctr"/>
-                      <a:endParaRPr lang="en-US" sz="800" b="0" i="0" u="none" strike="noStrike" dirty="0">
-                        <a:solidFill>
-                          <a:srgbClr val="000000"/>
-                        </a:solidFill>
-                        <a:effectLst/>
-                        <a:latin typeface="Arial" panose="020B0604020202020204" pitchFamily="34" charset="0"/>
-                      </a:endParaRPr>
+                      <a:pPr>
+                        <a:defRPr sz="800">
+                          <a:latin typeface="Segoe UI"/>
+                        </a:defRPr>
+                      </a:pPr>
+                      <a:r>
+                        <a:rPr sz="800" b="0">
+                          <a:solidFill>
+                            <a:srgbClr val="000000"/>
+                          </a:solidFill>
+                          <a:latin typeface="Segoe UI"/>
+                        </a:rPr>
+                        <a:t>-</a:t>
+                      </a:r>
                     </a:p>
                   </a:txBody>
                   <a:tcPr marL="9525" marR="9525" marT="9525" marB="0" anchor="ctr">
@@ -9340,42 +9233,19 @@
                     <a:bodyPr/>
                     <a:lstStyle/>
                     <a:p>
-                      <a:pPr marL="0" marR="0" lvl="0" indent="0" algn="ctr" defTabSz="914400" rtl="0" eaLnBrk="1" fontAlgn="ctr" latinLnBrk="0" hangingPunct="1">
-                        <a:lnSpc>
-                          <a:spcPct val="100000"/>
-                        </a:lnSpc>
-                        <a:spcBef>
-                          <a:spcPts val="0"/>
-                        </a:spcBef>
-                        <a:spcAft>
-                          <a:spcPts val="0"/>
-                        </a:spcAft>
-                        <a:buClrTx/>
-                        <a:buSzTx/>
-                        <a:buFontTx/>
-                        <a:buNone/>
-                        <a:tabLst/>
-                        <a:defRPr/>
+                      <a:pPr>
+                        <a:defRPr sz="800">
+                          <a:latin typeface="Segoe UI"/>
+                        </a:defRPr>
                       </a:pPr>
                       <a:r>
-                        <a:rPr lang="en-US" sz="1800" b="0" i="0" u="none" strike="noStrike" dirty="0">
+                        <a:rPr sz="800" b="0" dirty="0">
                           <a:solidFill>
                             <a:srgbClr val="000000"/>
                           </a:solidFill>
-                          <a:effectLst/>
-                          <a:latin typeface="Arial" panose="020B0604020202020204" pitchFamily="34" charset="0"/>
+                          <a:latin typeface="Segoe UI"/>
                         </a:rPr>
-                        <a:t> </a:t>
-                      </a:r>
-                      <a:r>
-                        <a:rPr lang="en-US" sz="800" b="0" i="0" u="none" strike="noStrike" dirty="0">
-                          <a:solidFill>
-                            <a:srgbClr val="000000"/>
-                          </a:solidFill>
-                          <a:effectLst/>
-                          <a:latin typeface="Arial" panose="020B0604020202020204" pitchFamily="34" charset="0"/>
-                        </a:rPr>
-                        <a:t>0 </a:t>
+                        <a:t>-</a:t>
                       </a:r>
                     </a:p>
                   </a:txBody>
@@ -9429,11 +9299,6 @@
         </a:graphic>
       </p:graphicFrame>
     </p:spTree>
-    <p:extLst>
-      <p:ext uri="{BB962C8B-B14F-4D97-AF65-F5344CB8AC3E}">
-        <p14:creationId xmlns:p14="http://schemas.microsoft.com/office/powerpoint/2010/main" val="2752804033"/>
-      </p:ext>
-    </p:extLst>
   </p:cSld>
   <p:clrMapOvr>
     <a:masterClrMapping/>
@@ -9442,7 +9307,7 @@
 </file>
 
 <file path=ppt/theme/theme1.xml><?xml version="1.0" encoding="utf-8"?>
-<a:theme xmlns:a="http://schemas.openxmlformats.org/drawingml/2006/main" name="Office Theme">
+<a:theme xmlns:a="http://schemas.openxmlformats.org/drawingml/2006/main" name="1_Office Theme">
   <a:themeElements>
     <a:clrScheme name="Office">
       <a:dk1>
@@ -9452,44 +9317,44 @@
         <a:sysClr val="window" lastClr="FFFFFF"/>
       </a:lt1>
       <a:dk2>
-        <a:srgbClr val="0E2841"/>
+        <a:srgbClr val="1F497D"/>
       </a:dk2>
       <a:lt2>
-        <a:srgbClr val="E8E8E8"/>
+        <a:srgbClr val="EEECE1"/>
       </a:lt2>
       <a:accent1>
-        <a:srgbClr val="156082"/>
+        <a:srgbClr val="4F81BD"/>
       </a:accent1>
       <a:accent2>
-        <a:srgbClr val="E97132"/>
+        <a:srgbClr val="C0504D"/>
       </a:accent2>
       <a:accent3>
-        <a:srgbClr val="196B24"/>
+        <a:srgbClr val="9BBB59"/>
       </a:accent3>
       <a:accent4>
-        <a:srgbClr val="0F9ED5"/>
+        <a:srgbClr val="8064A2"/>
       </a:accent4>
       <a:accent5>
-        <a:srgbClr val="A02B93"/>
+        <a:srgbClr val="4BACC6"/>
       </a:accent5>
       <a:accent6>
-        <a:srgbClr val="4EA72E"/>
+        <a:srgbClr val="F79646"/>
       </a:accent6>
       <a:hlink>
-        <a:srgbClr val="467886"/>
+        <a:srgbClr val="0000FF"/>
       </a:hlink>
       <a:folHlink>
-        <a:srgbClr val="96607D"/>
+        <a:srgbClr val="800080"/>
       </a:folHlink>
     </a:clrScheme>
     <a:fontScheme name="Office">
       <a:majorFont>
-        <a:latin typeface="Aptos Display" panose="02110004020202020204"/>
+        <a:latin typeface="Calibri"/>
         <a:ea typeface=""/>
         <a:cs typeface=""/>
-        <a:font script="Jpan" typeface="游ゴシック Light"/>
+        <a:font script="Jpan" typeface="ＭＳ Ｐゴシック"/>
         <a:font script="Hang" typeface="맑은 고딕"/>
-        <a:font script="Hans" typeface="等线 Light"/>
+        <a:font script="Hans" typeface="宋体"/>
         <a:font script="Hant" typeface="新細明體"/>
         <a:font script="Arab" typeface="Times New Roman"/>
         <a:font script="Hebr" typeface="Times New Roman"/>
@@ -9517,31 +9382,14 @@
         <a:font script="Viet" typeface="Times New Roman"/>
         <a:font script="Uigh" typeface="Microsoft Uighur"/>
         <a:font script="Geor" typeface="Sylfaen"/>
-        <a:font script="Armn" typeface="Arial"/>
-        <a:font script="Bugi" typeface="Leelawadee UI"/>
-        <a:font script="Bopo" typeface="Microsoft JhengHei"/>
-        <a:font script="Java" typeface="Javanese Text"/>
-        <a:font script="Lisu" typeface="Segoe UI"/>
-        <a:font script="Mymr" typeface="Myanmar Text"/>
-        <a:font script="Nkoo" typeface="Ebrima"/>
-        <a:font script="Olck" typeface="Nirmala UI"/>
-        <a:font script="Osma" typeface="Ebrima"/>
-        <a:font script="Phag" typeface="Phagspa"/>
-        <a:font script="Syrn" typeface="Estrangelo Edessa"/>
-        <a:font script="Syrj" typeface="Estrangelo Edessa"/>
-        <a:font script="Syre" typeface="Estrangelo Edessa"/>
-        <a:font script="Sora" typeface="Nirmala UI"/>
-        <a:font script="Tale" typeface="Microsoft Tai Le"/>
-        <a:font script="Talu" typeface="Microsoft New Tai Lue"/>
-        <a:font script="Tfng" typeface="Ebrima"/>
       </a:majorFont>
       <a:minorFont>
-        <a:latin typeface="Aptos" panose="02110004020202020204"/>
+        <a:latin typeface="Calibri"/>
         <a:ea typeface=""/>
         <a:cs typeface=""/>
-        <a:font script="Jpan" typeface="游ゴシック"/>
+        <a:font script="Jpan" typeface="ＭＳ Ｐゴシック"/>
         <a:font script="Hang" typeface="맑은 고딕"/>
-        <a:font script="Hans" typeface="等线"/>
+        <a:font script="Hans" typeface="宋体"/>
         <a:font script="Hant" typeface="新細明體"/>
         <a:font script="Arab" typeface="Arial"/>
         <a:font script="Hebr" typeface="Arial"/>
@@ -9569,23 +9417,6 @@
         <a:font script="Viet" typeface="Arial"/>
         <a:font script="Uigh" typeface="Microsoft Uighur"/>
         <a:font script="Geor" typeface="Sylfaen"/>
-        <a:font script="Armn" typeface="Arial"/>
-        <a:font script="Bugi" typeface="Leelawadee UI"/>
-        <a:font script="Bopo" typeface="Microsoft JhengHei"/>
-        <a:font script="Java" typeface="Javanese Text"/>
-        <a:font script="Lisu" typeface="Segoe UI"/>
-        <a:font script="Mymr" typeface="Myanmar Text"/>
-        <a:font script="Nkoo" typeface="Ebrima"/>
-        <a:font script="Olck" typeface="Nirmala UI"/>
-        <a:font script="Osma" typeface="Ebrima"/>
-        <a:font script="Phag" typeface="Phagspa"/>
-        <a:font script="Syrn" typeface="Estrangelo Edessa"/>
-        <a:font script="Syrj" typeface="Estrangelo Edessa"/>
-        <a:font script="Syre" typeface="Estrangelo Edessa"/>
-        <a:font script="Sora" typeface="Nirmala UI"/>
-        <a:font script="Tale" typeface="Microsoft Tai Le"/>
-        <a:font script="Talu" typeface="Microsoft New Tai Lue"/>
-        <a:font script="Tfng" typeface="Ebrima"/>
       </a:minorFont>
     </a:fontScheme>
     <a:fmtScheme name="Office">
@@ -9597,136 +9428,180 @@
           <a:gsLst>
             <a:gs pos="0">
               <a:schemeClr val="phClr">
-                <a:lumMod val="110000"/>
-                <a:satMod val="105000"/>
-                <a:tint val="67000"/>
+                <a:tint val="50000"/>
+                <a:satMod val="300000"/>
               </a:schemeClr>
             </a:gs>
-            <a:gs pos="50000">
+            <a:gs pos="35000">
               <a:schemeClr val="phClr">
-                <a:lumMod val="105000"/>
-                <a:satMod val="103000"/>
-                <a:tint val="73000"/>
+                <a:tint val="37000"/>
+                <a:satMod val="300000"/>
               </a:schemeClr>
             </a:gs>
             <a:gs pos="100000">
               <a:schemeClr val="phClr">
-                <a:lumMod val="105000"/>
-                <a:satMod val="109000"/>
-                <a:tint val="81000"/>
+                <a:tint val="15000"/>
+                <a:satMod val="350000"/>
               </a:schemeClr>
             </a:gs>
           </a:gsLst>
-          <a:lin ang="5400000" scaled="0"/>
+          <a:lin ang="16200000" scaled="1"/>
         </a:gradFill>
         <a:gradFill rotWithShape="1">
           <a:gsLst>
             <a:gs pos="0">
               <a:schemeClr val="phClr">
-                <a:satMod val="103000"/>
-                <a:lumMod val="102000"/>
-                <a:tint val="94000"/>
-              </a:schemeClr>
-            </a:gs>
-            <a:gs pos="50000">
-              <a:schemeClr val="phClr">
-                <a:satMod val="110000"/>
-                <a:lumMod val="100000"/>
+                <a:tint val="100000"/>
                 <a:shade val="100000"/>
+                <a:satMod val="130000"/>
               </a:schemeClr>
             </a:gs>
             <a:gs pos="100000">
               <a:schemeClr val="phClr">
-                <a:lumMod val="99000"/>
-                <a:satMod val="120000"/>
-                <a:shade val="78000"/>
+                <a:tint val="50000"/>
+                <a:shade val="100000"/>
+                <a:satMod val="350000"/>
               </a:schemeClr>
             </a:gs>
           </a:gsLst>
-          <a:lin ang="5400000" scaled="0"/>
+          <a:lin ang="16200000" scaled="0"/>
         </a:gradFill>
       </a:fillStyleLst>
       <a:lnStyleLst>
-        <a:ln w="12700" cap="flat" cmpd="sng" algn="ctr">
+        <a:ln w="9525" cap="flat" cmpd="sng" algn="ctr">
           <a:solidFill>
-            <a:schemeClr val="phClr"/>
+            <a:schemeClr val="phClr">
+              <a:shade val="95000"/>
+              <a:satMod val="105000"/>
+            </a:schemeClr>
           </a:solidFill>
           <a:prstDash val="solid"/>
-          <a:miter lim="800000"/>
-        </a:ln>
-        <a:ln w="19050" cap="flat" cmpd="sng" algn="ctr">
-          <a:solidFill>
-            <a:schemeClr val="phClr"/>
-          </a:solidFill>
-          <a:prstDash val="solid"/>
-          <a:miter lim="800000"/>
         </a:ln>
         <a:ln w="25400" cap="flat" cmpd="sng" algn="ctr">
           <a:solidFill>
             <a:schemeClr val="phClr"/>
           </a:solidFill>
           <a:prstDash val="solid"/>
-          <a:miter lim="800000"/>
+        </a:ln>
+        <a:ln w="38100" cap="flat" cmpd="sng" algn="ctr">
+          <a:solidFill>
+            <a:schemeClr val="phClr"/>
+          </a:solidFill>
+          <a:prstDash val="solid"/>
         </a:ln>
       </a:lnStyleLst>
       <a:effectStyleLst>
         <a:effectStyle>
-          <a:effectLst/>
-        </a:effectStyle>
-        <a:effectStyle>
-          <a:effectLst/>
+          <a:effectLst>
+            <a:outerShdw blurRad="40000" dist="20000" dir="5400000" rotWithShape="0">
+              <a:srgbClr val="000000">
+                <a:alpha val="38000"/>
+              </a:srgbClr>
+            </a:outerShdw>
+          </a:effectLst>
         </a:effectStyle>
         <a:effectStyle>
           <a:effectLst>
-            <a:outerShdw blurRad="57150" dist="19050" dir="5400000" algn="ctr" rotWithShape="0">
+            <a:outerShdw blurRad="40000" dist="23000" dir="5400000" rotWithShape="0">
               <a:srgbClr val="000000">
-                <a:alpha val="63000"/>
+                <a:alpha val="35000"/>
               </a:srgbClr>
             </a:outerShdw>
           </a:effectLst>
+        </a:effectStyle>
+        <a:effectStyle>
+          <a:effectLst>
+            <a:outerShdw blurRad="40000" dist="23000" dir="5400000" rotWithShape="0">
+              <a:srgbClr val="000000">
+                <a:alpha val="35000"/>
+              </a:srgbClr>
+            </a:outerShdw>
+          </a:effectLst>
+          <a:scene3d>
+            <a:camera prst="orthographicFront">
+              <a:rot lat="0" lon="0" rev="0"/>
+            </a:camera>
+            <a:lightRig rig="threePt" dir="t">
+              <a:rot lat="0" lon="0" rev="1200000"/>
+            </a:lightRig>
+          </a:scene3d>
+          <a:sp3d>
+            <a:bevelT w="63500" h="25400"/>
+          </a:sp3d>
         </a:effectStyle>
       </a:effectStyleLst>
       <a:bgFillStyleLst>
         <a:solidFill>
           <a:schemeClr val="phClr"/>
         </a:solidFill>
-        <a:solidFill>
-          <a:schemeClr val="phClr">
-            <a:tint val="95000"/>
-            <a:satMod val="170000"/>
-          </a:schemeClr>
-        </a:solidFill>
         <a:gradFill rotWithShape="1">
           <a:gsLst>
             <a:gs pos="0">
               <a:schemeClr val="phClr">
-                <a:tint val="93000"/>
-                <a:satMod val="150000"/>
-                <a:shade val="98000"/>
-                <a:lumMod val="102000"/>
+                <a:tint val="40000"/>
+                <a:satMod val="350000"/>
               </a:schemeClr>
             </a:gs>
-            <a:gs pos="50000">
+            <a:gs pos="40000">
               <a:schemeClr val="phClr">
-                <a:tint val="98000"/>
-                <a:satMod val="130000"/>
-                <a:shade val="90000"/>
-                <a:lumMod val="103000"/>
+                <a:tint val="45000"/>
+                <a:shade val="99000"/>
+                <a:satMod val="350000"/>
               </a:schemeClr>
             </a:gs>
             <a:gs pos="100000">
               <a:schemeClr val="phClr">
-                <a:shade val="63000"/>
-                <a:satMod val="120000"/>
+                <a:shade val="20000"/>
+                <a:satMod val="255000"/>
               </a:schemeClr>
             </a:gs>
           </a:gsLst>
-          <a:lin ang="5400000" scaled="0"/>
+          <a:path path="circle">
+            <a:fillToRect l="50000" t="-80000" r="50000" b="180000"/>
+          </a:path>
+        </a:gradFill>
+        <a:gradFill rotWithShape="1">
+          <a:gsLst>
+            <a:gs pos="0">
+              <a:schemeClr val="phClr">
+                <a:tint val="80000"/>
+                <a:satMod val="300000"/>
+              </a:schemeClr>
+            </a:gs>
+            <a:gs pos="100000">
+              <a:schemeClr val="phClr">
+                <a:shade val="30000"/>
+                <a:satMod val="200000"/>
+              </a:schemeClr>
+            </a:gs>
+          </a:gsLst>
+          <a:path path="circle">
+            <a:fillToRect l="50000" t="50000" r="50000" b="50000"/>
+          </a:path>
         </a:gradFill>
       </a:bgFillStyleLst>
     </a:fmtScheme>
   </a:themeElements>
   <a:objectDefaults>
+    <a:spDef>
+      <a:spPr/>
+      <a:bodyPr/>
+      <a:lstStyle/>
+      <a:style>
+        <a:lnRef idx="1">
+          <a:schemeClr val="accent1"/>
+        </a:lnRef>
+        <a:fillRef idx="3">
+          <a:schemeClr val="accent1"/>
+        </a:fillRef>
+        <a:effectRef idx="2">
+          <a:schemeClr val="accent1"/>
+        </a:effectRef>
+        <a:fontRef idx="minor">
+          <a:schemeClr val="lt1"/>
+        </a:fontRef>
+      </a:style>
+    </a:spDef>
     <a:lnDef>
       <a:spPr/>
       <a:bodyPr/>
@@ -9748,11 +9623,6 @@
     </a:lnDef>
   </a:objectDefaults>
   <a:extraClrSchemeLst/>
-  <a:extLst>
-    <a:ext uri="{05A4C25C-085E-4340-85A3-A5531E510DB2}">
-      <thm15:themeFamily xmlns:thm15="http://schemas.microsoft.com/office/thememl/2012/main" name="Office Theme" id="{2E142A2C-CD16-42D6-873A-C26D2A0506FA}" vid="{1BDDFF52-6CD6-40A5-AB3C-68EB2F1E4D0A}"/>
-    </a:ext>
-  </a:extLst>
 </a:theme>
 </file>
 
